--- a/apresentacao/APRESENTACAO.pptx
+++ b/apresentacao/APRESENTACAO.pptx
@@ -15,6 +15,8 @@
     <p:sldId id="263" r:id="rId14"/>
     <p:sldId id="264" r:id="rId15"/>
     <p:sldId id="265" r:id="rId16"/>
+    <p:sldId id="266" r:id="rId17"/>
+    <p:sldId id="267" r:id="rId18"/>
   </p:sldIdLst>
   <p:sldSz cx="12191695" cy="6858000" type="screen4x3"/>
   <p:notesSz cx="6858000" cy="9144000"/>
@@ -3300,7 +3302,7 @@
                 </a:solidFill>
                 <a:latin typeface="Calibri"/>
               </a:rPr>
-              <a:t>Aluno: Cássio Takarada   (demais integrantes: ____________)</a:t>
+              <a:t>Alunos: Cássio Takarada  ·  Cézio Luiz Ferreira Junior</a:t>
             </a:r>
           </a:p>
         </p:txBody>
@@ -3394,13 +3396,13 @@
               </a:spcAft>
             </a:pPr>
             <a:r>
-              <a:rPr sz="2400" b="1">
+              <a:rPr sz="2300" b="1">
                 <a:solidFill>
                   <a:srgbClr val="FFFFFF"/>
                 </a:solidFill>
                 <a:latin typeface="Calibri"/>
               </a:rPr>
-              <a:t>9-10. Aplicações práticas · Conclusão · Referências</a:t>
+              <a:t>8. Dificuldades · Vantagens x Desvantagens</a:t>
             </a:r>
           </a:p>
         </p:txBody>
@@ -3413,7 +3415,7 @@
         </p:nvSpPr>
         <p:spPr>
           <a:xfrm>
-            <a:off x="640080" y="1097280"/>
+            <a:off x="640080" y="1051560"/>
             <a:ext cx="10972800" cy="5303520"/>
           </a:xfrm>
           <a:prstGeom prst="rect">
@@ -3439,7 +3441,7 @@
                 </a:solidFill>
                 <a:latin typeface="Calibri"/>
               </a:rPr>
-              <a:t>•  Aplicações: índices de SGBDs (InnoDB/MySQL, PostgreSQL), sistemas de arquivos (NTFS, HFS+, ext4 HTree), key-value stores.</a:t>
+              <a:t>•  Dificuldades: indexação 1-based dos nós; ordem do path no reparo de underflow; eofbit do fstream; garantir 1 nó por I/O (nada em RAM).</a:t>
             </a:r>
           </a:p>
           <a:p>
@@ -3455,7 +3457,7 @@
                 </a:solidFill>
                 <a:latin typeface="Calibri"/>
               </a:rPr>
-              <a:t>•  Conclusão: o I/O por operação cai com m até saturar (m~64-128); o reaproveitamento economiza ~27-30% de espaço; resultados determinísticos validados em 2 máquinas.</a:t>
+              <a:t>•  Vantagens da Árvore B: altura baixa =&gt; pouquíssimos acessos a disco; sempre balanceada; ideal para memória secundária / SGBDs.</a:t>
             </a:r>
           </a:p>
           <a:p>
@@ -3471,7 +3473,7 @@
                 </a:solidFill>
                 <a:latin typeface="Calibri"/>
               </a:rPr>
-              <a:t>•  Referências:</a:t>
+              <a:t>•  Desvantagens: nós podem ficar subocupados (~50% no caso sequencial); remoção é complexa; para m muito grande, a busca dentro do nó passa a custar CPU.</a:t>
             </a:r>
           </a:p>
           <a:p>
@@ -3487,55 +3489,7 @@
                 </a:solidFill>
                 <a:latin typeface="Calibri"/>
               </a:rPr>
-              <a:t>•     - Comer, D. (1979). The Ubiquitous B-Tree. ACM Computing Surveys.</a:t>
-            </a:r>
-          </a:p>
-          <a:p>
-            <a:pPr>
-              <a:spcAft>
-                <a:spcPts val="600"/>
-              </a:spcAft>
-            </a:pPr>
-            <a:r>
-              <a:rPr sz="1600" b="0">
-                <a:solidFill>
-                  <a:srgbClr val="111827"/>
-                </a:solidFill>
-                <a:latin typeface="Calibri"/>
-              </a:rPr>
-              <a:t>•     - Knuth, D. The Art of Computer Programming, Vol. 3 - Sorting and Searching.</a:t>
-            </a:r>
-          </a:p>
-          <a:p>
-            <a:pPr>
-              <a:spcAft>
-                <a:spcPts val="600"/>
-              </a:spcAft>
-            </a:pPr>
-            <a:r>
-              <a:rPr sz="1600" b="0">
-                <a:solidFill>
-                  <a:srgbClr val="111827"/>
-                </a:solidFill>
-                <a:latin typeface="Calibri"/>
-              </a:rPr>
-              <a:t>•     - Folk, M. &amp; Zoellick, B. File Structures.</a:t>
-            </a:r>
-          </a:p>
-          <a:p>
-            <a:pPr>
-              <a:spcAft>
-                <a:spcPts val="600"/>
-              </a:spcAft>
-            </a:pPr>
-            <a:r>
-              <a:rPr sz="1600" b="0">
-                <a:solidFill>
-                  <a:srgbClr val="111827"/>
-                </a:solidFill>
-                <a:latin typeface="Calibri"/>
-              </a:rPr>
-              <a:t>•     - Baranauskas, J. A. Slides AED-PG-2026 (Árvores B).</a:t>
+              <a:t>•  Trade-off central: m maior =&gt; menos I/O, mais CPU por nó.</a:t>
             </a:r>
           </a:p>
         </p:txBody>
@@ -3548,8 +3502,8 @@
         </p:nvSpPr>
         <p:spPr>
           <a:xfrm>
-            <a:off x="457200" y="6446520"/>
-            <a:ext cx="11247120" cy="320040"/>
+            <a:off x="457200" y="6455664"/>
+            <a:ext cx="11247120" cy="310896"/>
           </a:xfrm>
           <a:prstGeom prst="rect">
             <a:avLst/>
@@ -3574,7 +3528,7 @@
                 </a:solidFill>
                 <a:latin typeface="Calibri"/>
               </a:rPr>
-              <a:t>Árvore B em Memória Secundária — AED-PG-2026          10/10</a:t>
+              <a:t>Árvore B em Memória Secundária — AED-PG-2026          10/12</a:t>
             </a:r>
           </a:p>
         </p:txBody>
@@ -3587,7 +3541,7 @@
 </p:sld>
 </file>
 
-<file path=ppt/slides/slide2.xml><?xml version="1.0" encoding="utf-8"?>
+<file path=ppt/slides/slide11.xml><?xml version="1.0" encoding="utf-8"?>
 <p:sld xmlns:a="http://schemas.openxmlformats.org/drawingml/2006/main" xmlns:p="http://schemas.openxmlformats.org/presentationml/2006/main" xmlns:r="http://schemas.openxmlformats.org/officeDocument/2006/relationships">
   <p:cSld>
     <p:spTree>
@@ -3668,13 +3622,13 @@
               </a:spcAft>
             </a:pPr>
             <a:r>
-              <a:rPr sz="2400" b="1">
+              <a:rPr sz="2300" b="1">
                 <a:solidFill>
                   <a:srgbClr val="FFFFFF"/>
                 </a:solidFill>
                 <a:latin typeface="Calibri"/>
               </a:rPr>
-              <a:t>2. Decisões de implementação</a:t>
+              <a:t>9. Aplicações práticas</a:t>
             </a:r>
           </a:p>
         </p:txBody>
@@ -3687,8 +3641,8 @@
         </p:nvSpPr>
         <p:spPr>
           <a:xfrm>
-            <a:off x="457200" y="1097280"/>
-            <a:ext cx="6400800" cy="5303520"/>
+            <a:off x="640080" y="1051560"/>
+            <a:ext cx="10972800" cy="5303520"/>
           </a:xfrm>
           <a:prstGeom prst="rect">
             <a:avLst/>
@@ -3707,13 +3661,13 @@
               </a:spcAft>
             </a:pPr>
             <a:r>
-              <a:rPr sz="1400" b="0">
+              <a:rPr sz="1600" b="0">
                 <a:solidFill>
                   <a:srgbClr val="111827"/>
                 </a:solidFill>
                 <a:latin typeface="Calibri"/>
               </a:rPr>
-              <a:t>•  Ordem m é constante simbólica de compilação (M): estrutura totalmente parametrizada.</a:t>
+              <a:t>•  Índices de SGBDs: B-tree / B+ tree são a base dos índices de MySQL/InnoDB, PostgreSQL, Oracle e SQL Server.</a:t>
             </a:r>
           </a:p>
           <a:p>
@@ -3723,13 +3677,13 @@
               </a:spcAft>
             </a:pPr>
             <a:r>
-              <a:rPr sz="1400" b="0">
+              <a:rPr sz="1600" b="0">
                 <a:solidFill>
                   <a:srgbClr val="111827"/>
                 </a:solidFill>
                 <a:latin typeface="Calibri"/>
               </a:rPr>
-              <a:t>•  Raiz da árvore: armazenada no header (registro 0) do arquivo — campo root.</a:t>
+              <a:t>•  Sistemas de arquivos: NTFS, HFS+/APFS, ext4 (HTree) e Btrfs usam B-trees para diretórios e metadados.</a:t>
             </a:r>
           </a:p>
           <a:p>
@@ -3739,13 +3693,13 @@
               </a:spcAft>
             </a:pPr>
             <a:r>
-              <a:rPr sz="1400" b="0">
+              <a:rPr sz="1600" b="0">
                 <a:solidFill>
                   <a:srgbClr val="111827"/>
                 </a:solidFill>
                 <a:latin typeface="Calibri"/>
               </a:rPr>
-              <a:t>•  Um nó por I/O: readNode/writeNode de um registro de PAGE_SIZE; a árvore NUNCA é carregada inteira em memória.</a:t>
+              <a:t>•  Armazenamento chave-valor / embarcado: BerkeleyDB, SQLite, LMDB.</a:t>
             </a:r>
           </a:p>
           <a:p>
@@ -3755,83 +3709,27 @@
               </a:spcAft>
             </a:pPr>
             <a:r>
-              <a:rPr sz="1400" b="0">
+              <a:rPr sz="1600" b="0">
                 <a:solidFill>
                   <a:srgbClr val="111827"/>
                 </a:solidFill>
                 <a:latin typeface="Calibri"/>
               </a:rPr>
-              <a:t>•  Registro do nó: n  ·  A[0..m-1] (ponteiros RRN)  ·  K[0..m-1] (chaves).</a:t>
-            </a:r>
-          </a:p>
-          <a:p>
-            <a:pPr>
-              <a:spcAft>
-                <a:spcPts val="600"/>
-              </a:spcAft>
-            </a:pPr>
-            <a:r>
-              <a:rPr sz="1400" b="0">
-                <a:solidFill>
-                  <a:srgbClr val="111827"/>
-                </a:solidFill>
-                <a:latin typeface="Calibri"/>
-              </a:rPr>
-              <a:t>•  Reaproveitamento de nós: free list encadeada no próprio arquivo (free_head no header; nó livre marca n=-1 e guarda o próximo em K[1]).</a:t>
-            </a:r>
-          </a:p>
-          <a:p>
-            <a:pPr>
-              <a:spcAft>
-                <a:spcPts val="600"/>
-              </a:spcAft>
-            </a:pPr>
-            <a:r>
-              <a:rPr sz="1400" b="0">
-                <a:solidFill>
-                  <a:srgbClr val="111827"/>
-                </a:solidFill>
-                <a:latin typeface="Calibri"/>
-              </a:rPr>
-              <a:t>•  allocNode reutiliza a free list antes de estender o arquivo.</a:t>
-            </a:r>
-          </a:p>
-        </p:txBody>
-      </p:sp>
-      <p:pic>
-        <p:nvPicPr>
-          <p:cNvPr id="5" name="Picture 4" descr="m3_final.png"/>
-          <p:cNvPicPr>
-            <a:picLocks noChangeAspect="1"/>
-          </p:cNvPicPr>
+              <a:t>•  Onde eu usaria: como índice (primário ou secundário) de um banco de dados em disco - exatamente o cenário deste trabalho.</a:t>
+            </a:r>
+          </a:p>
+        </p:txBody>
+      </p:sp>
+      <p:sp>
+        <p:nvSpPr>
+          <p:cNvPr id="5" name="TextBox 4"/>
+          <p:cNvSpPr txBox="1"/>
           <p:nvPr/>
-        </p:nvPicPr>
-        <p:blipFill>
-          <a:blip r:embed="rId2"/>
-          <a:stretch>
-            <a:fillRect/>
-          </a:stretch>
-        </p:blipFill>
+        </p:nvSpPr>
         <p:spPr>
           <a:xfrm>
-            <a:off x="7040880" y="1188720"/>
-            <a:ext cx="4846320" cy="1037339"/>
-          </a:xfrm>
-          <a:prstGeom prst="rect">
-            <a:avLst/>
-          </a:prstGeom>
-        </p:spPr>
-      </p:pic>
-      <p:sp>
-        <p:nvSpPr>
-          <p:cNvPr id="6" name="TextBox 5"/>
-          <p:cNvSpPr txBox="1"/>
-          <p:nvPr/>
-        </p:nvSpPr>
-        <p:spPr>
-          <a:xfrm>
-            <a:off x="7040880" y="2246059"/>
-            <a:ext cx="4846320" cy="365760"/>
+            <a:off x="457200" y="6455664"/>
+            <a:ext cx="11247120" cy="310896"/>
           </a:xfrm>
           <a:prstGeom prst="rect">
             <a:avLst/>
@@ -3856,46 +3754,7 @@
                 </a:solidFill>
                 <a:latin typeface="Calibri"/>
               </a:rPr>
-              <a:t>Árvore B (m=3) — 40 chaves; cada nó traz seu RRN em disco</a:t>
-            </a:r>
-          </a:p>
-        </p:txBody>
-      </p:sp>
-      <p:sp>
-        <p:nvSpPr>
-          <p:cNvPr id="7" name="TextBox 6"/>
-          <p:cNvSpPr txBox="1"/>
-          <p:nvPr/>
-        </p:nvSpPr>
-        <p:spPr>
-          <a:xfrm>
-            <a:off x="457200" y="6446520"/>
-            <a:ext cx="11247120" cy="320040"/>
-          </a:xfrm>
-          <a:prstGeom prst="rect">
-            <a:avLst/>
-          </a:prstGeom>
-          <a:noFill/>
-        </p:spPr>
-        <p:txBody>
-          <a:bodyPr wrap="square" anchor="t">
-            <a:spAutoFit/>
-          </a:bodyPr>
-          <a:lstStyle/>
-          <a:p>
-            <a:pPr>
-              <a:spcAft>
-                <a:spcPts val="600"/>
-              </a:spcAft>
-            </a:pPr>
-            <a:r>
-              <a:rPr sz="900" b="0">
-                <a:solidFill>
-                  <a:srgbClr val="6B7280"/>
-                </a:solidFill>
-                <a:latin typeface="Calibri"/>
-              </a:rPr>
-              <a:t>Árvore B em Memória Secundária — AED-PG-2026          2/10</a:t>
+              <a:t>Árvore B em Memória Secundária — AED-PG-2026          11/12</a:t>
             </a:r>
           </a:p>
         </p:txBody>
@@ -3908,7 +3767,7 @@
 </p:sld>
 </file>
 
-<file path=ppt/slides/slide3.xml><?xml version="1.0" encoding="utf-8"?>
+<file path=ppt/slides/slide12.xml><?xml version="1.0" encoding="utf-8"?>
 <p:sld xmlns:a="http://schemas.openxmlformats.org/drawingml/2006/main" xmlns:p="http://schemas.openxmlformats.org/presentationml/2006/main" xmlns:r="http://schemas.openxmlformats.org/officeDocument/2006/relationships">
   <p:cSld>
     <p:spTree>
@@ -3989,13 +3848,13 @@
               </a:spcAft>
             </a:pPr>
             <a:r>
-              <a:rPr sz="2400" b="1">
+              <a:rPr sz="2300" b="1">
                 <a:solidFill>
                   <a:srgbClr val="FFFFFF"/>
                 </a:solidFill>
                 <a:latin typeface="Calibri"/>
               </a:rPr>
-              <a:t>3. Métodos implementados</a:t>
+              <a:t>10. Conclusão e Referências</a:t>
             </a:r>
           </a:p>
         </p:txBody>
@@ -4008,7 +3867,7 @@
         </p:nvSpPr>
         <p:spPr>
           <a:xfrm>
-            <a:off x="640080" y="1097280"/>
+            <a:off x="640080" y="1051560"/>
             <a:ext cx="10972800" cy="5303520"/>
           </a:xfrm>
           <a:prstGeom prst="rect">
@@ -4034,7 +3893,7 @@
                 </a:solidFill>
                 <a:latin typeface="Calibri"/>
               </a:rPr>
-              <a:t>•  mSearch / mSearchPath - busca m-way da raiz à folha; retorna (RRN, índice, achou).</a:t>
+              <a:t>•  O I/O por operação cai com m até SATURAR (ponto ~ m=64-128): existe um m ótimo (nó dimensionado para um bloco de disco).</a:t>
             </a:r>
           </a:p>
           <a:p>
@@ -4050,7 +3909,7 @@
                 </a:solidFill>
                 <a:latin typeface="Calibri"/>
               </a:rPr>
-              <a:t>•  insertB - inserção bottom-up com propagação de split (Equação 1).</a:t>
+              <a:t>•  O reaproveitamento de nós (free list) economiza ~27-30% do tamanho do arquivo no workload de churn.</a:t>
             </a:r>
           </a:p>
           <a:p>
@@ -4066,7 +3925,7 @@
                 </a:solidFill>
                 <a:latin typeface="Calibri"/>
               </a:rPr>
-              <a:t>•  deleteB - remoção com sucessor in-order, redistribuição (empréstimo) e fusão (merge).</a:t>
+              <a:t>•  Resultados determinísticos: acessos a disco IDÊNTICOS em 2 máquinas (Notebook x Titan/USP); só o tempo varia.</a:t>
             </a:r>
           </a:p>
           <a:p>
@@ -4082,7 +3941,7 @@
                 </a:solidFill>
                 <a:latin typeface="Calibri"/>
               </a:rPr>
-              <a:t>•  Auxiliares: splitNode, insertInNode, removeFromNode, findSuccessorLeaf.</a:t>
+              <a:t>•  Referências:</a:t>
             </a:r>
           </a:p>
           <a:p>
@@ -4098,7 +3957,7 @@
                 </a:solidFill>
                 <a:latin typeface="Calibri"/>
               </a:rPr>
-              <a:t>•  Monitoramento: printTree (hierárquico), height, exportDot (Graphviz).</a:t>
+              <a:t>•     - Comer, D. (1979). The Ubiquitous B-Tree. ACM Computing Surveys.</a:t>
             </a:r>
           </a:p>
           <a:p>
@@ -4114,7 +3973,7 @@
                 </a:solidFill>
                 <a:latin typeface="Calibri"/>
               </a:rPr>
-              <a:t>•  DiskManager: readNode, writeNode, allocNode, freeNode, contador de acessos, setReuse.</a:t>
+              <a:t>•     - Knuth, D. The Art of Computer Programming, Vol. 3 - Sorting and Searching.</a:t>
             </a:r>
           </a:p>
           <a:p>
@@ -4130,7 +3989,23 @@
                 </a:solidFill>
                 <a:latin typeface="Calibri"/>
               </a:rPr>
-              <a:t>•  bench - driver experimental não interativo (CSV de métricas).</a:t>
+              <a:t>•     - Folk, M. &amp; Zoellick, B. File Structures.</a:t>
+            </a:r>
+          </a:p>
+          <a:p>
+            <a:pPr>
+              <a:spcAft>
+                <a:spcPts val="600"/>
+              </a:spcAft>
+            </a:pPr>
+            <a:r>
+              <a:rPr sz="1600" b="0">
+                <a:solidFill>
+                  <a:srgbClr val="111827"/>
+                </a:solidFill>
+                <a:latin typeface="Calibri"/>
+              </a:rPr>
+              <a:t>•     - Baranauskas, J. A. Slides AED-PG-2026 (Árvores B).</a:t>
             </a:r>
           </a:p>
         </p:txBody>
@@ -4143,8 +4018,8 @@
         </p:nvSpPr>
         <p:spPr>
           <a:xfrm>
-            <a:off x="457200" y="6446520"/>
-            <a:ext cx="11247120" cy="320040"/>
+            <a:off x="457200" y="6455664"/>
+            <a:ext cx="11247120" cy="310896"/>
           </a:xfrm>
           <a:prstGeom prst="rect">
             <a:avLst/>
@@ -4169,7 +4044,7 @@
                 </a:solidFill>
                 <a:latin typeface="Calibri"/>
               </a:rPr>
-              <a:t>Árvore B em Memória Secundária — AED-PG-2026          3/10</a:t>
+              <a:t>Árvore B em Memória Secundária — AED-PG-2026          12/12</a:t>
             </a:r>
           </a:p>
         </p:txBody>
@@ -4182,7 +4057,7 @@
 </p:sld>
 </file>
 
-<file path=ppt/slides/slide4.xml><?xml version="1.0" encoding="utf-8"?>
+<file path=ppt/slides/slide2.xml><?xml version="1.0" encoding="utf-8"?>
 <p:sld xmlns:a="http://schemas.openxmlformats.org/drawingml/2006/main" xmlns:p="http://schemas.openxmlformats.org/presentationml/2006/main" xmlns:r="http://schemas.openxmlformats.org/officeDocument/2006/relationships">
   <p:cSld>
     <p:spTree>
@@ -4263,13 +4138,13 @@
               </a:spcAft>
             </a:pPr>
             <a:r>
-              <a:rPr sz="2400" b="1">
+              <a:rPr sz="2300" b="1">
                 <a:solidFill>
                   <a:srgbClr val="FFFFFF"/>
                 </a:solidFill>
                 <a:latin typeface="Calibri"/>
               </a:rPr>
-              <a:t>4. Análises efetuadas (experimentos)</a:t>
+              <a:t>2. Decisões de implementação</a:t>
             </a:r>
           </a:p>
         </p:txBody>
@@ -4282,8 +4157,8 @@
         </p:nvSpPr>
         <p:spPr>
           <a:xfrm>
-            <a:off x="457200" y="1097280"/>
-            <a:ext cx="6400800" cy="5303520"/>
+            <a:off x="457200" y="1051560"/>
+            <a:ext cx="11247120" cy="2697480"/>
           </a:xfrm>
           <a:prstGeom prst="rect">
             <a:avLst/>
@@ -4298,104 +4173,88 @@
           <a:p>
             <a:pPr>
               <a:spcAft>
-                <a:spcPts val="600"/>
+                <a:spcPts val="500"/>
               </a:spcAft>
             </a:pPr>
             <a:r>
-              <a:rPr sz="1400" b="0">
+              <a:rPr sz="1300" b="0">
                 <a:solidFill>
                   <a:srgbClr val="111827"/>
                 </a:solidFill>
                 <a:latin typeface="Calibri"/>
               </a:rPr>
-              <a:t>•  Exp. 1 - Impacto da ordem m: m em {3,4,5,8,16,32,64,100,128,256,512,1000}, N=10^5.</a:t>
+              <a:t>•  Ordem m é constante simbólica de compilação (M): estrutura totalmente parametrizada.</a:t>
             </a:r>
           </a:p>
           <a:p>
             <a:pPr>
               <a:spcAft>
-                <a:spcPts val="600"/>
+                <a:spcPts val="500"/>
               </a:spcAft>
             </a:pPr>
             <a:r>
-              <a:rPr sz="1400" b="0">
+              <a:rPr sz="1300" b="0">
                 <a:solidFill>
                   <a:srgbClr val="111827"/>
                 </a:solidFill>
                 <a:latin typeface="Calibri"/>
               </a:rPr>
-              <a:t>•  Exp. 2 - Escala do conjunto: N em {10^3,10^4,10^5,10^6}, m em {3,100,1000}.</a:t>
+              <a:t>•  Raiz da árvore: armazenada no header (registro 0) do arquivo — campo root.</a:t>
             </a:r>
           </a:p>
           <a:p>
             <a:pPr>
               <a:spcAft>
-                <a:spcPts val="600"/>
+                <a:spcPts val="500"/>
               </a:spcAft>
             </a:pPr>
             <a:r>
-              <a:rPr sz="1400" b="0">
+              <a:rPr sz="1300" b="0">
                 <a:solidFill>
                   <a:srgbClr val="111827"/>
                 </a:solidFill>
                 <a:latin typeface="Calibri"/>
               </a:rPr>
-              <a:t>•  Exp. 3 - Ocupação do arquivo: workload de churn COM e SEM reaproveitamento.</a:t>
+              <a:t>•  Um nó por I/O: readNode/writeNode de um registro de PAGE_SIZE; a árvore NUNCA é carregada inteira em memória.</a:t>
             </a:r>
           </a:p>
           <a:p>
             <a:pPr>
               <a:spcAft>
-                <a:spcPts val="600"/>
+                <a:spcPts val="500"/>
               </a:spcAft>
             </a:pPr>
             <a:r>
-              <a:rPr sz="1400" b="0">
+              <a:rPr sz="1300" b="0">
                 <a:solidFill>
                   <a:srgbClr val="111827"/>
                 </a:solidFill>
                 <a:latin typeface="Calibri"/>
               </a:rPr>
-              <a:t>•  Exp. 4 - Tempo de execução: CPU (user+sys) vs espera de I/O (getrusage).</a:t>
+              <a:t>•  Registro do nó: n  ·  A[0..m-1] (ponteiros RRN)  ·  K[0..m-1] (chaves).</a:t>
             </a:r>
           </a:p>
           <a:p>
             <a:pPr>
               <a:spcAft>
-                <a:spcPts val="600"/>
+                <a:spcPts val="500"/>
               </a:spcAft>
             </a:pPr>
             <a:r>
-              <a:rPr sz="1400" b="0">
+              <a:rPr sz="1300" b="0">
                 <a:solidFill>
                   <a:srgbClr val="111827"/>
                 </a:solidFill>
                 <a:latin typeface="Calibri"/>
               </a:rPr>
-              <a:t>•  Modos aleatório e sequencial em todos os experimentos.</a:t>
-            </a:r>
-          </a:p>
-          <a:p>
-            <a:pPr>
-              <a:spcAft>
-                <a:spcPts val="600"/>
-              </a:spcAft>
-            </a:pPr>
-            <a:r>
-              <a:rPr sz="1400" b="0">
-                <a:solidFill>
-                  <a:srgbClr val="111827"/>
-                </a:solidFill>
-                <a:latin typeface="Calibri"/>
-              </a:rPr>
-              <a:t>•  Novidade: validação cruzada em 2 máquinas (Notebook x Titan/USP) - métricas de disco idênticas.</a:t>
+              <a:t>•  Reaproveitamento de nós: estrutura = lista encadeada de livres (pilha LIFO) no próprio arquivo - free_head no header; cada nó livre marca n=-1 e aponta o próximo em K[1]; allocNode reusa antes de estender o arquivo.</a:t>
             </a:r>
           </a:p>
         </p:txBody>
       </p:sp>
       <p:pic>
         <p:nvPicPr>
-          <p:cNvPr id="5" name="Picture 4" descr="chart_io_vs_N.png"/>
+          <p:cNvPr id="5" name="Picture 4" descr="m3_final.png"/>
           <p:cNvPicPr>
             <a:picLocks noChangeAspect="1"/>
           </p:cNvPicPr>
@@ -4409,8 +4268,8 @@
         </p:blipFill>
         <p:spPr>
           <a:xfrm>
-            <a:off x="7040880" y="1188720"/>
-            <a:ext cx="4846320" cy="2827020"/>
+            <a:off x="457200" y="3840480"/>
+            <a:ext cx="11247120" cy="2407410"/>
           </a:xfrm>
           <a:prstGeom prst="rect">
             <a:avLst/>
@@ -4425,8 +4284,8 @@
         </p:nvSpPr>
         <p:spPr>
           <a:xfrm>
-            <a:off x="457200" y="6446520"/>
-            <a:ext cx="11247120" cy="320040"/>
+            <a:off x="457200" y="6277890"/>
+            <a:ext cx="11247120" cy="365760"/>
           </a:xfrm>
           <a:prstGeom prst="rect">
             <a:avLst/>
@@ -4451,7 +4310,46 @@
                 </a:solidFill>
                 <a:latin typeface="Calibri"/>
               </a:rPr>
-              <a:t>Árvore B em Memória Secundária — AED-PG-2026          4/10</a:t>
+              <a:t>Árvore B (m=3) com 40 chaves — exportada do nosso código (Graphviz); cada caixa mostra o RRN do nó em disco</a:t>
+            </a:r>
+          </a:p>
+        </p:txBody>
+      </p:sp>
+      <p:sp>
+        <p:nvSpPr>
+          <p:cNvPr id="7" name="TextBox 6"/>
+          <p:cNvSpPr txBox="1"/>
+          <p:nvPr/>
+        </p:nvSpPr>
+        <p:spPr>
+          <a:xfrm>
+            <a:off x="457200" y="6455664"/>
+            <a:ext cx="11247120" cy="310896"/>
+          </a:xfrm>
+          <a:prstGeom prst="rect">
+            <a:avLst/>
+          </a:prstGeom>
+          <a:noFill/>
+        </p:spPr>
+        <p:txBody>
+          <a:bodyPr wrap="square" anchor="t">
+            <a:spAutoFit/>
+          </a:bodyPr>
+          <a:lstStyle/>
+          <a:p>
+            <a:pPr>
+              <a:spcAft>
+                <a:spcPts val="600"/>
+              </a:spcAft>
+            </a:pPr>
+            <a:r>
+              <a:rPr sz="900" b="0">
+                <a:solidFill>
+                  <a:srgbClr val="6B7280"/>
+                </a:solidFill>
+                <a:latin typeface="Calibri"/>
+              </a:rPr>
+              <a:t>Árvore B em Memória Secundária — AED-PG-2026          2/12</a:t>
             </a:r>
           </a:p>
         </p:txBody>
@@ -4464,7 +4362,7 @@
 </p:sld>
 </file>
 
-<file path=ppt/slides/slide5.xml><?xml version="1.0" encoding="utf-8"?>
+<file path=ppt/slides/slide3.xml><?xml version="1.0" encoding="utf-8"?>
 <p:sld xmlns:a="http://schemas.openxmlformats.org/drawingml/2006/main" xmlns:p="http://schemas.openxmlformats.org/presentationml/2006/main" xmlns:r="http://schemas.openxmlformats.org/officeDocument/2006/relationships">
   <p:cSld>
     <p:spTree>
@@ -4545,13 +4443,13 @@
               </a:spcAft>
             </a:pPr>
             <a:r>
-              <a:rPr sz="2400" b="1">
+              <a:rPr sz="2300" b="1">
                 <a:solidFill>
                   <a:srgbClr val="FFFFFF"/>
                 </a:solidFill>
                 <a:latin typeface="Calibri"/>
               </a:rPr>
-              <a:t>5. Métricas utilizadas</a:t>
+              <a:t>3. Métodos implementados</a:t>
             </a:r>
           </a:p>
         </p:txBody>
@@ -4564,8 +4462,8 @@
         </p:nvSpPr>
         <p:spPr>
           <a:xfrm>
-            <a:off x="457200" y="1097280"/>
-            <a:ext cx="6400800" cy="5303520"/>
+            <a:off x="640080" y="1051560"/>
+            <a:ext cx="10972800" cy="5303520"/>
           </a:xfrm>
           <a:prstGeom prst="rect">
             <a:avLst/>
@@ -4584,13 +4482,13 @@
               </a:spcAft>
             </a:pPr>
             <a:r>
-              <a:rPr sz="1400" b="0">
+              <a:rPr sz="1600" b="0">
                 <a:solidFill>
                   <a:srgbClr val="111827"/>
                 </a:solidFill>
                 <a:latin typeface="Calibri"/>
               </a:rPr>
-              <a:t>•  Acessos ao disco - contador de readNode+writeNode; total e média por operação (a métrica honesta de I/O).</a:t>
+              <a:t>•  mSearch / mSearchPath - busca m-way da raiz à folha; retorna (RRN, índice, achou).</a:t>
             </a:r>
           </a:p>
           <a:p>
@@ -4600,13 +4498,13 @@
               </a:spcAft>
             </a:pPr>
             <a:r>
-              <a:rPr sz="1400" b="0">
+              <a:rPr sz="1600" b="0">
                 <a:solidFill>
                   <a:srgbClr val="111827"/>
                 </a:solidFill>
                 <a:latin typeface="Calibri"/>
               </a:rPr>
-              <a:t>•  Altura da árvore - nº de níveis (~ log_m N).</a:t>
+              <a:t>•  insertB - inserção bottom-up com propagação de split (Equação 1).</a:t>
             </a:r>
           </a:p>
           <a:p>
@@ -4616,13 +4514,13 @@
               </a:spcAft>
             </a:pPr>
             <a:r>
-              <a:rPr sz="1400" b="0">
+              <a:rPr sz="1600" b="0">
                 <a:solidFill>
                   <a:srgbClr val="111827"/>
                 </a:solidFill>
                 <a:latin typeface="Calibri"/>
               </a:rPr>
-              <a:t>•  Ocupação do arquivo - nós físicos (total_nodes), nós livres (free_nodes) e tamanho em bytes.</a:t>
+              <a:t>•  deleteB - remoção com sucessor in-order, redistribuição (empréstimo) e fusão (merge).</a:t>
             </a:r>
           </a:p>
           <a:p>
@@ -4632,13 +4530,13 @@
               </a:spcAft>
             </a:pPr>
             <a:r>
-              <a:rPr sz="1400" b="0">
+              <a:rPr sz="1600" b="0">
                 <a:solidFill>
                   <a:srgbClr val="111827"/>
                 </a:solidFill>
                 <a:latin typeface="Calibri"/>
               </a:rPr>
-              <a:t>•  Tempo de parede (wall) - relógio de alta resolução.</a:t>
+              <a:t>•  Auxiliares: splitNode, insertInNode, removeFromNode, findSuccessorLeaf.</a:t>
             </a:r>
           </a:p>
           <a:p>
@@ -4648,13 +4546,13 @@
               </a:spcAft>
             </a:pPr>
             <a:r>
-              <a:rPr sz="1400" b="0">
+              <a:rPr sz="1600" b="0">
                 <a:solidFill>
                   <a:srgbClr val="111827"/>
                 </a:solidFill>
                 <a:latin typeface="Calibri"/>
               </a:rPr>
-              <a:t>•  Tempo de CPU - usuário (lógica) e sistema (syscalls de I/O), via getrusage.</a:t>
+              <a:t>•  Monitoramento: printTree (hierárquico), height, exportDot (Graphviz).</a:t>
             </a:r>
           </a:p>
           <a:p>
@@ -4664,51 +4562,43 @@
               </a:spcAft>
             </a:pPr>
             <a:r>
-              <a:rPr sz="1400" b="0">
+              <a:rPr sz="1600" b="0">
                 <a:solidFill>
                   <a:srgbClr val="111827"/>
                 </a:solidFill>
                 <a:latin typeface="Calibri"/>
               </a:rPr>
-              <a:t>•  Espera de I/O - wall menos CPU.</a:t>
-            </a:r>
-          </a:p>
-        </p:txBody>
-      </p:sp>
-      <p:pic>
-        <p:nvPicPr>
-          <p:cNvPr id="5" name="Picture 4" descr="chart_height_vs_m.png"/>
-          <p:cNvPicPr>
-            <a:picLocks noChangeAspect="1"/>
-          </p:cNvPicPr>
+              <a:t>•  DiskManager: readNode, writeNode, allocNode, freeNode, contador de acessos, setReuse.</a:t>
+            </a:r>
+          </a:p>
+          <a:p>
+            <a:pPr>
+              <a:spcAft>
+                <a:spcPts val="600"/>
+              </a:spcAft>
+            </a:pPr>
+            <a:r>
+              <a:rPr sz="1600" b="0">
+                <a:solidFill>
+                  <a:srgbClr val="111827"/>
+                </a:solidFill>
+                <a:latin typeface="Calibri"/>
+              </a:rPr>
+              <a:t>•  bench - driver experimental não interativo (CSV de métricas).</a:t>
+            </a:r>
+          </a:p>
+        </p:txBody>
+      </p:sp>
+      <p:sp>
+        <p:nvSpPr>
+          <p:cNvPr id="5" name="TextBox 4"/>
+          <p:cNvSpPr txBox="1"/>
           <p:nvPr/>
-        </p:nvPicPr>
-        <p:blipFill>
-          <a:blip r:embed="rId2"/>
-          <a:stretch>
-            <a:fillRect/>
-          </a:stretch>
-        </p:blipFill>
+        </p:nvSpPr>
         <p:spPr>
           <a:xfrm>
-            <a:off x="7040880" y="1188720"/>
-            <a:ext cx="4846320" cy="2827020"/>
-          </a:xfrm>
-          <a:prstGeom prst="rect">
-            <a:avLst/>
-          </a:prstGeom>
-        </p:spPr>
-      </p:pic>
-      <p:sp>
-        <p:nvSpPr>
-          <p:cNvPr id="6" name="TextBox 5"/>
-          <p:cNvSpPr txBox="1"/>
-          <p:nvPr/>
-        </p:nvSpPr>
-        <p:spPr>
-          <a:xfrm>
-            <a:off x="457200" y="6446520"/>
-            <a:ext cx="11247120" cy="320040"/>
+            <a:off x="457200" y="6455664"/>
+            <a:ext cx="11247120" cy="310896"/>
           </a:xfrm>
           <a:prstGeom prst="rect">
             <a:avLst/>
@@ -4733,7 +4623,7 @@
                 </a:solidFill>
                 <a:latin typeface="Calibri"/>
               </a:rPr>
-              <a:t>Árvore B em Memória Secundária — AED-PG-2026          5/10</a:t>
+              <a:t>Árvore B em Memória Secundária — AED-PG-2026          3/12</a:t>
             </a:r>
           </a:p>
         </p:txBody>
@@ -4746,7 +4636,7 @@
 </p:sld>
 </file>
 
-<file path=ppt/slides/slide6.xml><?xml version="1.0" encoding="utf-8"?>
+<file path=ppt/slides/slide4.xml><?xml version="1.0" encoding="utf-8"?>
 <p:sld xmlns:a="http://schemas.openxmlformats.org/drawingml/2006/main" xmlns:p="http://schemas.openxmlformats.org/presentationml/2006/main" xmlns:r="http://schemas.openxmlformats.org/officeDocument/2006/relationships">
   <p:cSld>
     <p:spTree>
@@ -4827,1823 +4717,27 @@
               </a:spcAft>
             </a:pPr>
             <a:r>
-              <a:rPr sz="2400" b="1">
+              <a:rPr sz="2300" b="1">
                 <a:solidFill>
                   <a:srgbClr val="FFFFFF"/>
                 </a:solidFill>
                 <a:latin typeface="Calibri"/>
               </a:rPr>
-              <a:t>6. Tabela de Resultados - impacto de m (N=10^5, aleatório)</a:t>
-            </a:r>
-          </a:p>
-        </p:txBody>
-      </p:sp>
-      <p:graphicFrame>
-        <p:nvGraphicFramePr>
-          <p:cNvPr id="4" name="Table 3"/>
-          <p:cNvGraphicFramePr>
-            <a:graphicFrameLocks noGrp="1"/>
-          </p:cNvGraphicFramePr>
+              <a:t>Resumo — tudo que o código faz (núcleo + extras)</a:t>
+            </a:r>
+          </a:p>
+        </p:txBody>
+      </p:sp>
+      <p:sp>
+        <p:nvSpPr>
+          <p:cNvPr id="4" name="TextBox 3"/>
+          <p:cNvSpPr txBox="1"/>
           <p:nvPr/>
-        </p:nvGraphicFramePr>
-        <p:xfrm>
-          <a:off x="365760" y="1097280"/>
-          <a:ext cx="5760720" cy="4754880"/>
-        </p:xfrm>
-        <a:graphic>
-          <a:graphicData uri="http://schemas.openxmlformats.org/drawingml/2006/table">
-            <a:tbl>
-              <a:tblPr firstRow="1" bandRow="1">
-                <a:tableStyleId>{5C22544A-7EE6-4342-B048-85BDC9FD1C3A}</a:tableStyleId>
-              </a:tblPr>
-              <a:tblGrid>
-                <a:gridCol w="960120"/>
-                <a:gridCol w="960120"/>
-                <a:gridCol w="960120"/>
-                <a:gridCol w="960120"/>
-                <a:gridCol w="960120"/>
-                <a:gridCol w="960120"/>
-              </a:tblGrid>
-              <a:tr h="365760">
-                <a:tc>
-                  <a:txBody>
-                    <a:bodyPr/>
-                    <a:lstStyle/>
-                    <a:p>
-                      <a:pPr algn="ctr"/>
-                      <a:r>
-                        <a:rPr sz="1100" b="1">
-                          <a:solidFill>
-                            <a:srgbClr val="FFFFFF"/>
-                          </a:solidFill>
-                        </a:rPr>
-                        <a:t>m</a:t>
-                      </a:r>
-                    </a:p>
-                  </a:txBody>
-                  <a:tcPr>
-                    <a:solidFill>
-                      <a:srgbClr val="1D4ED8"/>
-                    </a:solidFill>
-                  </a:tcPr>
-                </a:tc>
-                <a:tc>
-                  <a:txBody>
-                    <a:bodyPr/>
-                    <a:lstStyle/>
-                    <a:p>
-                      <a:pPr algn="ctr"/>
-                      <a:r>
-                        <a:rPr sz="1100" b="1">
-                          <a:solidFill>
-                            <a:srgbClr val="FFFFFF"/>
-                          </a:solidFill>
-                        </a:rPr>
-                        <a:t>altura</a:t>
-                      </a:r>
-                    </a:p>
-                  </a:txBody>
-                  <a:tcPr>
-                    <a:solidFill>
-                      <a:srgbClr val="1D4ED8"/>
-                    </a:solidFill>
-                  </a:tcPr>
-                </a:tc>
-                <a:tc>
-                  <a:txBody>
-                    <a:bodyPr/>
-                    <a:lstStyle/>
-                    <a:p>
-                      <a:pPr algn="ctr"/>
-                      <a:r>
-                        <a:rPr sz="1100" b="1">
-                          <a:solidFill>
-                            <a:srgbClr val="FFFFFF"/>
-                          </a:solidFill>
-                        </a:rPr>
-                        <a:t>busca I/O/op</a:t>
-                      </a:r>
-                    </a:p>
-                  </a:txBody>
-                  <a:tcPr>
-                    <a:solidFill>
-                      <a:srgbClr val="1D4ED8"/>
-                    </a:solidFill>
-                  </a:tcPr>
-                </a:tc>
-                <a:tc>
-                  <a:txBody>
-                    <a:bodyPr/>
-                    <a:lstStyle/>
-                    <a:p>
-                      <a:pPr algn="ctr"/>
-                      <a:r>
-                        <a:rPr sz="1100" b="1">
-                          <a:solidFill>
-                            <a:srgbClr val="FFFFFF"/>
-                          </a:solidFill>
-                        </a:rPr>
-                        <a:t>inser. I/O/op</a:t>
-                      </a:r>
-                    </a:p>
-                  </a:txBody>
-                  <a:tcPr>
-                    <a:solidFill>
-                      <a:srgbClr val="1D4ED8"/>
-                    </a:solidFill>
-                  </a:tcPr>
-                </a:tc>
-                <a:tc>
-                  <a:txBody>
-                    <a:bodyPr/>
-                    <a:lstStyle/>
-                    <a:p>
-                      <a:pPr algn="ctr"/>
-                      <a:r>
-                        <a:rPr sz="1100" b="1">
-                          <a:solidFill>
-                            <a:srgbClr val="FFFFFF"/>
-                          </a:solidFill>
-                        </a:rPr>
-                        <a:t>rem. I/O/op</a:t>
-                      </a:r>
-                    </a:p>
-                  </a:txBody>
-                  <a:tcPr>
-                    <a:solidFill>
-                      <a:srgbClr val="1D4ED8"/>
-                    </a:solidFill>
-                  </a:tcPr>
-                </a:tc>
-                <a:tc>
-                  <a:txBody>
-                    <a:bodyPr/>
-                    <a:lstStyle/>
-                    <a:p>
-                      <a:pPr algn="ctr"/>
-                      <a:r>
-                        <a:rPr sz="1100" b="1">
-                          <a:solidFill>
-                            <a:srgbClr val="FFFFFF"/>
-                          </a:solidFill>
-                        </a:rPr>
-                        <a:t>arquivo (KB)</a:t>
-                      </a:r>
-                    </a:p>
-                  </a:txBody>
-                  <a:tcPr>
-                    <a:solidFill>
-                      <a:srgbClr val="1D4ED8"/>
-                    </a:solidFill>
-                  </a:tcPr>
-                </a:tc>
-              </a:tr>
-              <a:tr h="365760">
-                <a:tc>
-                  <a:txBody>
-                    <a:bodyPr/>
-                    <a:lstStyle/>
-                    <a:p>
-                      <a:pPr algn="l"/>
-                      <a:r>
-                        <a:rPr sz="1000">
-                          <a:solidFill>
-                            <a:srgbClr val="111827"/>
-                          </a:solidFill>
-                        </a:rPr>
-                        <a:t>3</a:t>
-                      </a:r>
-                    </a:p>
-                  </a:txBody>
-                  <a:tcPr>
-                    <a:solidFill>
-                      <a:srgbClr val="FFFFFF"/>
-                    </a:solidFill>
-                  </a:tcPr>
-                </a:tc>
-                <a:tc>
-                  <a:txBody>
-                    <a:bodyPr/>
-                    <a:lstStyle/>
-                    <a:p>
-                      <a:pPr algn="ctr"/>
-                      <a:r>
-                        <a:rPr sz="1000">
-                          <a:solidFill>
-                            <a:srgbClr val="111827"/>
-                          </a:solidFill>
-                        </a:rPr>
-                        <a:t>14</a:t>
-                      </a:r>
-                    </a:p>
-                  </a:txBody>
-                  <a:tcPr>
-                    <a:solidFill>
-                      <a:srgbClr val="FFFFFF"/>
-                    </a:solidFill>
-                  </a:tcPr>
-                </a:tc>
-                <a:tc>
-                  <a:txBody>
-                    <a:bodyPr/>
-                    <a:lstStyle/>
-                    <a:p>
-                      <a:pPr algn="ctr"/>
-                      <a:r>
-                        <a:rPr sz="1000">
-                          <a:solidFill>
-                            <a:srgbClr val="111827"/>
-                          </a:solidFill>
-                        </a:rPr>
-                        <a:t>13.25</a:t>
-                      </a:r>
-                    </a:p>
-                  </a:txBody>
-                  <a:tcPr>
-                    <a:solidFill>
-                      <a:srgbClr val="FFFFFF"/>
-                    </a:solidFill>
-                  </a:tcPr>
-                </a:tc>
-                <a:tc>
-                  <a:txBody>
-                    <a:bodyPr/>
-                    <a:lstStyle/>
-                    <a:p>
-                      <a:pPr algn="ctr"/>
-                      <a:r>
-                        <a:rPr sz="1000">
-                          <a:solidFill>
-                            <a:srgbClr val="111827"/>
-                          </a:solidFill>
-                        </a:rPr>
-                        <a:t>16.90</a:t>
-                      </a:r>
-                    </a:p>
-                  </a:txBody>
-                  <a:tcPr>
-                    <a:solidFill>
-                      <a:srgbClr val="FFFFFF"/>
-                    </a:solidFill>
-                  </a:tcPr>
-                </a:tc>
-                <a:tc>
-                  <a:txBody>
-                    <a:bodyPr/>
-                    <a:lstStyle/>
-                    <a:p>
-                      <a:pPr algn="ctr"/>
-                      <a:r>
-                        <a:rPr sz="1000">
-                          <a:solidFill>
-                            <a:srgbClr val="111827"/>
-                          </a:solidFill>
-                        </a:rPr>
-                        <a:t>19.67</a:t>
-                      </a:r>
-                    </a:p>
-                  </a:txBody>
-                  <a:tcPr>
-                    <a:solidFill>
-                      <a:srgbClr val="FFFFFF"/>
-                    </a:solidFill>
-                  </a:tcPr>
-                </a:tc>
-                <a:tc>
-                  <a:txBody>
-                    <a:bodyPr/>
-                    <a:lstStyle/>
-                    <a:p>
-                      <a:pPr algn="ctr"/>
-                      <a:r>
-                        <a:rPr sz="1000">
-                          <a:solidFill>
-                            <a:srgbClr val="111827"/>
-                          </a:solidFill>
-                        </a:rPr>
-                        <a:t>2,040</a:t>
-                      </a:r>
-                    </a:p>
-                  </a:txBody>
-                  <a:tcPr>
-                    <a:solidFill>
-                      <a:srgbClr val="FFFFFF"/>
-                    </a:solidFill>
-                  </a:tcPr>
-                </a:tc>
-              </a:tr>
-              <a:tr h="365760">
-                <a:tc>
-                  <a:txBody>
-                    <a:bodyPr/>
-                    <a:lstStyle/>
-                    <a:p>
-                      <a:pPr algn="l"/>
-                      <a:r>
-                        <a:rPr sz="1000">
-                          <a:solidFill>
-                            <a:srgbClr val="111827"/>
-                          </a:solidFill>
-                        </a:rPr>
-                        <a:t>4</a:t>
-                      </a:r>
-                    </a:p>
-                  </a:txBody>
-                  <a:tcPr>
-                    <a:solidFill>
-                      <a:srgbClr val="EEF2FF"/>
-                    </a:solidFill>
-                  </a:tcPr>
-                </a:tc>
-                <a:tc>
-                  <a:txBody>
-                    <a:bodyPr/>
-                    <a:lstStyle/>
-                    <a:p>
-                      <a:pPr algn="ctr"/>
-                      <a:r>
-                        <a:rPr sz="1000">
-                          <a:solidFill>
-                            <a:srgbClr val="111827"/>
-                          </a:solidFill>
-                        </a:rPr>
-                        <a:t>11</a:t>
-                      </a:r>
-                    </a:p>
-                  </a:txBody>
-                  <a:tcPr>
-                    <a:solidFill>
-                      <a:srgbClr val="EEF2FF"/>
-                    </a:solidFill>
-                  </a:tcPr>
-                </a:tc>
-                <a:tc>
-                  <a:txBody>
-                    <a:bodyPr/>
-                    <a:lstStyle/>
-                    <a:p>
-                      <a:pPr algn="ctr"/>
-                      <a:r>
-                        <a:rPr sz="1000">
-                          <a:solidFill>
-                            <a:srgbClr val="111827"/>
-                          </a:solidFill>
-                        </a:rPr>
-                        <a:t>10.48</a:t>
-                      </a:r>
-                    </a:p>
-                  </a:txBody>
-                  <a:tcPr>
-                    <a:solidFill>
-                      <a:srgbClr val="EEF2FF"/>
-                    </a:solidFill>
-                  </a:tcPr>
-                </a:tc>
-                <a:tc>
-                  <a:txBody>
-                    <a:bodyPr/>
-                    <a:lstStyle/>
-                    <a:p>
-                      <a:pPr algn="ctr"/>
-                      <a:r>
-                        <a:rPr sz="1000">
-                          <a:solidFill>
-                            <a:srgbClr val="111827"/>
-                          </a:solidFill>
-                        </a:rPr>
-                        <a:t>13.51</a:t>
-                      </a:r>
-                    </a:p>
-                  </a:txBody>
-                  <a:tcPr>
-                    <a:solidFill>
-                      <a:srgbClr val="EEF2FF"/>
-                    </a:solidFill>
-                  </a:tcPr>
-                </a:tc>
-                <a:tc>
-                  <a:txBody>
-                    <a:bodyPr/>
-                    <a:lstStyle/>
-                    <a:p>
-                      <a:pPr algn="ctr"/>
-                      <a:r>
-                        <a:rPr sz="1000">
-                          <a:solidFill>
-                            <a:srgbClr val="111827"/>
-                          </a:solidFill>
-                        </a:rPr>
-                        <a:t>16.76</a:t>
-                      </a:r>
-                    </a:p>
-                  </a:txBody>
-                  <a:tcPr>
-                    <a:solidFill>
-                      <a:srgbClr val="EEF2FF"/>
-                    </a:solidFill>
-                  </a:tcPr>
-                </a:tc>
-                <a:tc>
-                  <a:txBody>
-                    <a:bodyPr/>
-                    <a:lstStyle/>
-                    <a:p>
-                      <a:pPr algn="ctr"/>
-                      <a:r>
-                        <a:rPr sz="1000">
-                          <a:solidFill>
-                            <a:srgbClr val="111827"/>
-                          </a:solidFill>
-                        </a:rPr>
-                        <a:t>1,829</a:t>
-                      </a:r>
-                    </a:p>
-                  </a:txBody>
-                  <a:tcPr>
-                    <a:solidFill>
-                      <a:srgbClr val="EEF2FF"/>
-                    </a:solidFill>
-                  </a:tcPr>
-                </a:tc>
-              </a:tr>
-              <a:tr h="365760">
-                <a:tc>
-                  <a:txBody>
-                    <a:bodyPr/>
-                    <a:lstStyle/>
-                    <a:p>
-                      <a:pPr algn="l"/>
-                      <a:r>
-                        <a:rPr sz="1000">
-                          <a:solidFill>
-                            <a:srgbClr val="111827"/>
-                          </a:solidFill>
-                        </a:rPr>
-                        <a:t>5</a:t>
-                      </a:r>
-                    </a:p>
-                  </a:txBody>
-                  <a:tcPr>
-                    <a:solidFill>
-                      <a:srgbClr val="FFFFFF"/>
-                    </a:solidFill>
-                  </a:tcPr>
-                </a:tc>
-                <a:tc>
-                  <a:txBody>
-                    <a:bodyPr/>
-                    <a:lstStyle/>
-                    <a:p>
-                      <a:pPr algn="ctr"/>
-                      <a:r>
-                        <a:rPr sz="1000">
-                          <a:solidFill>
-                            <a:srgbClr val="111827"/>
-                          </a:solidFill>
-                        </a:rPr>
-                        <a:t>9</a:t>
-                      </a:r>
-                    </a:p>
-                  </a:txBody>
-                  <a:tcPr>
-                    <a:solidFill>
-                      <a:srgbClr val="FFFFFF"/>
-                    </a:solidFill>
-                  </a:tcPr>
-                </a:tc>
-                <a:tc>
-                  <a:txBody>
-                    <a:bodyPr/>
-                    <a:lstStyle/>
-                    <a:p>
-                      <a:pPr algn="ctr"/>
-                      <a:r>
-                        <a:rPr sz="1000">
-                          <a:solidFill>
-                            <a:srgbClr val="111827"/>
-                          </a:solidFill>
-                        </a:rPr>
-                        <a:t>8.63</a:t>
-                      </a:r>
-                    </a:p>
-                  </a:txBody>
-                  <a:tcPr>
-                    <a:solidFill>
-                      <a:srgbClr val="FFFFFF"/>
-                    </a:solidFill>
-                  </a:tcPr>
-                </a:tc>
-                <a:tc>
-                  <a:txBody>
-                    <a:bodyPr/>
-                    <a:lstStyle/>
-                    <a:p>
-                      <a:pPr algn="ctr"/>
-                      <a:r>
-                        <a:rPr sz="1000">
-                          <a:solidFill>
-                            <a:srgbClr val="111827"/>
-                          </a:solidFill>
-                        </a:rPr>
-                        <a:t>11.50</a:t>
-                      </a:r>
-                    </a:p>
-                  </a:txBody>
-                  <a:tcPr>
-                    <a:solidFill>
-                      <a:srgbClr val="FFFFFF"/>
-                    </a:solidFill>
-                  </a:tcPr>
-                </a:tc>
-                <a:tc>
-                  <a:txBody>
-                    <a:bodyPr/>
-                    <a:lstStyle/>
-                    <a:p>
-                      <a:pPr algn="ctr"/>
-                      <a:r>
-                        <a:rPr sz="1000">
-                          <a:solidFill>
-                            <a:srgbClr val="111827"/>
-                          </a:solidFill>
-                        </a:rPr>
-                        <a:t>13.52</a:t>
-                      </a:r>
-                    </a:p>
-                  </a:txBody>
-                  <a:tcPr>
-                    <a:solidFill>
-                      <a:srgbClr val="FFFFFF"/>
-                    </a:solidFill>
-                  </a:tcPr>
-                </a:tc>
-                <a:tc>
-                  <a:txBody>
-                    <a:bodyPr/>
-                    <a:lstStyle/>
-                    <a:p>
-                      <a:pPr algn="ctr"/>
-                      <a:r>
-                        <a:rPr sz="1000">
-                          <a:solidFill>
-                            <a:srgbClr val="111827"/>
-                          </a:solidFill>
-                        </a:rPr>
-                        <a:t>1,589</a:t>
-                      </a:r>
-                    </a:p>
-                  </a:txBody>
-                  <a:tcPr>
-                    <a:solidFill>
-                      <a:srgbClr val="FFFFFF"/>
-                    </a:solidFill>
-                  </a:tcPr>
-                </a:tc>
-              </a:tr>
-              <a:tr h="365760">
-                <a:tc>
-                  <a:txBody>
-                    <a:bodyPr/>
-                    <a:lstStyle/>
-                    <a:p>
-                      <a:pPr algn="l"/>
-                      <a:r>
-                        <a:rPr sz="1000">
-                          <a:solidFill>
-                            <a:srgbClr val="111827"/>
-                          </a:solidFill>
-                        </a:rPr>
-                        <a:t>8</a:t>
-                      </a:r>
-                    </a:p>
-                  </a:txBody>
-                  <a:tcPr>
-                    <a:solidFill>
-                      <a:srgbClr val="EEF2FF"/>
-                    </a:solidFill>
-                  </a:tcPr>
-                </a:tc>
-                <a:tc>
-                  <a:txBody>
-                    <a:bodyPr/>
-                    <a:lstStyle/>
-                    <a:p>
-                      <a:pPr algn="ctr"/>
-                      <a:r>
-                        <a:rPr sz="1000">
-                          <a:solidFill>
-                            <a:srgbClr val="111827"/>
-                          </a:solidFill>
-                        </a:rPr>
-                        <a:t>7</a:t>
-                      </a:r>
-                    </a:p>
-                  </a:txBody>
-                  <a:tcPr>
-                    <a:solidFill>
-                      <a:srgbClr val="EEF2FF"/>
-                    </a:solidFill>
-                  </a:tcPr>
-                </a:tc>
-                <a:tc>
-                  <a:txBody>
-                    <a:bodyPr/>
-                    <a:lstStyle/>
-                    <a:p>
-                      <a:pPr algn="ctr"/>
-                      <a:r>
-                        <a:rPr sz="1000">
-                          <a:solidFill>
-                            <a:srgbClr val="111827"/>
-                          </a:solidFill>
-                        </a:rPr>
-                        <a:t>6.79</a:t>
-                      </a:r>
-                    </a:p>
-                  </a:txBody>
-                  <a:tcPr>
-                    <a:solidFill>
-                      <a:srgbClr val="EEF2FF"/>
-                    </a:solidFill>
-                  </a:tcPr>
-                </a:tc>
-                <a:tc>
-                  <a:txBody>
-                    <a:bodyPr/>
-                    <a:lstStyle/>
-                    <a:p>
-                      <a:pPr algn="ctr"/>
-                      <a:r>
-                        <a:rPr sz="1000">
-                          <a:solidFill>
-                            <a:srgbClr val="111827"/>
-                          </a:solidFill>
-                        </a:rPr>
-                        <a:t>9.05</a:t>
-                      </a:r>
-                    </a:p>
-                  </a:txBody>
-                  <a:tcPr>
-                    <a:solidFill>
-                      <a:srgbClr val="EEF2FF"/>
-                    </a:solidFill>
-                  </a:tcPr>
-                </a:tc>
-                <a:tc>
-                  <a:txBody>
-                    <a:bodyPr/>
-                    <a:lstStyle/>
-                    <a:p>
-                      <a:pPr algn="ctr"/>
-                      <a:r>
-                        <a:rPr sz="1000">
-                          <a:solidFill>
-                            <a:srgbClr val="111827"/>
-                          </a:solidFill>
-                        </a:rPr>
-                        <a:t>10.91</a:t>
-                      </a:r>
-                    </a:p>
-                  </a:txBody>
-                  <a:tcPr>
-                    <a:solidFill>
-                      <a:srgbClr val="EEF2FF"/>
-                    </a:solidFill>
-                  </a:tcPr>
-                </a:tc>
-                <a:tc>
-                  <a:txBody>
-                    <a:bodyPr/>
-                    <a:lstStyle/>
-                    <a:p>
-                      <a:pPr algn="ctr"/>
-                      <a:r>
-                        <a:rPr sz="1000">
-                          <a:solidFill>
-                            <a:srgbClr val="111827"/>
-                          </a:solidFill>
-                        </a:rPr>
-                        <a:t>1,411</a:t>
-                      </a:r>
-                    </a:p>
-                  </a:txBody>
-                  <a:tcPr>
-                    <a:solidFill>
-                      <a:srgbClr val="EEF2FF"/>
-                    </a:solidFill>
-                  </a:tcPr>
-                </a:tc>
-              </a:tr>
-              <a:tr h="365760">
-                <a:tc>
-                  <a:txBody>
-                    <a:bodyPr/>
-                    <a:lstStyle/>
-                    <a:p>
-                      <a:pPr algn="l"/>
-                      <a:r>
-                        <a:rPr sz="1000">
-                          <a:solidFill>
-                            <a:srgbClr val="111827"/>
-                          </a:solidFill>
-                        </a:rPr>
-                        <a:t>16</a:t>
-                      </a:r>
-                    </a:p>
-                  </a:txBody>
-                  <a:tcPr>
-                    <a:solidFill>
-                      <a:srgbClr val="FFFFFF"/>
-                    </a:solidFill>
-                  </a:tcPr>
-                </a:tc>
-                <a:tc>
-                  <a:txBody>
-                    <a:bodyPr/>
-                    <a:lstStyle/>
-                    <a:p>
-                      <a:pPr algn="ctr"/>
-                      <a:r>
-                        <a:rPr sz="1000">
-                          <a:solidFill>
-                            <a:srgbClr val="111827"/>
-                          </a:solidFill>
-                        </a:rPr>
-                        <a:t>5</a:t>
-                      </a:r>
-                    </a:p>
-                  </a:txBody>
-                  <a:tcPr>
-                    <a:solidFill>
-                      <a:srgbClr val="FFFFFF"/>
-                    </a:solidFill>
-                  </a:tcPr>
-                </a:tc>
-                <a:tc>
-                  <a:txBody>
-                    <a:bodyPr/>
-                    <a:lstStyle/>
-                    <a:p>
-                      <a:pPr algn="ctr"/>
-                      <a:r>
-                        <a:rPr sz="1000">
-                          <a:solidFill>
-                            <a:srgbClr val="111827"/>
-                          </a:solidFill>
-                        </a:rPr>
-                        <a:t>4.90</a:t>
-                      </a:r>
-                    </a:p>
-                  </a:txBody>
-                  <a:tcPr>
-                    <a:solidFill>
-                      <a:srgbClr val="FFFFFF"/>
-                    </a:solidFill>
-                  </a:tcPr>
-                </a:tc>
-                <a:tc>
-                  <a:txBody>
-                    <a:bodyPr/>
-                    <a:lstStyle/>
-                    <a:p>
-                      <a:pPr algn="ctr"/>
-                      <a:r>
-                        <a:rPr sz="1000">
-                          <a:solidFill>
-                            <a:srgbClr val="111827"/>
-                          </a:solidFill>
-                        </a:rPr>
-                        <a:t>7.00</a:t>
-                      </a:r>
-                    </a:p>
-                  </a:txBody>
-                  <a:tcPr>
-                    <a:solidFill>
-                      <a:srgbClr val="FFFFFF"/>
-                    </a:solidFill>
-                  </a:tcPr>
-                </a:tc>
-                <a:tc>
-                  <a:txBody>
-                    <a:bodyPr/>
-                    <a:lstStyle/>
-                    <a:p>
-                      <a:pPr algn="ctr"/>
-                      <a:r>
-                        <a:rPr sz="1000">
-                          <a:solidFill>
-                            <a:srgbClr val="111827"/>
-                          </a:solidFill>
-                        </a:rPr>
-                        <a:t>8.16</a:t>
-                      </a:r>
-                    </a:p>
-                  </a:txBody>
-                  <a:tcPr>
-                    <a:solidFill>
-                      <a:srgbClr val="FFFFFF"/>
-                    </a:solidFill>
-                  </a:tcPr>
-                </a:tc>
-                <a:tc>
-                  <a:txBody>
-                    <a:bodyPr/>
-                    <a:lstStyle/>
-                    <a:p>
-                      <a:pPr algn="ctr"/>
-                      <a:r>
-                        <a:rPr sz="1000">
-                          <a:solidFill>
-                            <a:srgbClr val="111827"/>
-                          </a:solidFill>
-                        </a:rPr>
-                        <a:t>1,251</a:t>
-                      </a:r>
-                    </a:p>
-                  </a:txBody>
-                  <a:tcPr>
-                    <a:solidFill>
-                      <a:srgbClr val="FFFFFF"/>
-                    </a:solidFill>
-                  </a:tcPr>
-                </a:tc>
-              </a:tr>
-              <a:tr h="365760">
-                <a:tc>
-                  <a:txBody>
-                    <a:bodyPr/>
-                    <a:lstStyle/>
-                    <a:p>
-                      <a:pPr algn="l"/>
-                      <a:r>
-                        <a:rPr sz="1000">
-                          <a:solidFill>
-                            <a:srgbClr val="111827"/>
-                          </a:solidFill>
-                        </a:rPr>
-                        <a:t>32</a:t>
-                      </a:r>
-                    </a:p>
-                  </a:txBody>
-                  <a:tcPr>
-                    <a:solidFill>
-                      <a:srgbClr val="EEF2FF"/>
-                    </a:solidFill>
-                  </a:tcPr>
-                </a:tc>
-                <a:tc>
-                  <a:txBody>
-                    <a:bodyPr/>
-                    <a:lstStyle/>
-                    <a:p>
-                      <a:pPr algn="ctr"/>
-                      <a:r>
-                        <a:rPr sz="1000">
-                          <a:solidFill>
-                            <a:srgbClr val="111827"/>
-                          </a:solidFill>
-                        </a:rPr>
-                        <a:t>4</a:t>
-                      </a:r>
-                    </a:p>
-                  </a:txBody>
-                  <a:tcPr>
-                    <a:solidFill>
-                      <a:srgbClr val="EEF2FF"/>
-                    </a:solidFill>
-                  </a:tcPr>
-                </a:tc>
-                <a:tc>
-                  <a:txBody>
-                    <a:bodyPr/>
-                    <a:lstStyle/>
-                    <a:p>
-                      <a:pPr algn="ctr"/>
-                      <a:r>
-                        <a:rPr sz="1000">
-                          <a:solidFill>
-                            <a:srgbClr val="111827"/>
-                          </a:solidFill>
-                        </a:rPr>
-                        <a:t>3.95</a:t>
-                      </a:r>
-                    </a:p>
-                  </a:txBody>
-                  <a:tcPr>
-                    <a:solidFill>
-                      <a:srgbClr val="EEF2FF"/>
-                    </a:solidFill>
-                  </a:tcPr>
-                </a:tc>
-                <a:tc>
-                  <a:txBody>
-                    <a:bodyPr/>
-                    <a:lstStyle/>
-                    <a:p>
-                      <a:pPr algn="ctr"/>
-                      <a:r>
-                        <a:rPr sz="1000">
-                          <a:solidFill>
-                            <a:srgbClr val="111827"/>
-                          </a:solidFill>
-                        </a:rPr>
-                        <a:t>5.95</a:t>
-                      </a:r>
-                    </a:p>
-                  </a:txBody>
-                  <a:tcPr>
-                    <a:solidFill>
-                      <a:srgbClr val="EEF2FF"/>
-                    </a:solidFill>
-                  </a:tcPr>
-                </a:tc>
-                <a:tc>
-                  <a:txBody>
-                    <a:bodyPr/>
-                    <a:lstStyle/>
-                    <a:p>
-                      <a:pPr algn="ctr"/>
-                      <a:r>
-                        <a:rPr sz="1000">
-                          <a:solidFill>
-                            <a:srgbClr val="111827"/>
-                          </a:solidFill>
-                        </a:rPr>
-                        <a:t>6.77</a:t>
-                      </a:r>
-                    </a:p>
-                  </a:txBody>
-                  <a:tcPr>
-                    <a:solidFill>
-                      <a:srgbClr val="EEF2FF"/>
-                    </a:solidFill>
-                  </a:tcPr>
-                </a:tc>
-                <a:tc>
-                  <a:txBody>
-                    <a:bodyPr/>
-                    <a:lstStyle/>
-                    <a:p>
-                      <a:pPr algn="ctr"/>
-                      <a:r>
-                        <a:rPr sz="1000">
-                          <a:solidFill>
-                            <a:srgbClr val="111827"/>
-                          </a:solidFill>
-                        </a:rPr>
-                        <a:t>1,189</a:t>
-                      </a:r>
-                    </a:p>
-                  </a:txBody>
-                  <a:tcPr>
-                    <a:solidFill>
-                      <a:srgbClr val="EEF2FF"/>
-                    </a:solidFill>
-                  </a:tcPr>
-                </a:tc>
-              </a:tr>
-              <a:tr h="365760">
-                <a:tc>
-                  <a:txBody>
-                    <a:bodyPr/>
-                    <a:lstStyle/>
-                    <a:p>
-                      <a:pPr algn="l"/>
-                      <a:r>
-                        <a:rPr sz="1000">
-                          <a:solidFill>
-                            <a:srgbClr val="111827"/>
-                          </a:solidFill>
-                        </a:rPr>
-                        <a:t>64</a:t>
-                      </a:r>
-                    </a:p>
-                  </a:txBody>
-                  <a:tcPr>
-                    <a:solidFill>
-                      <a:srgbClr val="FFFFFF"/>
-                    </a:solidFill>
-                  </a:tcPr>
-                </a:tc>
-                <a:tc>
-                  <a:txBody>
-                    <a:bodyPr/>
-                    <a:lstStyle/>
-                    <a:p>
-                      <a:pPr algn="ctr"/>
-                      <a:r>
-                        <a:rPr sz="1000">
-                          <a:solidFill>
-                            <a:srgbClr val="111827"/>
-                          </a:solidFill>
-                        </a:rPr>
-                        <a:t>3</a:t>
-                      </a:r>
-                    </a:p>
-                  </a:txBody>
-                  <a:tcPr>
-                    <a:solidFill>
-                      <a:srgbClr val="FFFFFF"/>
-                    </a:solidFill>
-                  </a:tcPr>
-                </a:tc>
-                <a:tc>
-                  <a:txBody>
-                    <a:bodyPr/>
-                    <a:lstStyle/>
-                    <a:p>
-                      <a:pPr algn="ctr"/>
-                      <a:r>
-                        <a:rPr sz="1000">
-                          <a:solidFill>
-                            <a:srgbClr val="111827"/>
-                          </a:solidFill>
-                        </a:rPr>
-                        <a:t>2.98</a:t>
-                      </a:r>
-                    </a:p>
-                  </a:txBody>
-                  <a:tcPr>
-                    <a:solidFill>
-                      <a:srgbClr val="FFFFFF"/>
-                    </a:solidFill>
-                  </a:tcPr>
-                </a:tc>
-                <a:tc>
-                  <a:txBody>
-                    <a:bodyPr/>
-                    <a:lstStyle/>
-                    <a:p>
-                      <a:pPr algn="ctr"/>
-                      <a:r>
-                        <a:rPr sz="1000">
-                          <a:solidFill>
-                            <a:srgbClr val="111827"/>
-                          </a:solidFill>
-                        </a:rPr>
-                        <a:t>5.04</a:t>
-                      </a:r>
-                    </a:p>
-                  </a:txBody>
-                  <a:tcPr>
-                    <a:solidFill>
-                      <a:srgbClr val="FFFFFF"/>
-                    </a:solidFill>
-                  </a:tcPr>
-                </a:tc>
-                <a:tc>
-                  <a:txBody>
-                    <a:bodyPr/>
-                    <a:lstStyle/>
-                    <a:p>
-                      <a:pPr algn="ctr"/>
-                      <a:r>
-                        <a:rPr sz="1000">
-                          <a:solidFill>
-                            <a:srgbClr val="111827"/>
-                          </a:solidFill>
-                        </a:rPr>
-                        <a:t>5.64</a:t>
-                      </a:r>
-                    </a:p>
-                  </a:txBody>
-                  <a:tcPr>
-                    <a:solidFill>
-                      <a:srgbClr val="FFFFFF"/>
-                    </a:solidFill>
-                  </a:tcPr>
-                </a:tc>
-                <a:tc>
-                  <a:txBody>
-                    <a:bodyPr/>
-                    <a:lstStyle/>
-                    <a:p>
-                      <a:pPr algn="ctr"/>
-                      <a:r>
-                        <a:rPr sz="1000">
-                          <a:solidFill>
-                            <a:srgbClr val="111827"/>
-                          </a:solidFill>
-                        </a:rPr>
-                        <a:t>1,146</a:t>
-                      </a:r>
-                    </a:p>
-                  </a:txBody>
-                  <a:tcPr>
-                    <a:solidFill>
-                      <a:srgbClr val="FFFFFF"/>
-                    </a:solidFill>
-                  </a:tcPr>
-                </a:tc>
-              </a:tr>
-              <a:tr h="365760">
-                <a:tc>
-                  <a:txBody>
-                    <a:bodyPr/>
-                    <a:lstStyle/>
-                    <a:p>
-                      <a:pPr algn="l"/>
-                      <a:r>
-                        <a:rPr sz="1000">
-                          <a:solidFill>
-                            <a:srgbClr val="111827"/>
-                          </a:solidFill>
-                        </a:rPr>
-                        <a:t>100</a:t>
-                      </a:r>
-                    </a:p>
-                  </a:txBody>
-                  <a:tcPr>
-                    <a:solidFill>
-                      <a:srgbClr val="EEF2FF"/>
-                    </a:solidFill>
-                  </a:tcPr>
-                </a:tc>
-                <a:tc>
-                  <a:txBody>
-                    <a:bodyPr/>
-                    <a:lstStyle/>
-                    <a:p>
-                      <a:pPr algn="ctr"/>
-                      <a:r>
-                        <a:rPr sz="1000">
-                          <a:solidFill>
-                            <a:srgbClr val="111827"/>
-                          </a:solidFill>
-                        </a:rPr>
-                        <a:t>3</a:t>
-                      </a:r>
-                    </a:p>
-                  </a:txBody>
-                  <a:tcPr>
-                    <a:solidFill>
-                      <a:srgbClr val="EEF2FF"/>
-                    </a:solidFill>
-                  </a:tcPr>
-                </a:tc>
-                <a:tc>
-                  <a:txBody>
-                    <a:bodyPr/>
-                    <a:lstStyle/>
-                    <a:p>
-                      <a:pPr algn="ctr"/>
-                      <a:r>
-                        <a:rPr sz="1000">
-                          <a:solidFill>
-                            <a:srgbClr val="111827"/>
-                          </a:solidFill>
-                        </a:rPr>
-                        <a:t>2.99</a:t>
-                      </a:r>
-                    </a:p>
-                  </a:txBody>
-                  <a:tcPr>
-                    <a:solidFill>
-                      <a:srgbClr val="EEF2FF"/>
-                    </a:solidFill>
-                  </a:tcPr>
-                </a:tc>
-                <a:tc>
-                  <a:txBody>
-                    <a:bodyPr/>
-                    <a:lstStyle/>
-                    <a:p>
-                      <a:pPr algn="ctr"/>
-                      <a:r>
-                        <a:rPr sz="1000">
-                          <a:solidFill>
-                            <a:srgbClr val="111827"/>
-                          </a:solidFill>
-                        </a:rPr>
-                        <a:t>4.97</a:t>
-                      </a:r>
-                    </a:p>
-                  </a:txBody>
-                  <a:tcPr>
-                    <a:solidFill>
-                      <a:srgbClr val="EEF2FF"/>
-                    </a:solidFill>
-                  </a:tcPr>
-                </a:tc>
-                <a:tc>
-                  <a:txBody>
-                    <a:bodyPr/>
-                    <a:lstStyle/>
-                    <a:p>
-                      <a:pPr algn="ctr"/>
-                      <a:r>
-                        <a:rPr sz="1000">
-                          <a:solidFill>
-                            <a:srgbClr val="111827"/>
-                          </a:solidFill>
-                        </a:rPr>
-                        <a:t>5.51</a:t>
-                      </a:r>
-                    </a:p>
-                  </a:txBody>
-                  <a:tcPr>
-                    <a:solidFill>
-                      <a:srgbClr val="EEF2FF"/>
-                    </a:solidFill>
-                  </a:tcPr>
-                </a:tc>
-                <a:tc>
-                  <a:txBody>
-                    <a:bodyPr/>
-                    <a:lstStyle/>
-                    <a:p>
-                      <a:pPr algn="ctr"/>
-                      <a:r>
-                        <a:rPr sz="1000">
-                          <a:solidFill>
-                            <a:srgbClr val="111827"/>
-                          </a:solidFill>
-                        </a:rPr>
-                        <a:t>1,131</a:t>
-                      </a:r>
-                    </a:p>
-                  </a:txBody>
-                  <a:tcPr>
-                    <a:solidFill>
-                      <a:srgbClr val="EEF2FF"/>
-                    </a:solidFill>
-                  </a:tcPr>
-                </a:tc>
-              </a:tr>
-              <a:tr h="365760">
-                <a:tc>
-                  <a:txBody>
-                    <a:bodyPr/>
-                    <a:lstStyle/>
-                    <a:p>
-                      <a:pPr algn="l"/>
-                      <a:r>
-                        <a:rPr sz="1000">
-                          <a:solidFill>
-                            <a:srgbClr val="111827"/>
-                          </a:solidFill>
-                        </a:rPr>
-                        <a:t>128</a:t>
-                      </a:r>
-                    </a:p>
-                  </a:txBody>
-                  <a:tcPr>
-                    <a:solidFill>
-                      <a:srgbClr val="FFFFFF"/>
-                    </a:solidFill>
-                  </a:tcPr>
-                </a:tc>
-                <a:tc>
-                  <a:txBody>
-                    <a:bodyPr/>
-                    <a:lstStyle/>
-                    <a:p>
-                      <a:pPr algn="ctr"/>
-                      <a:r>
-                        <a:rPr sz="1000">
-                          <a:solidFill>
-                            <a:srgbClr val="111827"/>
-                          </a:solidFill>
-                        </a:rPr>
-                        <a:t>3</a:t>
-                      </a:r>
-                    </a:p>
-                  </a:txBody>
-                  <a:tcPr>
-                    <a:solidFill>
-                      <a:srgbClr val="FFFFFF"/>
-                    </a:solidFill>
-                  </a:tcPr>
-                </a:tc>
-                <a:tc>
-                  <a:txBody>
-                    <a:bodyPr/>
-                    <a:lstStyle/>
-                    <a:p>
-                      <a:pPr algn="ctr"/>
-                      <a:r>
-                        <a:rPr sz="1000">
-                          <a:solidFill>
-                            <a:srgbClr val="111827"/>
-                          </a:solidFill>
-                        </a:rPr>
-                        <a:t>2.99</a:t>
-                      </a:r>
-                    </a:p>
-                  </a:txBody>
-                  <a:tcPr>
-                    <a:solidFill>
-                      <a:srgbClr val="FFFFFF"/>
-                    </a:solidFill>
-                  </a:tcPr>
-                </a:tc>
-                <a:tc>
-                  <a:txBody>
-                    <a:bodyPr/>
-                    <a:lstStyle/>
-                    <a:p>
-                      <a:pPr algn="ctr"/>
-                      <a:r>
-                        <a:rPr sz="1000">
-                          <a:solidFill>
-                            <a:srgbClr val="111827"/>
-                          </a:solidFill>
-                        </a:rPr>
-                        <a:t>4.92</a:t>
-                      </a:r>
-                    </a:p>
-                  </a:txBody>
-                  <a:tcPr>
-                    <a:solidFill>
-                      <a:srgbClr val="FFFFFF"/>
-                    </a:solidFill>
-                  </a:tcPr>
-                </a:tc>
-                <a:tc>
-                  <a:txBody>
-                    <a:bodyPr/>
-                    <a:lstStyle/>
-                    <a:p>
-                      <a:pPr algn="ctr"/>
-                      <a:r>
-                        <a:rPr sz="1000">
-                          <a:solidFill>
-                            <a:srgbClr val="111827"/>
-                          </a:solidFill>
-                        </a:rPr>
-                        <a:t>5.41</a:t>
-                      </a:r>
-                    </a:p>
-                  </a:txBody>
-                  <a:tcPr>
-                    <a:solidFill>
-                      <a:srgbClr val="FFFFFF"/>
-                    </a:solidFill>
-                  </a:tcPr>
-                </a:tc>
-                <a:tc>
-                  <a:txBody>
-                    <a:bodyPr/>
-                    <a:lstStyle/>
-                    <a:p>
-                      <a:pPr algn="ctr"/>
-                      <a:r>
-                        <a:rPr sz="1000">
-                          <a:solidFill>
-                            <a:srgbClr val="111827"/>
-                          </a:solidFill>
-                        </a:rPr>
-                        <a:t>1,121</a:t>
-                      </a:r>
-                    </a:p>
-                  </a:txBody>
-                  <a:tcPr>
-                    <a:solidFill>
-                      <a:srgbClr val="FFFFFF"/>
-                    </a:solidFill>
-                  </a:tcPr>
-                </a:tc>
-              </a:tr>
-              <a:tr h="365760">
-                <a:tc>
-                  <a:txBody>
-                    <a:bodyPr/>
-                    <a:lstStyle/>
-                    <a:p>
-                      <a:pPr algn="l"/>
-                      <a:r>
-                        <a:rPr sz="1000">
-                          <a:solidFill>
-                            <a:srgbClr val="111827"/>
-                          </a:solidFill>
-                        </a:rPr>
-                        <a:t>256</a:t>
-                      </a:r>
-                    </a:p>
-                  </a:txBody>
-                  <a:tcPr>
-                    <a:solidFill>
-                      <a:srgbClr val="EEF2FF"/>
-                    </a:solidFill>
-                  </a:tcPr>
-                </a:tc>
-                <a:tc>
-                  <a:txBody>
-                    <a:bodyPr/>
-                    <a:lstStyle/>
-                    <a:p>
-                      <a:pPr algn="ctr"/>
-                      <a:r>
-                        <a:rPr sz="1000">
-                          <a:solidFill>
-                            <a:srgbClr val="111827"/>
-                          </a:solidFill>
-                        </a:rPr>
-                        <a:t>3</a:t>
-                      </a:r>
-                    </a:p>
-                  </a:txBody>
-                  <a:tcPr>
-                    <a:solidFill>
-                      <a:srgbClr val="EEF2FF"/>
-                    </a:solidFill>
-                  </a:tcPr>
-                </a:tc>
-                <a:tc>
-                  <a:txBody>
-                    <a:bodyPr/>
-                    <a:lstStyle/>
-                    <a:p>
-                      <a:pPr algn="ctr"/>
-                      <a:r>
-                        <a:rPr sz="1000">
-                          <a:solidFill>
-                            <a:srgbClr val="111827"/>
-                          </a:solidFill>
-                        </a:rPr>
-                        <a:t>2.99</a:t>
-                      </a:r>
-                    </a:p>
-                  </a:txBody>
-                  <a:tcPr>
-                    <a:solidFill>
-                      <a:srgbClr val="EEF2FF"/>
-                    </a:solidFill>
-                  </a:tcPr>
-                </a:tc>
-                <a:tc>
-                  <a:txBody>
-                    <a:bodyPr/>
-                    <a:lstStyle/>
-                    <a:p>
-                      <a:pPr algn="ctr"/>
-                      <a:r>
-                        <a:rPr sz="1000">
-                          <a:solidFill>
-                            <a:srgbClr val="111827"/>
-                          </a:solidFill>
-                        </a:rPr>
-                        <a:t>4.57</a:t>
-                      </a:r>
-                    </a:p>
-                  </a:txBody>
-                  <a:tcPr>
-                    <a:solidFill>
-                      <a:srgbClr val="EEF2FF"/>
-                    </a:solidFill>
-                  </a:tcPr>
-                </a:tc>
-                <a:tc>
-                  <a:txBody>
-                    <a:bodyPr/>
-                    <a:lstStyle/>
-                    <a:p>
-                      <a:pPr algn="ctr"/>
-                      <a:r>
-                        <a:rPr sz="1000">
-                          <a:solidFill>
-                            <a:srgbClr val="111827"/>
-                          </a:solidFill>
-                        </a:rPr>
-                        <a:t>5.00</a:t>
-                      </a:r>
-                    </a:p>
-                  </a:txBody>
-                  <a:tcPr>
-                    <a:solidFill>
-                      <a:srgbClr val="EEF2FF"/>
-                    </a:solidFill>
-                  </a:tcPr>
-                </a:tc>
-                <a:tc>
-                  <a:txBody>
-                    <a:bodyPr/>
-                    <a:lstStyle/>
-                    <a:p>
-                      <a:pPr algn="ctr"/>
-                      <a:r>
-                        <a:rPr sz="1000">
-                          <a:solidFill>
-                            <a:srgbClr val="111827"/>
-                          </a:solidFill>
-                        </a:rPr>
-                        <a:t>1,088</a:t>
-                      </a:r>
-                    </a:p>
-                  </a:txBody>
-                  <a:tcPr>
-                    <a:solidFill>
-                      <a:srgbClr val="EEF2FF"/>
-                    </a:solidFill>
-                  </a:tcPr>
-                </a:tc>
-              </a:tr>
-              <a:tr h="365760">
-                <a:tc>
-                  <a:txBody>
-                    <a:bodyPr/>
-                    <a:lstStyle/>
-                    <a:p>
-                      <a:pPr algn="l"/>
-                      <a:r>
-                        <a:rPr sz="1000">
-                          <a:solidFill>
-                            <a:srgbClr val="111827"/>
-                          </a:solidFill>
-                        </a:rPr>
-                        <a:t>512</a:t>
-                      </a:r>
-                    </a:p>
-                  </a:txBody>
-                  <a:tcPr>
-                    <a:solidFill>
-                      <a:srgbClr val="FFFFFF"/>
-                    </a:solidFill>
-                  </a:tcPr>
-                </a:tc>
-                <a:tc>
-                  <a:txBody>
-                    <a:bodyPr/>
-                    <a:lstStyle/>
-                    <a:p>
-                      <a:pPr algn="ctr"/>
-                      <a:r>
-                        <a:rPr sz="1000">
-                          <a:solidFill>
-                            <a:srgbClr val="111827"/>
-                          </a:solidFill>
-                        </a:rPr>
-                        <a:t>2</a:t>
-                      </a:r>
-                    </a:p>
-                  </a:txBody>
-                  <a:tcPr>
-                    <a:solidFill>
-                      <a:srgbClr val="FFFFFF"/>
-                    </a:solidFill>
-                  </a:tcPr>
-                </a:tc>
-                <a:tc>
-                  <a:txBody>
-                    <a:bodyPr/>
-                    <a:lstStyle/>
-                    <a:p>
-                      <a:pPr algn="ctr"/>
-                      <a:r>
-                        <a:rPr sz="1000">
-                          <a:solidFill>
-                            <a:srgbClr val="111827"/>
-                          </a:solidFill>
-                        </a:rPr>
-                        <a:t>2.00</a:t>
-                      </a:r>
-                    </a:p>
-                  </a:txBody>
-                  <a:tcPr>
-                    <a:solidFill>
-                      <a:srgbClr val="FFFFFF"/>
-                    </a:solidFill>
-                  </a:tcPr>
-                </a:tc>
-                <a:tc>
-                  <a:txBody>
-                    <a:bodyPr/>
-                    <a:lstStyle/>
-                    <a:p>
-                      <a:pPr algn="ctr"/>
-                      <a:r>
-                        <a:rPr sz="1000">
-                          <a:solidFill>
-                            <a:srgbClr val="111827"/>
-                          </a:solidFill>
-                        </a:rPr>
-                        <a:t>4.00</a:t>
-                      </a:r>
-                    </a:p>
-                  </a:txBody>
-                  <a:tcPr>
-                    <a:solidFill>
-                      <a:srgbClr val="FFFFFF"/>
-                    </a:solidFill>
-                  </a:tcPr>
-                </a:tc>
-                <a:tc>
-                  <a:txBody>
-                    <a:bodyPr/>
-                    <a:lstStyle/>
-                    <a:p>
-                      <a:pPr algn="ctr"/>
-                      <a:r>
-                        <a:rPr sz="1000">
-                          <a:solidFill>
-                            <a:srgbClr val="111827"/>
-                          </a:solidFill>
-                        </a:rPr>
-                        <a:t>4.41</a:t>
-                      </a:r>
-                    </a:p>
-                  </a:txBody>
-                  <a:tcPr>
-                    <a:solidFill>
-                      <a:srgbClr val="FFFFFF"/>
-                    </a:solidFill>
-                  </a:tcPr>
-                </a:tc>
-                <a:tc>
-                  <a:txBody>
-                    <a:bodyPr/>
-                    <a:lstStyle/>
-                    <a:p>
-                      <a:pPr algn="ctr"/>
-                      <a:r>
-                        <a:rPr sz="1000">
-                          <a:solidFill>
-                            <a:srgbClr val="111827"/>
-                          </a:solidFill>
-                        </a:rPr>
-                        <a:t>1,053</a:t>
-                      </a:r>
-                    </a:p>
-                  </a:txBody>
-                  <a:tcPr>
-                    <a:solidFill>
-                      <a:srgbClr val="FFFFFF"/>
-                    </a:solidFill>
-                  </a:tcPr>
-                </a:tc>
-              </a:tr>
-              <a:tr h="365760">
-                <a:tc>
-                  <a:txBody>
-                    <a:bodyPr/>
-                    <a:lstStyle/>
-                    <a:p>
-                      <a:pPr algn="l"/>
-                      <a:r>
-                        <a:rPr sz="1000">
-                          <a:solidFill>
-                            <a:srgbClr val="111827"/>
-                          </a:solidFill>
-                        </a:rPr>
-                        <a:t>1000</a:t>
-                      </a:r>
-                    </a:p>
-                  </a:txBody>
-                  <a:tcPr>
-                    <a:solidFill>
-                      <a:srgbClr val="EEF2FF"/>
-                    </a:solidFill>
-                  </a:tcPr>
-                </a:tc>
-                <a:tc>
-                  <a:txBody>
-                    <a:bodyPr/>
-                    <a:lstStyle/>
-                    <a:p>
-                      <a:pPr algn="ctr"/>
-                      <a:r>
-                        <a:rPr sz="1000">
-                          <a:solidFill>
-                            <a:srgbClr val="111827"/>
-                          </a:solidFill>
-                        </a:rPr>
-                        <a:t>2</a:t>
-                      </a:r>
-                    </a:p>
-                  </a:txBody>
-                  <a:tcPr>
-                    <a:solidFill>
-                      <a:srgbClr val="EEF2FF"/>
-                    </a:solidFill>
-                  </a:tcPr>
-                </a:tc>
-                <a:tc>
-                  <a:txBody>
-                    <a:bodyPr/>
-                    <a:lstStyle/>
-                    <a:p>
-                      <a:pPr algn="ctr"/>
-                      <a:r>
-                        <a:rPr sz="1000">
-                          <a:solidFill>
-                            <a:srgbClr val="111827"/>
-                          </a:solidFill>
-                        </a:rPr>
-                        <a:t>2.00</a:t>
-                      </a:r>
-                    </a:p>
-                  </a:txBody>
-                  <a:tcPr>
-                    <a:solidFill>
-                      <a:srgbClr val="EEF2FF"/>
-                    </a:solidFill>
-                  </a:tcPr>
-                </a:tc>
-                <a:tc>
-                  <a:txBody>
-                    <a:bodyPr/>
-                    <a:lstStyle/>
-                    <a:p>
-                      <a:pPr algn="ctr"/>
-                      <a:r>
-                        <a:rPr sz="1000">
-                          <a:solidFill>
-                            <a:srgbClr val="111827"/>
-                          </a:solidFill>
-                        </a:rPr>
-                        <a:t>3.99</a:t>
-                      </a:r>
-                    </a:p>
-                  </a:txBody>
-                  <a:tcPr>
-                    <a:solidFill>
-                      <a:srgbClr val="EEF2FF"/>
-                    </a:solidFill>
-                  </a:tcPr>
-                </a:tc>
-                <a:tc>
-                  <a:txBody>
-                    <a:bodyPr/>
-                    <a:lstStyle/>
-                    <a:p>
-                      <a:pPr algn="ctr"/>
-                      <a:r>
-                        <a:rPr sz="1000">
-                          <a:solidFill>
-                            <a:srgbClr val="111827"/>
-                          </a:solidFill>
-                        </a:rPr>
-                        <a:t>4.34</a:t>
-                      </a:r>
-                    </a:p>
-                  </a:txBody>
-                  <a:tcPr>
-                    <a:solidFill>
-                      <a:srgbClr val="EEF2FF"/>
-                    </a:solidFill>
-                  </a:tcPr>
-                </a:tc>
-                <a:tc>
-                  <a:txBody>
-                    <a:bodyPr/>
-                    <a:lstStyle/>
-                    <a:p>
-                      <a:pPr algn="ctr"/>
-                      <a:r>
-                        <a:rPr sz="1000">
-                          <a:solidFill>
-                            <a:srgbClr val="111827"/>
-                          </a:solidFill>
-                        </a:rPr>
-                        <a:t>1,016</a:t>
-                      </a:r>
-                    </a:p>
-                  </a:txBody>
-                  <a:tcPr>
-                    <a:solidFill>
-                      <a:srgbClr val="EEF2FF"/>
-                    </a:solidFill>
-                  </a:tcPr>
-                </a:tc>
-              </a:tr>
-            </a:tbl>
-          </a:graphicData>
-        </a:graphic>
-      </p:graphicFrame>
-      <p:pic>
-        <p:nvPicPr>
-          <p:cNvPr id="5" name="Picture 4" descr="chart_io_vs_m.png"/>
-          <p:cNvPicPr>
-            <a:picLocks noChangeAspect="1"/>
-          </p:cNvPicPr>
-          <p:nvPr/>
-        </p:nvPicPr>
-        <p:blipFill>
-          <a:blip r:embed="rId2"/>
-          <a:stretch>
-            <a:fillRect/>
-          </a:stretch>
-        </p:blipFill>
+        </p:nvSpPr>
         <p:spPr>
           <a:xfrm>
-            <a:off x="6400800" y="1188720"/>
-            <a:ext cx="5486400" cy="3200400"/>
-          </a:xfrm>
-          <a:prstGeom prst="rect">
-            <a:avLst/>
-          </a:prstGeom>
-        </p:spPr>
-      </p:pic>
-      <p:sp>
-        <p:nvSpPr>
-          <p:cNvPr id="6" name="TextBox 5"/>
-          <p:cNvSpPr txBox="1"/>
-          <p:nvPr/>
-        </p:nvSpPr>
-        <p:spPr>
-          <a:xfrm>
-            <a:off x="365760" y="6126480"/>
-            <a:ext cx="11430000" cy="548640"/>
+            <a:off x="411480" y="1051560"/>
+            <a:ext cx="5623560" cy="5394960"/>
           </a:xfrm>
           <a:prstGeom prst="rect">
             <a:avLst/>
@@ -6658,31 +4752,127 @@
           <a:p>
             <a:pPr>
               <a:spcAft>
-                <a:spcPts val="600"/>
+                <a:spcPts val="500"/>
               </a:spcAft>
             </a:pPr>
             <a:r>
-              <a:rPr sz="1100" b="0">
-                <a:solidFill>
-                  <a:srgbClr val="6B7280"/>
+              <a:rPr sz="1500" b="1">
+                <a:solidFill>
+                  <a:srgbClr val="1D4ED8"/>
                 </a:solidFill>
                 <a:latin typeface="Calibri"/>
               </a:rPr>
-              <a:t>I/O por busca cai de 13,25 (m=3, altura 14) para 2,00 (m&gt;=512, altura 2). Ganho satura por volta de m~64-128.</a:t>
-            </a:r>
-          </a:p>
-        </p:txBody>
-      </p:sp>
-      <p:sp>
-        <p:nvSpPr>
-          <p:cNvPr id="7" name="TextBox 6"/>
+              <a:t>Núcleo — Árvore B em disco</a:t>
+            </a:r>
+          </a:p>
+          <a:p>
+            <a:pPr>
+              <a:spcAft>
+                <a:spcPts val="500"/>
+              </a:spcAft>
+            </a:pPr>
+            <a:r>
+              <a:rPr sz="1250" b="0">
+                <a:solidFill>
+                  <a:srgbClr val="111827"/>
+                </a:solidFill>
+                <a:latin typeface="Calibri"/>
+              </a:rPr>
+              <a:t>•  Árvore B de ordem m parametrizável (M em tempo de compilação).</a:t>
+            </a:r>
+          </a:p>
+          <a:p>
+            <a:pPr>
+              <a:spcAft>
+                <a:spcPts val="500"/>
+              </a:spcAft>
+            </a:pPr>
+            <a:r>
+              <a:rPr sz="1250" b="0">
+                <a:solidFill>
+                  <a:srgbClr val="111827"/>
+                </a:solidFill>
+                <a:latin typeface="Calibri"/>
+              </a:rPr>
+              <a:t>•  Opera 100% em disco: 1 nó por I/O; nada é carregado em RAM.</a:t>
+            </a:r>
+          </a:p>
+          <a:p>
+            <a:pPr>
+              <a:spcAft>
+                <a:spcPts val="500"/>
+              </a:spcAft>
+            </a:pPr>
+            <a:r>
+              <a:rPr sz="1250" b="0">
+                <a:solidFill>
+                  <a:srgbClr val="111827"/>
+                </a:solidFill>
+                <a:latin typeface="Calibri"/>
+              </a:rPr>
+              <a:t>•  Busca m-way (mSearch / mSearchPath).</a:t>
+            </a:r>
+          </a:p>
+          <a:p>
+            <a:pPr>
+              <a:spcAft>
+                <a:spcPts val="500"/>
+              </a:spcAft>
+            </a:pPr>
+            <a:r>
+              <a:rPr sz="1250" b="0">
+                <a:solidFill>
+                  <a:srgbClr val="111827"/>
+                </a:solidFill>
+                <a:latin typeface="Calibri"/>
+              </a:rPr>
+              <a:t>•  Inserção bottom-up com split (insertB).</a:t>
+            </a:r>
+          </a:p>
+          <a:p>
+            <a:pPr>
+              <a:spcAft>
+                <a:spcPts val="500"/>
+              </a:spcAft>
+            </a:pPr>
+            <a:r>
+              <a:rPr sz="1250" b="0">
+                <a:solidFill>
+                  <a:srgbClr val="111827"/>
+                </a:solidFill>
+                <a:latin typeface="Calibri"/>
+              </a:rPr>
+              <a:t>•  Remoção com sucessor, redistribuição e fusão (deleteB).</a:t>
+            </a:r>
+          </a:p>
+          <a:p>
+            <a:pPr>
+              <a:spcAft>
+                <a:spcPts val="500"/>
+              </a:spcAft>
+            </a:pPr>
+            <a:r>
+              <a:rPr sz="1250" b="0">
+                <a:solidFill>
+                  <a:srgbClr val="111827"/>
+                </a:solidFill>
+                <a:latin typeface="Calibri"/>
+              </a:rPr>
+              <a:t>•  Persistência: header (root, total, free_head) + nós de tamanho fixo, acesso direto por RRN.</a:t>
+            </a:r>
+          </a:p>
+        </p:txBody>
+      </p:sp>
+      <p:sp>
+        <p:nvSpPr>
+          <p:cNvPr id="5" name="TextBox 4"/>
           <p:cNvSpPr txBox="1"/>
           <p:nvPr/>
         </p:nvSpPr>
         <p:spPr>
           <a:xfrm>
-            <a:off x="457200" y="6446520"/>
-            <a:ext cx="11247120" cy="320040"/>
+            <a:off x="6263640" y="1051560"/>
+            <a:ext cx="5623560" cy="5394960"/>
           </a:xfrm>
           <a:prstGeom prst="rect">
             <a:avLst/>
@@ -6697,6 +4887,173 @@
           <a:p>
             <a:pPr>
               <a:spcAft>
+                <a:spcPts val="500"/>
+              </a:spcAft>
+            </a:pPr>
+            <a:r>
+              <a:rPr sz="1500" b="1">
+                <a:solidFill>
+                  <a:srgbClr val="1D4ED8"/>
+                </a:solidFill>
+                <a:latin typeface="Calibri"/>
+              </a:rPr>
+              <a:t>Extras / funcionalidades acessórias</a:t>
+            </a:r>
+          </a:p>
+          <a:p>
+            <a:pPr>
+              <a:spcAft>
+                <a:spcPts val="500"/>
+              </a:spcAft>
+            </a:pPr>
+            <a:r>
+              <a:rPr sz="1250" b="0">
+                <a:solidFill>
+                  <a:srgbClr val="111827"/>
+                </a:solidFill>
+                <a:latin typeface="Calibri"/>
+              </a:rPr>
+              <a:t>•  Contador de acessos ao disco (métrica central da avaliação).</a:t>
+            </a:r>
+          </a:p>
+          <a:p>
+            <a:pPr>
+              <a:spcAft>
+                <a:spcPts val="500"/>
+              </a:spcAft>
+            </a:pPr>
+            <a:r>
+              <a:rPr sz="1250" b="0">
+                <a:solidFill>
+                  <a:srgbClr val="111827"/>
+                </a:solidFill>
+                <a:latin typeface="Calibri"/>
+              </a:rPr>
+              <a:t>•  Reaproveitamento de nós via free list, com liga/desliga (setReuse).</a:t>
+            </a:r>
+          </a:p>
+          <a:p>
+            <a:pPr>
+              <a:spcAft>
+                <a:spcPts val="500"/>
+              </a:spcAft>
+            </a:pPr>
+            <a:r>
+              <a:rPr sz="1250" b="0">
+                <a:solidFill>
+                  <a:srgbClr val="111827"/>
+                </a:solidFill>
+                <a:latin typeface="Calibri"/>
+              </a:rPr>
+              <a:t>•  Impressão hierárquica (printTree) e cálculo de altura (height).</a:t>
+            </a:r>
+          </a:p>
+          <a:p>
+            <a:pPr>
+              <a:spcAft>
+                <a:spcPts val="500"/>
+              </a:spcAft>
+            </a:pPr>
+            <a:r>
+              <a:rPr sz="1250" b="0">
+                <a:solidFill>
+                  <a:srgbClr val="111827"/>
+                </a:solidFill>
+                <a:latin typeface="Calibri"/>
+              </a:rPr>
+              <a:t>•  Exportação Graphviz (exportDot) -&gt; imagens PNG dos grafos.</a:t>
+            </a:r>
+          </a:p>
+          <a:p>
+            <a:pPr>
+              <a:spcAft>
+                <a:spcPts val="500"/>
+              </a:spcAft>
+            </a:pPr>
+            <a:r>
+              <a:rPr sz="1250" b="0">
+                <a:solidFill>
+                  <a:srgbClr val="111827"/>
+                </a:solidFill>
+                <a:latin typeface="Calibri"/>
+              </a:rPr>
+              <a:t>•  Medição de ocupação: total_nodes, free_nodes, fileSizeBytes.</a:t>
+            </a:r>
+          </a:p>
+          <a:p>
+            <a:pPr>
+              <a:spcAft>
+                <a:spcPts val="500"/>
+              </a:spcAft>
+            </a:pPr>
+            <a:r>
+              <a:rPr sz="1250" b="0">
+                <a:solidFill>
+                  <a:srgbClr val="111827"/>
+                </a:solidFill>
+                <a:latin typeface="Calibri"/>
+              </a:rPr>
+              <a:t>•  Benchmark (bench): CSV com I/O, tempo CPU/IO (getrusage), altura, nós, tamanho.</a:t>
+            </a:r>
+          </a:p>
+          <a:p>
+            <a:pPr>
+              <a:spcAft>
+                <a:spcPts val="500"/>
+              </a:spcAft>
+            </a:pPr>
+            <a:r>
+              <a:rPr sz="1250" b="0">
+                <a:solidFill>
+                  <a:srgbClr val="111827"/>
+                </a:solidFill>
+                <a:latin typeface="Calibri"/>
+              </a:rPr>
+              <a:t>•  Automação: run_all.sh + make_tables.py (tabelas/gráficos) + compare.py (2 máquinas).</a:t>
+            </a:r>
+          </a:p>
+          <a:p>
+            <a:pPr>
+              <a:spcAft>
+                <a:spcPts val="500"/>
+              </a:spcAft>
+            </a:pPr>
+            <a:r>
+              <a:rPr sz="1250" b="0">
+                <a:solidFill>
+                  <a:srgbClr val="111827"/>
+                </a:solidFill>
+                <a:latin typeface="Calibri"/>
+              </a:rPr>
+              <a:t>•  Testes de stress + menu interativo (CRUD + métricas).</a:t>
+            </a:r>
+          </a:p>
+        </p:txBody>
+      </p:sp>
+      <p:sp>
+        <p:nvSpPr>
+          <p:cNvPr id="6" name="TextBox 5"/>
+          <p:cNvSpPr txBox="1"/>
+          <p:nvPr/>
+        </p:nvSpPr>
+        <p:spPr>
+          <a:xfrm>
+            <a:off x="457200" y="6455664"/>
+            <a:ext cx="11247120" cy="310896"/>
+          </a:xfrm>
+          <a:prstGeom prst="rect">
+            <a:avLst/>
+          </a:prstGeom>
+          <a:noFill/>
+        </p:spPr>
+        <p:txBody>
+          <a:bodyPr wrap="square" anchor="t">
+            <a:spAutoFit/>
+          </a:bodyPr>
+          <a:lstStyle/>
+          <a:p>
+            <a:pPr>
+              <a:spcAft>
                 <a:spcPts val="600"/>
               </a:spcAft>
             </a:pPr>
@@ -6707,7 +5064,7 @@
                 </a:solidFill>
                 <a:latin typeface="Calibri"/>
               </a:rPr>
-              <a:t>Árvore B em Memória Secundária — AED-PG-2026          6/10</a:t>
+              <a:t>Árvore B em Memória Secundária — AED-PG-2026          4/12</a:t>
             </a:r>
           </a:p>
         </p:txBody>
@@ -6720,7 +5077,7 @@
 </p:sld>
 </file>
 
-<file path=ppt/slides/slide7.xml><?xml version="1.0" encoding="utf-8"?>
+<file path=ppt/slides/slide5.xml><?xml version="1.0" encoding="utf-8"?>
 <p:sld xmlns:a="http://schemas.openxmlformats.org/drawingml/2006/main" xmlns:p="http://schemas.openxmlformats.org/presentationml/2006/main" xmlns:r="http://schemas.openxmlformats.org/officeDocument/2006/relationships">
   <p:cSld>
     <p:spTree>
@@ -6801,833 +5158,139 @@
               </a:spcAft>
             </a:pPr>
             <a:r>
-              <a:rPr sz="2400" b="1">
+              <a:rPr sz="2300" b="1">
                 <a:solidFill>
                   <a:srgbClr val="FFFFFF"/>
                 </a:solidFill>
                 <a:latin typeface="Calibri"/>
               </a:rPr>
-              <a:t>6b. Resultados - reaproveitamento de nós (churn)</a:t>
-            </a:r>
-          </a:p>
-        </p:txBody>
-      </p:sp>
-      <p:graphicFrame>
-        <p:nvGraphicFramePr>
-          <p:cNvPr id="4" name="Table 3"/>
-          <p:cNvGraphicFramePr>
-            <a:graphicFrameLocks noGrp="1"/>
-          </p:cNvGraphicFramePr>
+              <a:t>4. Análises efetuadas (experimentos)</a:t>
+            </a:r>
+          </a:p>
+        </p:txBody>
+      </p:sp>
+      <p:sp>
+        <p:nvSpPr>
+          <p:cNvPr id="4" name="TextBox 3"/>
+          <p:cNvSpPr txBox="1"/>
           <p:nvPr/>
-        </p:nvGraphicFramePr>
-        <p:xfrm>
-          <a:off x="365760" y="1097280"/>
-          <a:ext cx="5760720" cy="4754880"/>
-        </p:xfrm>
-        <a:graphic>
-          <a:graphicData uri="http://schemas.openxmlformats.org/drawingml/2006/table">
-            <a:tbl>
-              <a:tblPr firstRow="1" bandRow="1">
-                <a:tableStyleId>{5C22544A-7EE6-4342-B048-85BDC9FD1C3A}</a:tableStyleId>
-              </a:tblPr>
-              <a:tblGrid>
-                <a:gridCol w="1152144"/>
-                <a:gridCol w="1152144"/>
-                <a:gridCol w="1152144"/>
-                <a:gridCol w="1152144"/>
-                <a:gridCol w="1152144"/>
-              </a:tblGrid>
-              <a:tr h="679268">
-                <a:tc>
-                  <a:txBody>
-                    <a:bodyPr/>
-                    <a:lstStyle/>
-                    <a:p>
-                      <a:pPr algn="ctr"/>
-                      <a:r>
-                        <a:rPr sz="1100" b="1">
-                          <a:solidFill>
-                            <a:srgbClr val="FFFFFF"/>
-                          </a:solidFill>
-                        </a:rPr>
-                        <a:t>m</a:t>
-                      </a:r>
-                    </a:p>
-                  </a:txBody>
-                  <a:tcPr>
-                    <a:solidFill>
-                      <a:srgbClr val="1D4ED8"/>
-                    </a:solidFill>
-                  </a:tcPr>
-                </a:tc>
-                <a:tc>
-                  <a:txBody>
-                    <a:bodyPr/>
-                    <a:lstStyle/>
-                    <a:p>
-                      <a:pPr algn="ctr"/>
-                      <a:r>
-                        <a:rPr sz="1100" b="1">
-                          <a:solidFill>
-                            <a:srgbClr val="FFFFFF"/>
-                          </a:solidFill>
-                        </a:rPr>
-                        <a:t>N</a:t>
-                      </a:r>
-                    </a:p>
-                  </a:txBody>
-                  <a:tcPr>
-                    <a:solidFill>
-                      <a:srgbClr val="1D4ED8"/>
-                    </a:solidFill>
-                  </a:tcPr>
-                </a:tc>
-                <a:tc>
-                  <a:txBody>
-                    <a:bodyPr/>
-                    <a:lstStyle/>
-                    <a:p>
-                      <a:pPr algn="ctr"/>
-                      <a:r>
-                        <a:rPr sz="1100" b="1">
-                          <a:solidFill>
-                            <a:srgbClr val="FFFFFF"/>
-                          </a:solidFill>
-                        </a:rPr>
-                        <a:t>sem reuso (KB)</a:t>
-                      </a:r>
-                    </a:p>
-                  </a:txBody>
-                  <a:tcPr>
-                    <a:solidFill>
-                      <a:srgbClr val="1D4ED8"/>
-                    </a:solidFill>
-                  </a:tcPr>
-                </a:tc>
-                <a:tc>
-                  <a:txBody>
-                    <a:bodyPr/>
-                    <a:lstStyle/>
-                    <a:p>
-                      <a:pPr algn="ctr"/>
-                      <a:r>
-                        <a:rPr sz="1100" b="1">
-                          <a:solidFill>
-                            <a:srgbClr val="FFFFFF"/>
-                          </a:solidFill>
-                        </a:rPr>
-                        <a:t>com reuso (KB)</a:t>
-                      </a:r>
-                    </a:p>
-                  </a:txBody>
-                  <a:tcPr>
-                    <a:solidFill>
-                      <a:srgbClr val="1D4ED8"/>
-                    </a:solidFill>
-                  </a:tcPr>
-                </a:tc>
-                <a:tc>
-                  <a:txBody>
-                    <a:bodyPr/>
-                    <a:lstStyle/>
-                    <a:p>
-                      <a:pPr algn="ctr"/>
-                      <a:r>
-                        <a:rPr sz="1100" b="1">
-                          <a:solidFill>
-                            <a:srgbClr val="FFFFFF"/>
-                          </a:solidFill>
-                        </a:rPr>
-                        <a:t>economia</a:t>
-                      </a:r>
-                    </a:p>
-                  </a:txBody>
-                  <a:tcPr>
-                    <a:solidFill>
-                      <a:srgbClr val="1D4ED8"/>
-                    </a:solidFill>
-                  </a:tcPr>
-                </a:tc>
-              </a:tr>
-              <a:tr h="679268">
-                <a:tc>
-                  <a:txBody>
-                    <a:bodyPr/>
-                    <a:lstStyle/>
-                    <a:p>
-                      <a:pPr algn="l"/>
-                      <a:r>
-                        <a:rPr sz="1000">
-                          <a:solidFill>
-                            <a:srgbClr val="111827"/>
-                          </a:solidFill>
-                        </a:rPr>
-                        <a:t>3</a:t>
-                      </a:r>
-                    </a:p>
-                  </a:txBody>
-                  <a:tcPr>
-                    <a:solidFill>
-                      <a:srgbClr val="FFFFFF"/>
-                    </a:solidFill>
-                  </a:tcPr>
-                </a:tc>
-                <a:tc>
-                  <a:txBody>
-                    <a:bodyPr/>
-                    <a:lstStyle/>
-                    <a:p>
-                      <a:pPr algn="ctr"/>
-                      <a:r>
-                        <a:rPr sz="1000">
-                          <a:solidFill>
-                            <a:srgbClr val="111827"/>
-                          </a:solidFill>
-                        </a:rPr>
-                        <a:t>10,000</a:t>
-                      </a:r>
-                    </a:p>
-                  </a:txBody>
-                  <a:tcPr>
-                    <a:solidFill>
-                      <a:srgbClr val="FFFFFF"/>
-                    </a:solidFill>
-                  </a:tcPr>
-                </a:tc>
-                <a:tc>
-                  <a:txBody>
-                    <a:bodyPr/>
-                    <a:lstStyle/>
-                    <a:p>
-                      <a:pPr algn="ctr"/>
-                      <a:r>
-                        <a:rPr sz="1000">
-                          <a:solidFill>
-                            <a:srgbClr val="111827"/>
-                          </a:solidFill>
-                        </a:rPr>
-                        <a:t>342</a:t>
-                      </a:r>
-                    </a:p>
-                  </a:txBody>
-                  <a:tcPr>
-                    <a:solidFill>
-                      <a:srgbClr val="FFFFFF"/>
-                    </a:solidFill>
-                  </a:tcPr>
-                </a:tc>
-                <a:tc>
-                  <a:txBody>
-                    <a:bodyPr/>
-                    <a:lstStyle/>
-                    <a:p>
-                      <a:pPr algn="ctr"/>
-                      <a:r>
-                        <a:rPr sz="1000">
-                          <a:solidFill>
-                            <a:srgbClr val="111827"/>
-                          </a:solidFill>
-                        </a:rPr>
-                        <a:t>241</a:t>
-                      </a:r>
-                    </a:p>
-                  </a:txBody>
-                  <a:tcPr>
-                    <a:solidFill>
-                      <a:srgbClr val="FFFFFF"/>
-                    </a:solidFill>
-                  </a:tcPr>
-                </a:tc>
-                <a:tc>
-                  <a:txBody>
-                    <a:bodyPr/>
-                    <a:lstStyle/>
-                    <a:p>
-                      <a:pPr algn="ctr"/>
-                      <a:r>
-                        <a:rPr sz="1000">
-                          <a:solidFill>
-                            <a:srgbClr val="111827"/>
-                          </a:solidFill>
-                        </a:rPr>
-                        <a:t>30%</a:t>
-                      </a:r>
-                    </a:p>
-                  </a:txBody>
-                  <a:tcPr>
-                    <a:solidFill>
-                      <a:srgbClr val="FFFFFF"/>
-                    </a:solidFill>
-                  </a:tcPr>
-                </a:tc>
-              </a:tr>
-              <a:tr h="679268">
-                <a:tc>
-                  <a:txBody>
-                    <a:bodyPr/>
-                    <a:lstStyle/>
-                    <a:p>
-                      <a:pPr algn="l"/>
-                      <a:r>
-                        <a:rPr sz="1000">
-                          <a:solidFill>
-                            <a:srgbClr val="111827"/>
-                          </a:solidFill>
-                        </a:rPr>
-                        <a:t>3</a:t>
-                      </a:r>
-                    </a:p>
-                  </a:txBody>
-                  <a:tcPr>
-                    <a:solidFill>
-                      <a:srgbClr val="EEF2FF"/>
-                    </a:solidFill>
-                  </a:tcPr>
-                </a:tc>
-                <a:tc>
-                  <a:txBody>
-                    <a:bodyPr/>
-                    <a:lstStyle/>
-                    <a:p>
-                      <a:pPr algn="ctr"/>
-                      <a:r>
-                        <a:rPr sz="1000">
-                          <a:solidFill>
-                            <a:srgbClr val="111827"/>
-                          </a:solidFill>
-                        </a:rPr>
-                        <a:t>100,000</a:t>
-                      </a:r>
-                    </a:p>
-                  </a:txBody>
-                  <a:tcPr>
-                    <a:solidFill>
-                      <a:srgbClr val="EEF2FF"/>
-                    </a:solidFill>
-                  </a:tcPr>
-                </a:tc>
-                <a:tc>
-                  <a:txBody>
-                    <a:bodyPr/>
-                    <a:lstStyle/>
-                    <a:p>
-                      <a:pPr algn="ctr"/>
-                      <a:r>
-                        <a:rPr sz="1000">
-                          <a:solidFill>
-                            <a:srgbClr val="111827"/>
-                          </a:solidFill>
-                        </a:rPr>
-                        <a:t>3,407</a:t>
-                      </a:r>
-                    </a:p>
-                  </a:txBody>
-                  <a:tcPr>
-                    <a:solidFill>
-                      <a:srgbClr val="EEF2FF"/>
-                    </a:solidFill>
-                  </a:tcPr>
-                </a:tc>
-                <a:tc>
-                  <a:txBody>
-                    <a:bodyPr/>
-                    <a:lstStyle/>
-                    <a:p>
-                      <a:pPr algn="ctr"/>
-                      <a:r>
-                        <a:rPr sz="1000">
-                          <a:solidFill>
-                            <a:srgbClr val="111827"/>
-                          </a:solidFill>
-                        </a:rPr>
-                        <a:t>2,404</a:t>
-                      </a:r>
-                    </a:p>
-                  </a:txBody>
-                  <a:tcPr>
-                    <a:solidFill>
-                      <a:srgbClr val="EEF2FF"/>
-                    </a:solidFill>
-                  </a:tcPr>
-                </a:tc>
-                <a:tc>
-                  <a:txBody>
-                    <a:bodyPr/>
-                    <a:lstStyle/>
-                    <a:p>
-                      <a:pPr algn="ctr"/>
-                      <a:r>
-                        <a:rPr sz="1000">
-                          <a:solidFill>
-                            <a:srgbClr val="111827"/>
-                          </a:solidFill>
-                        </a:rPr>
-                        <a:t>29%</a:t>
-                      </a:r>
-                    </a:p>
-                  </a:txBody>
-                  <a:tcPr>
-                    <a:solidFill>
-                      <a:srgbClr val="EEF2FF"/>
-                    </a:solidFill>
-                  </a:tcPr>
-                </a:tc>
-              </a:tr>
-              <a:tr h="679268">
-                <a:tc>
-                  <a:txBody>
-                    <a:bodyPr/>
-                    <a:lstStyle/>
-                    <a:p>
-                      <a:pPr algn="l"/>
-                      <a:r>
-                        <a:rPr sz="1000">
-                          <a:solidFill>
-                            <a:srgbClr val="111827"/>
-                          </a:solidFill>
-                        </a:rPr>
-                        <a:t>5</a:t>
-                      </a:r>
-                    </a:p>
-                  </a:txBody>
-                  <a:tcPr>
-                    <a:solidFill>
-                      <a:srgbClr val="FFFFFF"/>
-                    </a:solidFill>
-                  </a:tcPr>
-                </a:tc>
-                <a:tc>
-                  <a:txBody>
-                    <a:bodyPr/>
-                    <a:lstStyle/>
-                    <a:p>
-                      <a:pPr algn="ctr"/>
-                      <a:r>
-                        <a:rPr sz="1000">
-                          <a:solidFill>
-                            <a:srgbClr val="111827"/>
-                          </a:solidFill>
-                        </a:rPr>
-                        <a:t>10,000</a:t>
-                      </a:r>
-                    </a:p>
-                  </a:txBody>
-                  <a:tcPr>
-                    <a:solidFill>
-                      <a:srgbClr val="FFFFFF"/>
-                    </a:solidFill>
-                  </a:tcPr>
-                </a:tc>
-                <a:tc>
-                  <a:txBody>
-                    <a:bodyPr/>
-                    <a:lstStyle/>
-                    <a:p>
-                      <a:pPr algn="ctr"/>
-                      <a:r>
-                        <a:rPr sz="1000">
-                          <a:solidFill>
-                            <a:srgbClr val="111827"/>
-                          </a:solidFill>
-                        </a:rPr>
-                        <a:t>266</a:t>
-                      </a:r>
-                    </a:p>
-                  </a:txBody>
-                  <a:tcPr>
-                    <a:solidFill>
-                      <a:srgbClr val="FFFFFF"/>
-                    </a:solidFill>
-                  </a:tcPr>
-                </a:tc>
-                <a:tc>
-                  <a:txBody>
-                    <a:bodyPr/>
-                    <a:lstStyle/>
-                    <a:p>
-                      <a:pPr algn="ctr"/>
-                      <a:r>
-                        <a:rPr sz="1000">
-                          <a:solidFill>
-                            <a:srgbClr val="111827"/>
-                          </a:solidFill>
-                        </a:rPr>
-                        <a:t>190</a:t>
-                      </a:r>
-                    </a:p>
-                  </a:txBody>
-                  <a:tcPr>
-                    <a:solidFill>
-                      <a:srgbClr val="FFFFFF"/>
-                    </a:solidFill>
-                  </a:tcPr>
-                </a:tc>
-                <a:tc>
-                  <a:txBody>
-                    <a:bodyPr/>
-                    <a:lstStyle/>
-                    <a:p>
-                      <a:pPr algn="ctr"/>
-                      <a:r>
-                        <a:rPr sz="1000">
-                          <a:solidFill>
-                            <a:srgbClr val="111827"/>
-                          </a:solidFill>
-                        </a:rPr>
-                        <a:t>29%</a:t>
-                      </a:r>
-                    </a:p>
-                  </a:txBody>
-                  <a:tcPr>
-                    <a:solidFill>
-                      <a:srgbClr val="FFFFFF"/>
-                    </a:solidFill>
-                  </a:tcPr>
-                </a:tc>
-              </a:tr>
-              <a:tr h="679268">
-                <a:tc>
-                  <a:txBody>
-                    <a:bodyPr/>
-                    <a:lstStyle/>
-                    <a:p>
-                      <a:pPr algn="l"/>
-                      <a:r>
-                        <a:rPr sz="1000">
-                          <a:solidFill>
-                            <a:srgbClr val="111827"/>
-                          </a:solidFill>
-                        </a:rPr>
-                        <a:t>5</a:t>
-                      </a:r>
-                    </a:p>
-                  </a:txBody>
-                  <a:tcPr>
-                    <a:solidFill>
-                      <a:srgbClr val="EEF2FF"/>
-                    </a:solidFill>
-                  </a:tcPr>
-                </a:tc>
-                <a:tc>
-                  <a:txBody>
-                    <a:bodyPr/>
-                    <a:lstStyle/>
-                    <a:p>
-                      <a:pPr algn="ctr"/>
-                      <a:r>
-                        <a:rPr sz="1000">
-                          <a:solidFill>
-                            <a:srgbClr val="111827"/>
-                          </a:solidFill>
-                        </a:rPr>
-                        <a:t>100,000</a:t>
-                      </a:r>
-                    </a:p>
-                  </a:txBody>
-                  <a:tcPr>
-                    <a:solidFill>
-                      <a:srgbClr val="EEF2FF"/>
-                    </a:solidFill>
-                  </a:tcPr>
-                </a:tc>
-                <a:tc>
-                  <a:txBody>
-                    <a:bodyPr/>
-                    <a:lstStyle/>
-                    <a:p>
-                      <a:pPr algn="ctr"/>
-                      <a:r>
-                        <a:rPr sz="1000">
-                          <a:solidFill>
-                            <a:srgbClr val="111827"/>
-                          </a:solidFill>
-                        </a:rPr>
-                        <a:t>2,663</a:t>
-                      </a:r>
-                    </a:p>
-                  </a:txBody>
-                  <a:tcPr>
-                    <a:solidFill>
-                      <a:srgbClr val="EEF2FF"/>
-                    </a:solidFill>
-                  </a:tcPr>
-                </a:tc>
-                <a:tc>
-                  <a:txBody>
-                    <a:bodyPr/>
-                    <a:lstStyle/>
-                    <a:p>
-                      <a:pPr algn="ctr"/>
-                      <a:r>
-                        <a:rPr sz="1000">
-                          <a:solidFill>
-                            <a:srgbClr val="111827"/>
-                          </a:solidFill>
-                        </a:rPr>
-                        <a:t>1,905</a:t>
-                      </a:r>
-                    </a:p>
-                  </a:txBody>
-                  <a:tcPr>
-                    <a:solidFill>
-                      <a:srgbClr val="EEF2FF"/>
-                    </a:solidFill>
-                  </a:tcPr>
-                </a:tc>
-                <a:tc>
-                  <a:txBody>
-                    <a:bodyPr/>
-                    <a:lstStyle/>
-                    <a:p>
-                      <a:pPr algn="ctr"/>
-                      <a:r>
-                        <a:rPr sz="1000">
-                          <a:solidFill>
-                            <a:srgbClr val="111827"/>
-                          </a:solidFill>
-                        </a:rPr>
-                        <a:t>28%</a:t>
-                      </a:r>
-                    </a:p>
-                  </a:txBody>
-                  <a:tcPr>
-                    <a:solidFill>
-                      <a:srgbClr val="EEF2FF"/>
-                    </a:solidFill>
-                  </a:tcPr>
-                </a:tc>
-              </a:tr>
-              <a:tr h="679268">
-                <a:tc>
-                  <a:txBody>
-                    <a:bodyPr/>
-                    <a:lstStyle/>
-                    <a:p>
-                      <a:pPr algn="l"/>
-                      <a:r>
-                        <a:rPr sz="1000">
-                          <a:solidFill>
-                            <a:srgbClr val="111827"/>
-                          </a:solidFill>
-                        </a:rPr>
-                        <a:t>100</a:t>
-                      </a:r>
-                    </a:p>
-                  </a:txBody>
-                  <a:tcPr>
-                    <a:solidFill>
-                      <a:srgbClr val="FFFFFF"/>
-                    </a:solidFill>
-                  </a:tcPr>
-                </a:tc>
-                <a:tc>
-                  <a:txBody>
-                    <a:bodyPr/>
-                    <a:lstStyle/>
-                    <a:p>
-                      <a:pPr algn="ctr"/>
-                      <a:r>
-                        <a:rPr sz="1000">
-                          <a:solidFill>
-                            <a:srgbClr val="111827"/>
-                          </a:solidFill>
-                        </a:rPr>
-                        <a:t>10,000</a:t>
-                      </a:r>
-                    </a:p>
-                  </a:txBody>
-                  <a:tcPr>
-                    <a:solidFill>
-                      <a:srgbClr val="FFFFFF"/>
-                    </a:solidFill>
-                  </a:tcPr>
-                </a:tc>
-                <a:tc>
-                  <a:txBody>
-                    <a:bodyPr/>
-                    <a:lstStyle/>
-                    <a:p>
-                      <a:pPr algn="ctr"/>
-                      <a:r>
-                        <a:rPr sz="1000">
-                          <a:solidFill>
-                            <a:srgbClr val="111827"/>
-                          </a:solidFill>
-                        </a:rPr>
-                        <a:t>196</a:t>
-                      </a:r>
-                    </a:p>
-                  </a:txBody>
-                  <a:tcPr>
-                    <a:solidFill>
-                      <a:srgbClr val="FFFFFF"/>
-                    </a:solidFill>
-                  </a:tcPr>
-                </a:tc>
-                <a:tc>
-                  <a:txBody>
-                    <a:bodyPr/>
-                    <a:lstStyle/>
-                    <a:p>
-                      <a:pPr algn="ctr"/>
-                      <a:r>
-                        <a:rPr sz="1000">
-                          <a:solidFill>
-                            <a:srgbClr val="111827"/>
-                          </a:solidFill>
-                        </a:rPr>
-                        <a:t>144</a:t>
-                      </a:r>
-                    </a:p>
-                  </a:txBody>
-                  <a:tcPr>
-                    <a:solidFill>
-                      <a:srgbClr val="FFFFFF"/>
-                    </a:solidFill>
-                  </a:tcPr>
-                </a:tc>
-                <a:tc>
-                  <a:txBody>
-                    <a:bodyPr/>
-                    <a:lstStyle/>
-                    <a:p>
-                      <a:pPr algn="ctr"/>
-                      <a:r>
-                        <a:rPr sz="1000">
-                          <a:solidFill>
-                            <a:srgbClr val="111827"/>
-                          </a:solidFill>
-                        </a:rPr>
-                        <a:t>27%</a:t>
-                      </a:r>
-                    </a:p>
-                  </a:txBody>
-                  <a:tcPr>
-                    <a:solidFill>
-                      <a:srgbClr val="FFFFFF"/>
-                    </a:solidFill>
-                  </a:tcPr>
-                </a:tc>
-              </a:tr>
-              <a:tr h="679272">
-                <a:tc>
-                  <a:txBody>
-                    <a:bodyPr/>
-                    <a:lstStyle/>
-                    <a:p>
-                      <a:pPr algn="l"/>
-                      <a:r>
-                        <a:rPr sz="1000">
-                          <a:solidFill>
-                            <a:srgbClr val="111827"/>
-                          </a:solidFill>
-                        </a:rPr>
-                        <a:t>100</a:t>
-                      </a:r>
-                    </a:p>
-                  </a:txBody>
-                  <a:tcPr>
-                    <a:solidFill>
-                      <a:srgbClr val="EEF2FF"/>
-                    </a:solidFill>
-                  </a:tcPr>
-                </a:tc>
-                <a:tc>
-                  <a:txBody>
-                    <a:bodyPr/>
-                    <a:lstStyle/>
-                    <a:p>
-                      <a:pPr algn="ctr"/>
-                      <a:r>
-                        <a:rPr sz="1000">
-                          <a:solidFill>
-                            <a:srgbClr val="111827"/>
-                          </a:solidFill>
-                        </a:rPr>
-                        <a:t>100,000</a:t>
-                      </a:r>
-                    </a:p>
-                  </a:txBody>
-                  <a:tcPr>
-                    <a:solidFill>
-                      <a:srgbClr val="EEF2FF"/>
-                    </a:solidFill>
-                  </a:tcPr>
-                </a:tc>
-                <a:tc>
-                  <a:txBody>
-                    <a:bodyPr/>
-                    <a:lstStyle/>
-                    <a:p>
-                      <a:pPr algn="ctr"/>
-                      <a:r>
-                        <a:rPr sz="1000">
-                          <a:solidFill>
-                            <a:srgbClr val="111827"/>
-                          </a:solidFill>
-                        </a:rPr>
-                        <a:t>1,931</a:t>
-                      </a:r>
-                    </a:p>
-                  </a:txBody>
-                  <a:tcPr>
-                    <a:solidFill>
-                      <a:srgbClr val="EEF2FF"/>
-                    </a:solidFill>
-                  </a:tcPr>
-                </a:tc>
-                <a:tc>
-                  <a:txBody>
-                    <a:bodyPr/>
-                    <a:lstStyle/>
-                    <a:p>
-                      <a:pPr algn="ctr"/>
-                      <a:r>
-                        <a:rPr sz="1000">
-                          <a:solidFill>
-                            <a:srgbClr val="111827"/>
-                          </a:solidFill>
-                        </a:rPr>
-                        <a:t>1,404</a:t>
-                      </a:r>
-                    </a:p>
-                  </a:txBody>
-                  <a:tcPr>
-                    <a:solidFill>
-                      <a:srgbClr val="EEF2FF"/>
-                    </a:solidFill>
-                  </a:tcPr>
-                </a:tc>
-                <a:tc>
-                  <a:txBody>
-                    <a:bodyPr/>
-                    <a:lstStyle/>
-                    <a:p>
-                      <a:pPr algn="ctr"/>
-                      <a:r>
-                        <a:rPr sz="1000">
-                          <a:solidFill>
-                            <a:srgbClr val="111827"/>
-                          </a:solidFill>
-                        </a:rPr>
-                        <a:t>27%</a:t>
-                      </a:r>
-                    </a:p>
-                  </a:txBody>
-                  <a:tcPr>
-                    <a:solidFill>
-                      <a:srgbClr val="EEF2FF"/>
-                    </a:solidFill>
-                  </a:tcPr>
-                </a:tc>
-              </a:tr>
-            </a:tbl>
-          </a:graphicData>
-        </a:graphic>
-      </p:graphicFrame>
+        </p:nvSpPr>
+        <p:spPr>
+          <a:xfrm>
+            <a:off x="457200" y="1051560"/>
+            <a:ext cx="5852160" cy="5303520"/>
+          </a:xfrm>
+          <a:prstGeom prst="rect">
+            <a:avLst/>
+          </a:prstGeom>
+          <a:noFill/>
+        </p:spPr>
+        <p:txBody>
+          <a:bodyPr wrap="square" anchor="t">
+            <a:spAutoFit/>
+          </a:bodyPr>
+          <a:lstStyle/>
+          <a:p>
+            <a:pPr>
+              <a:spcAft>
+                <a:spcPts val="600"/>
+              </a:spcAft>
+            </a:pPr>
+            <a:r>
+              <a:rPr sz="1400" b="0">
+                <a:solidFill>
+                  <a:srgbClr val="111827"/>
+                </a:solidFill>
+                <a:latin typeface="Calibri"/>
+              </a:rPr>
+              <a:t>•  Exp. 1 - Impacto da ordem m: m em {3,4,5,8,16,32,64,100,128,256,512,1000}, N=10^5.</a:t>
+            </a:r>
+          </a:p>
+          <a:p>
+            <a:pPr>
+              <a:spcAft>
+                <a:spcPts val="600"/>
+              </a:spcAft>
+            </a:pPr>
+            <a:r>
+              <a:rPr sz="1400" b="0">
+                <a:solidFill>
+                  <a:srgbClr val="111827"/>
+                </a:solidFill>
+                <a:latin typeface="Calibri"/>
+              </a:rPr>
+              <a:t>•  Exp. 2 - Escala do conjunto: N em {10^3,10^4,10^5,10^6}, m em {3,100,1000}.</a:t>
+            </a:r>
+          </a:p>
+          <a:p>
+            <a:pPr>
+              <a:spcAft>
+                <a:spcPts val="600"/>
+              </a:spcAft>
+            </a:pPr>
+            <a:r>
+              <a:rPr sz="1400" b="0">
+                <a:solidFill>
+                  <a:srgbClr val="111827"/>
+                </a:solidFill>
+                <a:latin typeface="Calibri"/>
+              </a:rPr>
+              <a:t>•  Exp. 3 - Ocupação do arquivo: churn COM e SEM reaproveitamento.</a:t>
+            </a:r>
+          </a:p>
+          <a:p>
+            <a:pPr>
+              <a:spcAft>
+                <a:spcPts val="600"/>
+              </a:spcAft>
+            </a:pPr>
+            <a:r>
+              <a:rPr sz="1400" b="0">
+                <a:solidFill>
+                  <a:srgbClr val="111827"/>
+                </a:solidFill>
+                <a:latin typeface="Calibri"/>
+              </a:rPr>
+              <a:t>•  Exp. 4 - Tempo: CPU (user+sys) vs espera de I/O (getrusage).</a:t>
+            </a:r>
+          </a:p>
+          <a:p>
+            <a:pPr>
+              <a:spcAft>
+                <a:spcPts val="600"/>
+              </a:spcAft>
+            </a:pPr>
+            <a:r>
+              <a:rPr sz="1400" b="0">
+                <a:solidFill>
+                  <a:srgbClr val="111827"/>
+                </a:solidFill>
+                <a:latin typeface="Calibri"/>
+              </a:rPr>
+              <a:t>•  Modos aleatório e sequencial em todos.</a:t>
+            </a:r>
+          </a:p>
+          <a:p>
+            <a:pPr>
+              <a:spcAft>
+                <a:spcPts val="600"/>
+              </a:spcAft>
+            </a:pPr>
+            <a:r>
+              <a:rPr sz="1400" b="0">
+                <a:solidFill>
+                  <a:srgbClr val="111827"/>
+                </a:solidFill>
+                <a:latin typeface="Calibri"/>
+              </a:rPr>
+              <a:t>•  Novidade: validação em 2 máquinas (Notebook x Titan/USP) - disco idêntico.</a:t>
+            </a:r>
+          </a:p>
+        </p:txBody>
+      </p:sp>
       <p:pic>
         <p:nvPicPr>
-          <p:cNvPr id="5" name="Picture 4" descr="chart_reuse.png"/>
+          <p:cNvPr id="5" name="Picture 4" descr="chart_io_vs_N.png"/>
           <p:cNvPicPr>
             <a:picLocks noChangeAspect="1"/>
           </p:cNvPicPr>
@@ -7641,8 +5304,8 @@
         </p:blipFill>
         <p:spPr>
           <a:xfrm>
-            <a:off x="6400800" y="1188720"/>
-            <a:ext cx="5486400" cy="3200400"/>
+            <a:off x="6355080" y="1371600"/>
+            <a:ext cx="5577840" cy="3103921"/>
           </a:xfrm>
           <a:prstGeom prst="rect">
             <a:avLst/>
@@ -7657,8 +5320,8 @@
         </p:nvSpPr>
         <p:spPr>
           <a:xfrm>
-            <a:off x="365760" y="6126480"/>
-            <a:ext cx="11430000" cy="548640"/>
+            <a:off x="457200" y="6455664"/>
+            <a:ext cx="11247120" cy="310896"/>
           </a:xfrm>
           <a:prstGeom prst="rect">
             <a:avLst/>
@@ -7677,52 +5340,13 @@
               </a:spcAft>
             </a:pPr>
             <a:r>
-              <a:rPr sz="1100" b="0">
+              <a:rPr sz="900" b="0">
                 <a:solidFill>
                   <a:srgbClr val="6B7280"/>
                 </a:solidFill>
                 <a:latin typeface="Calibri"/>
               </a:rPr>
-              <a:t>O reaproveitamento de nós economiza ~27-30% do tamanho do arquivo neste workload.</a:t>
-            </a:r>
-          </a:p>
-        </p:txBody>
-      </p:sp>
-      <p:sp>
-        <p:nvSpPr>
-          <p:cNvPr id="7" name="TextBox 6"/>
-          <p:cNvSpPr txBox="1"/>
-          <p:nvPr/>
-        </p:nvSpPr>
-        <p:spPr>
-          <a:xfrm>
-            <a:off x="457200" y="6446520"/>
-            <a:ext cx="11247120" cy="320040"/>
-          </a:xfrm>
-          <a:prstGeom prst="rect">
-            <a:avLst/>
-          </a:prstGeom>
-          <a:noFill/>
-        </p:spPr>
-        <p:txBody>
-          <a:bodyPr wrap="square" anchor="t">
-            <a:spAutoFit/>
-          </a:bodyPr>
-          <a:lstStyle/>
-          <a:p>
-            <a:pPr>
-              <a:spcAft>
-                <a:spcPts val="600"/>
-              </a:spcAft>
-            </a:pPr>
-            <a:r>
-              <a:rPr sz="900" b="0">
-                <a:solidFill>
-                  <a:srgbClr val="6B7280"/>
-                </a:solidFill>
-                <a:latin typeface="Calibri"/>
-              </a:rPr>
-              <a:t>Árvore B em Memória Secundária — AED-PG-2026          7/10</a:t>
+              <a:t>Árvore B em Memória Secundária — AED-PG-2026          5/12</a:t>
             </a:r>
           </a:p>
         </p:txBody>
@@ -7735,7 +5359,7 @@
 </p:sld>
 </file>
 
-<file path=ppt/slides/slide8.xml><?xml version="1.0" encoding="utf-8"?>
+<file path=ppt/slides/slide6.xml><?xml version="1.0" encoding="utf-8"?>
 <p:sld xmlns:a="http://schemas.openxmlformats.org/drawingml/2006/main" xmlns:p="http://schemas.openxmlformats.org/presentationml/2006/main" xmlns:r="http://schemas.openxmlformats.org/officeDocument/2006/relationships">
   <p:cSld>
     <p:spTree>
@@ -7816,13 +5440,13 @@
               </a:spcAft>
             </a:pPr>
             <a:r>
-              <a:rPr sz="2400" b="1">
+              <a:rPr sz="2300" b="1">
                 <a:solidFill>
                   <a:srgbClr val="FFFFFF"/>
                 </a:solidFill>
                 <a:latin typeface="Calibri"/>
               </a:rPr>
-              <a:t>7. Utilização de LLM</a:t>
+              <a:t>5. Métricas utilizadas</a:t>
             </a:r>
           </a:p>
         </p:txBody>
@@ -7835,8 +5459,8 @@
         </p:nvSpPr>
         <p:spPr>
           <a:xfrm>
-            <a:off x="457200" y="1097280"/>
-            <a:ext cx="6400800" cy="5303520"/>
+            <a:off x="457200" y="1051560"/>
+            <a:ext cx="5852160" cy="5303520"/>
           </a:xfrm>
           <a:prstGeom prst="rect">
             <a:avLst/>
@@ -7861,7 +5485,7 @@
                 </a:solidFill>
                 <a:latin typeface="Calibri"/>
               </a:rPr>
-              <a:t>•  Ferramenta: Claude (Anthropic) via Claude Code CLI - auxílio ao desenvolvimento.</a:t>
+              <a:t>•  Acessos ao disco - contador readNode+writeNode; total e média/op (métrica honesta de I/O).</a:t>
             </a:r>
           </a:p>
           <a:p>
@@ -7877,7 +5501,7 @@
                 </a:solidFill>
                 <a:latin typeface="Calibri"/>
               </a:rPr>
-              <a:t>•  Síntese e discussão dos pseudocódigos dos slides do professor.</a:t>
+              <a:t>•  Altura da árvore - nº de níveis (~ log_m N).</a:t>
             </a:r>
           </a:p>
           <a:p>
@@ -7893,7 +5517,7 @@
                 </a:solidFill>
                 <a:latin typeface="Calibri"/>
               </a:rPr>
-              <a:t>•  Identificação e correção de 2 bugs: (1) stale-header em insertB; (2) eofbit do fstream em escritas além do fim.</a:t>
+              <a:t>•  Ocupação - nós físicos, nós livres e tamanho em bytes.</a:t>
             </a:r>
           </a:p>
           <a:p>
@@ -7909,7 +5533,7 @@
                 </a:solidFill>
                 <a:latin typeface="Calibri"/>
               </a:rPr>
-              <a:t>•  Geração do harness experimental (bench), tabelas, gráficos e desta apresentação.</a:t>
+              <a:t>•  Tempo de parede (wall) - relógio de alta resolução.</a:t>
             </a:r>
           </a:p>
           <a:p>
@@ -7925,14 +5549,30 @@
                 </a:solidFill>
                 <a:latin typeface="Calibri"/>
               </a:rPr>
-              <a:t>•  Todo o código foi revisado e validado manualmente pelo autor.</a:t>
+              <a:t>•  Tempo de CPU - usuário (lógica) e sistema (syscalls de I/O), via getrusage.</a:t>
+            </a:r>
+          </a:p>
+          <a:p>
+            <a:pPr>
+              <a:spcAft>
+                <a:spcPts val="600"/>
+              </a:spcAft>
+            </a:pPr>
+            <a:r>
+              <a:rPr sz="1400" b="0">
+                <a:solidFill>
+                  <a:srgbClr val="111827"/>
+                </a:solidFill>
+                <a:latin typeface="Calibri"/>
+              </a:rPr>
+              <a:t>•  Espera de I/O - wall menos CPU.</a:t>
             </a:r>
           </a:p>
         </p:txBody>
       </p:sp>
       <p:pic>
         <p:nvPicPr>
-          <p:cNvPr id="5" name="Picture 4" descr="chart_machines.png"/>
+          <p:cNvPr id="5" name="Picture 4" descr="chart_height_vs_m.png"/>
           <p:cNvPicPr>
             <a:picLocks noChangeAspect="1"/>
           </p:cNvPicPr>
@@ -7946,8 +5586,8 @@
         </p:blipFill>
         <p:spPr>
           <a:xfrm>
-            <a:off x="7040880" y="1188720"/>
-            <a:ext cx="4846320" cy="2827020"/>
+            <a:off x="6355080" y="1371600"/>
+            <a:ext cx="5577840" cy="3103921"/>
           </a:xfrm>
           <a:prstGeom prst="rect">
             <a:avLst/>
@@ -7962,8 +5602,8 @@
         </p:nvSpPr>
         <p:spPr>
           <a:xfrm>
-            <a:off x="457200" y="6446520"/>
-            <a:ext cx="11247120" cy="320040"/>
+            <a:off x="457200" y="6455664"/>
+            <a:ext cx="11247120" cy="310896"/>
           </a:xfrm>
           <a:prstGeom prst="rect">
             <a:avLst/>
@@ -7988,7 +5628,7 @@
                 </a:solidFill>
                 <a:latin typeface="Calibri"/>
               </a:rPr>
-              <a:t>Árvore B em Memória Secundária — AED-PG-2026          8/10</a:t>
+              <a:t>Árvore B em Memória Secundária — AED-PG-2026          6/12</a:t>
             </a:r>
           </a:p>
         </p:txBody>
@@ -8001,7 +5641,7 @@
 </p:sld>
 </file>
 
-<file path=ppt/slides/slide9.xml><?xml version="1.0" encoding="utf-8"?>
+<file path=ppt/slides/slide7.xml><?xml version="1.0" encoding="utf-8"?>
 <p:sld xmlns:a="http://schemas.openxmlformats.org/drawingml/2006/main" xmlns:p="http://schemas.openxmlformats.org/presentationml/2006/main" xmlns:r="http://schemas.openxmlformats.org/officeDocument/2006/relationships">
   <p:cSld>
     <p:spTree>
@@ -8082,27 +5722,1823 @@
               </a:spcAft>
             </a:pPr>
             <a:r>
-              <a:rPr sz="2400" b="1">
+              <a:rPr sz="2300" b="1">
                 <a:solidFill>
                   <a:srgbClr val="FFFFFF"/>
                 </a:solidFill>
                 <a:latin typeface="Calibri"/>
               </a:rPr>
-              <a:t>8. Dificuldades · Vantagens x Desvantagens</a:t>
-            </a:r>
-          </a:p>
-        </p:txBody>
-      </p:sp>
-      <p:sp>
-        <p:nvSpPr>
-          <p:cNvPr id="4" name="TextBox 3"/>
+              <a:t>6. Tabela de Resultados - impacto de m (N=10^5, aleatório)</a:t>
+            </a:r>
+          </a:p>
+        </p:txBody>
+      </p:sp>
+      <p:graphicFrame>
+        <p:nvGraphicFramePr>
+          <p:cNvPr id="4" name="Table 3"/>
+          <p:cNvGraphicFramePr>
+            <a:graphicFrameLocks noGrp="1"/>
+          </p:cNvGraphicFramePr>
+          <p:nvPr/>
+        </p:nvGraphicFramePr>
+        <p:xfrm>
+          <a:off x="365760" y="1051560"/>
+          <a:ext cx="5394960" cy="4572000"/>
+        </p:xfrm>
+        <a:graphic>
+          <a:graphicData uri="http://schemas.openxmlformats.org/drawingml/2006/table">
+            <a:tbl>
+              <a:tblPr firstRow="1" bandRow="1">
+                <a:tableStyleId>{5C22544A-7EE6-4342-B048-85BDC9FD1C3A}</a:tableStyleId>
+              </a:tblPr>
+              <a:tblGrid>
+                <a:gridCol w="899160"/>
+                <a:gridCol w="899160"/>
+                <a:gridCol w="899160"/>
+                <a:gridCol w="899160"/>
+                <a:gridCol w="899160"/>
+                <a:gridCol w="899160"/>
+              </a:tblGrid>
+              <a:tr h="351692">
+                <a:tc>
+                  <a:txBody>
+                    <a:bodyPr/>
+                    <a:lstStyle/>
+                    <a:p>
+                      <a:pPr algn="ctr"/>
+                      <a:r>
+                        <a:rPr sz="1100" b="1">
+                          <a:solidFill>
+                            <a:srgbClr val="FFFFFF"/>
+                          </a:solidFill>
+                        </a:rPr>
+                        <a:t>m</a:t>
+                      </a:r>
+                    </a:p>
+                  </a:txBody>
+                  <a:tcPr>
+                    <a:solidFill>
+                      <a:srgbClr val="1D4ED8"/>
+                    </a:solidFill>
+                  </a:tcPr>
+                </a:tc>
+                <a:tc>
+                  <a:txBody>
+                    <a:bodyPr/>
+                    <a:lstStyle/>
+                    <a:p>
+                      <a:pPr algn="ctr"/>
+                      <a:r>
+                        <a:rPr sz="1100" b="1">
+                          <a:solidFill>
+                            <a:srgbClr val="FFFFFF"/>
+                          </a:solidFill>
+                        </a:rPr>
+                        <a:t>altura</a:t>
+                      </a:r>
+                    </a:p>
+                  </a:txBody>
+                  <a:tcPr>
+                    <a:solidFill>
+                      <a:srgbClr val="1D4ED8"/>
+                    </a:solidFill>
+                  </a:tcPr>
+                </a:tc>
+                <a:tc>
+                  <a:txBody>
+                    <a:bodyPr/>
+                    <a:lstStyle/>
+                    <a:p>
+                      <a:pPr algn="ctr"/>
+                      <a:r>
+                        <a:rPr sz="1100" b="1">
+                          <a:solidFill>
+                            <a:srgbClr val="FFFFFF"/>
+                          </a:solidFill>
+                        </a:rPr>
+                        <a:t>busca I/O/op</a:t>
+                      </a:r>
+                    </a:p>
+                  </a:txBody>
+                  <a:tcPr>
+                    <a:solidFill>
+                      <a:srgbClr val="1D4ED8"/>
+                    </a:solidFill>
+                  </a:tcPr>
+                </a:tc>
+                <a:tc>
+                  <a:txBody>
+                    <a:bodyPr/>
+                    <a:lstStyle/>
+                    <a:p>
+                      <a:pPr algn="ctr"/>
+                      <a:r>
+                        <a:rPr sz="1100" b="1">
+                          <a:solidFill>
+                            <a:srgbClr val="FFFFFF"/>
+                          </a:solidFill>
+                        </a:rPr>
+                        <a:t>inser. I/O/op</a:t>
+                      </a:r>
+                    </a:p>
+                  </a:txBody>
+                  <a:tcPr>
+                    <a:solidFill>
+                      <a:srgbClr val="1D4ED8"/>
+                    </a:solidFill>
+                  </a:tcPr>
+                </a:tc>
+                <a:tc>
+                  <a:txBody>
+                    <a:bodyPr/>
+                    <a:lstStyle/>
+                    <a:p>
+                      <a:pPr algn="ctr"/>
+                      <a:r>
+                        <a:rPr sz="1100" b="1">
+                          <a:solidFill>
+                            <a:srgbClr val="FFFFFF"/>
+                          </a:solidFill>
+                        </a:rPr>
+                        <a:t>rem. I/O/op</a:t>
+                      </a:r>
+                    </a:p>
+                  </a:txBody>
+                  <a:tcPr>
+                    <a:solidFill>
+                      <a:srgbClr val="1D4ED8"/>
+                    </a:solidFill>
+                  </a:tcPr>
+                </a:tc>
+                <a:tc>
+                  <a:txBody>
+                    <a:bodyPr/>
+                    <a:lstStyle/>
+                    <a:p>
+                      <a:pPr algn="ctr"/>
+                      <a:r>
+                        <a:rPr sz="1100" b="1">
+                          <a:solidFill>
+                            <a:srgbClr val="FFFFFF"/>
+                          </a:solidFill>
+                        </a:rPr>
+                        <a:t>arquivo (KB)</a:t>
+                      </a:r>
+                    </a:p>
+                  </a:txBody>
+                  <a:tcPr>
+                    <a:solidFill>
+                      <a:srgbClr val="1D4ED8"/>
+                    </a:solidFill>
+                  </a:tcPr>
+                </a:tc>
+              </a:tr>
+              <a:tr h="351692">
+                <a:tc>
+                  <a:txBody>
+                    <a:bodyPr/>
+                    <a:lstStyle/>
+                    <a:p>
+                      <a:pPr algn="l"/>
+                      <a:r>
+                        <a:rPr sz="1000">
+                          <a:solidFill>
+                            <a:srgbClr val="111827"/>
+                          </a:solidFill>
+                        </a:rPr>
+                        <a:t>3</a:t>
+                      </a:r>
+                    </a:p>
+                  </a:txBody>
+                  <a:tcPr>
+                    <a:solidFill>
+                      <a:srgbClr val="FFFFFF"/>
+                    </a:solidFill>
+                  </a:tcPr>
+                </a:tc>
+                <a:tc>
+                  <a:txBody>
+                    <a:bodyPr/>
+                    <a:lstStyle/>
+                    <a:p>
+                      <a:pPr algn="ctr"/>
+                      <a:r>
+                        <a:rPr sz="1000">
+                          <a:solidFill>
+                            <a:srgbClr val="111827"/>
+                          </a:solidFill>
+                        </a:rPr>
+                        <a:t>14</a:t>
+                      </a:r>
+                    </a:p>
+                  </a:txBody>
+                  <a:tcPr>
+                    <a:solidFill>
+                      <a:srgbClr val="FFFFFF"/>
+                    </a:solidFill>
+                  </a:tcPr>
+                </a:tc>
+                <a:tc>
+                  <a:txBody>
+                    <a:bodyPr/>
+                    <a:lstStyle/>
+                    <a:p>
+                      <a:pPr algn="ctr"/>
+                      <a:r>
+                        <a:rPr sz="1000">
+                          <a:solidFill>
+                            <a:srgbClr val="111827"/>
+                          </a:solidFill>
+                        </a:rPr>
+                        <a:t>13.25</a:t>
+                      </a:r>
+                    </a:p>
+                  </a:txBody>
+                  <a:tcPr>
+                    <a:solidFill>
+                      <a:srgbClr val="FFFFFF"/>
+                    </a:solidFill>
+                  </a:tcPr>
+                </a:tc>
+                <a:tc>
+                  <a:txBody>
+                    <a:bodyPr/>
+                    <a:lstStyle/>
+                    <a:p>
+                      <a:pPr algn="ctr"/>
+                      <a:r>
+                        <a:rPr sz="1000">
+                          <a:solidFill>
+                            <a:srgbClr val="111827"/>
+                          </a:solidFill>
+                        </a:rPr>
+                        <a:t>16.90</a:t>
+                      </a:r>
+                    </a:p>
+                  </a:txBody>
+                  <a:tcPr>
+                    <a:solidFill>
+                      <a:srgbClr val="FFFFFF"/>
+                    </a:solidFill>
+                  </a:tcPr>
+                </a:tc>
+                <a:tc>
+                  <a:txBody>
+                    <a:bodyPr/>
+                    <a:lstStyle/>
+                    <a:p>
+                      <a:pPr algn="ctr"/>
+                      <a:r>
+                        <a:rPr sz="1000">
+                          <a:solidFill>
+                            <a:srgbClr val="111827"/>
+                          </a:solidFill>
+                        </a:rPr>
+                        <a:t>19.67</a:t>
+                      </a:r>
+                    </a:p>
+                  </a:txBody>
+                  <a:tcPr>
+                    <a:solidFill>
+                      <a:srgbClr val="FFFFFF"/>
+                    </a:solidFill>
+                  </a:tcPr>
+                </a:tc>
+                <a:tc>
+                  <a:txBody>
+                    <a:bodyPr/>
+                    <a:lstStyle/>
+                    <a:p>
+                      <a:pPr algn="ctr"/>
+                      <a:r>
+                        <a:rPr sz="1000">
+                          <a:solidFill>
+                            <a:srgbClr val="111827"/>
+                          </a:solidFill>
+                        </a:rPr>
+                        <a:t>2,040</a:t>
+                      </a:r>
+                    </a:p>
+                  </a:txBody>
+                  <a:tcPr>
+                    <a:solidFill>
+                      <a:srgbClr val="FFFFFF"/>
+                    </a:solidFill>
+                  </a:tcPr>
+                </a:tc>
+              </a:tr>
+              <a:tr h="351692">
+                <a:tc>
+                  <a:txBody>
+                    <a:bodyPr/>
+                    <a:lstStyle/>
+                    <a:p>
+                      <a:pPr algn="l"/>
+                      <a:r>
+                        <a:rPr sz="1000">
+                          <a:solidFill>
+                            <a:srgbClr val="111827"/>
+                          </a:solidFill>
+                        </a:rPr>
+                        <a:t>4</a:t>
+                      </a:r>
+                    </a:p>
+                  </a:txBody>
+                  <a:tcPr>
+                    <a:solidFill>
+                      <a:srgbClr val="EEF2FF"/>
+                    </a:solidFill>
+                  </a:tcPr>
+                </a:tc>
+                <a:tc>
+                  <a:txBody>
+                    <a:bodyPr/>
+                    <a:lstStyle/>
+                    <a:p>
+                      <a:pPr algn="ctr"/>
+                      <a:r>
+                        <a:rPr sz="1000">
+                          <a:solidFill>
+                            <a:srgbClr val="111827"/>
+                          </a:solidFill>
+                        </a:rPr>
+                        <a:t>11</a:t>
+                      </a:r>
+                    </a:p>
+                  </a:txBody>
+                  <a:tcPr>
+                    <a:solidFill>
+                      <a:srgbClr val="EEF2FF"/>
+                    </a:solidFill>
+                  </a:tcPr>
+                </a:tc>
+                <a:tc>
+                  <a:txBody>
+                    <a:bodyPr/>
+                    <a:lstStyle/>
+                    <a:p>
+                      <a:pPr algn="ctr"/>
+                      <a:r>
+                        <a:rPr sz="1000">
+                          <a:solidFill>
+                            <a:srgbClr val="111827"/>
+                          </a:solidFill>
+                        </a:rPr>
+                        <a:t>10.48</a:t>
+                      </a:r>
+                    </a:p>
+                  </a:txBody>
+                  <a:tcPr>
+                    <a:solidFill>
+                      <a:srgbClr val="EEF2FF"/>
+                    </a:solidFill>
+                  </a:tcPr>
+                </a:tc>
+                <a:tc>
+                  <a:txBody>
+                    <a:bodyPr/>
+                    <a:lstStyle/>
+                    <a:p>
+                      <a:pPr algn="ctr"/>
+                      <a:r>
+                        <a:rPr sz="1000">
+                          <a:solidFill>
+                            <a:srgbClr val="111827"/>
+                          </a:solidFill>
+                        </a:rPr>
+                        <a:t>13.51</a:t>
+                      </a:r>
+                    </a:p>
+                  </a:txBody>
+                  <a:tcPr>
+                    <a:solidFill>
+                      <a:srgbClr val="EEF2FF"/>
+                    </a:solidFill>
+                  </a:tcPr>
+                </a:tc>
+                <a:tc>
+                  <a:txBody>
+                    <a:bodyPr/>
+                    <a:lstStyle/>
+                    <a:p>
+                      <a:pPr algn="ctr"/>
+                      <a:r>
+                        <a:rPr sz="1000">
+                          <a:solidFill>
+                            <a:srgbClr val="111827"/>
+                          </a:solidFill>
+                        </a:rPr>
+                        <a:t>16.76</a:t>
+                      </a:r>
+                    </a:p>
+                  </a:txBody>
+                  <a:tcPr>
+                    <a:solidFill>
+                      <a:srgbClr val="EEF2FF"/>
+                    </a:solidFill>
+                  </a:tcPr>
+                </a:tc>
+                <a:tc>
+                  <a:txBody>
+                    <a:bodyPr/>
+                    <a:lstStyle/>
+                    <a:p>
+                      <a:pPr algn="ctr"/>
+                      <a:r>
+                        <a:rPr sz="1000">
+                          <a:solidFill>
+                            <a:srgbClr val="111827"/>
+                          </a:solidFill>
+                        </a:rPr>
+                        <a:t>1,829</a:t>
+                      </a:r>
+                    </a:p>
+                  </a:txBody>
+                  <a:tcPr>
+                    <a:solidFill>
+                      <a:srgbClr val="EEF2FF"/>
+                    </a:solidFill>
+                  </a:tcPr>
+                </a:tc>
+              </a:tr>
+              <a:tr h="351692">
+                <a:tc>
+                  <a:txBody>
+                    <a:bodyPr/>
+                    <a:lstStyle/>
+                    <a:p>
+                      <a:pPr algn="l"/>
+                      <a:r>
+                        <a:rPr sz="1000">
+                          <a:solidFill>
+                            <a:srgbClr val="111827"/>
+                          </a:solidFill>
+                        </a:rPr>
+                        <a:t>5</a:t>
+                      </a:r>
+                    </a:p>
+                  </a:txBody>
+                  <a:tcPr>
+                    <a:solidFill>
+                      <a:srgbClr val="FFFFFF"/>
+                    </a:solidFill>
+                  </a:tcPr>
+                </a:tc>
+                <a:tc>
+                  <a:txBody>
+                    <a:bodyPr/>
+                    <a:lstStyle/>
+                    <a:p>
+                      <a:pPr algn="ctr"/>
+                      <a:r>
+                        <a:rPr sz="1000">
+                          <a:solidFill>
+                            <a:srgbClr val="111827"/>
+                          </a:solidFill>
+                        </a:rPr>
+                        <a:t>9</a:t>
+                      </a:r>
+                    </a:p>
+                  </a:txBody>
+                  <a:tcPr>
+                    <a:solidFill>
+                      <a:srgbClr val="FFFFFF"/>
+                    </a:solidFill>
+                  </a:tcPr>
+                </a:tc>
+                <a:tc>
+                  <a:txBody>
+                    <a:bodyPr/>
+                    <a:lstStyle/>
+                    <a:p>
+                      <a:pPr algn="ctr"/>
+                      <a:r>
+                        <a:rPr sz="1000">
+                          <a:solidFill>
+                            <a:srgbClr val="111827"/>
+                          </a:solidFill>
+                        </a:rPr>
+                        <a:t>8.63</a:t>
+                      </a:r>
+                    </a:p>
+                  </a:txBody>
+                  <a:tcPr>
+                    <a:solidFill>
+                      <a:srgbClr val="FFFFFF"/>
+                    </a:solidFill>
+                  </a:tcPr>
+                </a:tc>
+                <a:tc>
+                  <a:txBody>
+                    <a:bodyPr/>
+                    <a:lstStyle/>
+                    <a:p>
+                      <a:pPr algn="ctr"/>
+                      <a:r>
+                        <a:rPr sz="1000">
+                          <a:solidFill>
+                            <a:srgbClr val="111827"/>
+                          </a:solidFill>
+                        </a:rPr>
+                        <a:t>11.50</a:t>
+                      </a:r>
+                    </a:p>
+                  </a:txBody>
+                  <a:tcPr>
+                    <a:solidFill>
+                      <a:srgbClr val="FFFFFF"/>
+                    </a:solidFill>
+                  </a:tcPr>
+                </a:tc>
+                <a:tc>
+                  <a:txBody>
+                    <a:bodyPr/>
+                    <a:lstStyle/>
+                    <a:p>
+                      <a:pPr algn="ctr"/>
+                      <a:r>
+                        <a:rPr sz="1000">
+                          <a:solidFill>
+                            <a:srgbClr val="111827"/>
+                          </a:solidFill>
+                        </a:rPr>
+                        <a:t>13.52</a:t>
+                      </a:r>
+                    </a:p>
+                  </a:txBody>
+                  <a:tcPr>
+                    <a:solidFill>
+                      <a:srgbClr val="FFFFFF"/>
+                    </a:solidFill>
+                  </a:tcPr>
+                </a:tc>
+                <a:tc>
+                  <a:txBody>
+                    <a:bodyPr/>
+                    <a:lstStyle/>
+                    <a:p>
+                      <a:pPr algn="ctr"/>
+                      <a:r>
+                        <a:rPr sz="1000">
+                          <a:solidFill>
+                            <a:srgbClr val="111827"/>
+                          </a:solidFill>
+                        </a:rPr>
+                        <a:t>1,589</a:t>
+                      </a:r>
+                    </a:p>
+                  </a:txBody>
+                  <a:tcPr>
+                    <a:solidFill>
+                      <a:srgbClr val="FFFFFF"/>
+                    </a:solidFill>
+                  </a:tcPr>
+                </a:tc>
+              </a:tr>
+              <a:tr h="351692">
+                <a:tc>
+                  <a:txBody>
+                    <a:bodyPr/>
+                    <a:lstStyle/>
+                    <a:p>
+                      <a:pPr algn="l"/>
+                      <a:r>
+                        <a:rPr sz="1000">
+                          <a:solidFill>
+                            <a:srgbClr val="111827"/>
+                          </a:solidFill>
+                        </a:rPr>
+                        <a:t>8</a:t>
+                      </a:r>
+                    </a:p>
+                  </a:txBody>
+                  <a:tcPr>
+                    <a:solidFill>
+                      <a:srgbClr val="EEF2FF"/>
+                    </a:solidFill>
+                  </a:tcPr>
+                </a:tc>
+                <a:tc>
+                  <a:txBody>
+                    <a:bodyPr/>
+                    <a:lstStyle/>
+                    <a:p>
+                      <a:pPr algn="ctr"/>
+                      <a:r>
+                        <a:rPr sz="1000">
+                          <a:solidFill>
+                            <a:srgbClr val="111827"/>
+                          </a:solidFill>
+                        </a:rPr>
+                        <a:t>7</a:t>
+                      </a:r>
+                    </a:p>
+                  </a:txBody>
+                  <a:tcPr>
+                    <a:solidFill>
+                      <a:srgbClr val="EEF2FF"/>
+                    </a:solidFill>
+                  </a:tcPr>
+                </a:tc>
+                <a:tc>
+                  <a:txBody>
+                    <a:bodyPr/>
+                    <a:lstStyle/>
+                    <a:p>
+                      <a:pPr algn="ctr"/>
+                      <a:r>
+                        <a:rPr sz="1000">
+                          <a:solidFill>
+                            <a:srgbClr val="111827"/>
+                          </a:solidFill>
+                        </a:rPr>
+                        <a:t>6.79</a:t>
+                      </a:r>
+                    </a:p>
+                  </a:txBody>
+                  <a:tcPr>
+                    <a:solidFill>
+                      <a:srgbClr val="EEF2FF"/>
+                    </a:solidFill>
+                  </a:tcPr>
+                </a:tc>
+                <a:tc>
+                  <a:txBody>
+                    <a:bodyPr/>
+                    <a:lstStyle/>
+                    <a:p>
+                      <a:pPr algn="ctr"/>
+                      <a:r>
+                        <a:rPr sz="1000">
+                          <a:solidFill>
+                            <a:srgbClr val="111827"/>
+                          </a:solidFill>
+                        </a:rPr>
+                        <a:t>9.05</a:t>
+                      </a:r>
+                    </a:p>
+                  </a:txBody>
+                  <a:tcPr>
+                    <a:solidFill>
+                      <a:srgbClr val="EEF2FF"/>
+                    </a:solidFill>
+                  </a:tcPr>
+                </a:tc>
+                <a:tc>
+                  <a:txBody>
+                    <a:bodyPr/>
+                    <a:lstStyle/>
+                    <a:p>
+                      <a:pPr algn="ctr"/>
+                      <a:r>
+                        <a:rPr sz="1000">
+                          <a:solidFill>
+                            <a:srgbClr val="111827"/>
+                          </a:solidFill>
+                        </a:rPr>
+                        <a:t>10.91</a:t>
+                      </a:r>
+                    </a:p>
+                  </a:txBody>
+                  <a:tcPr>
+                    <a:solidFill>
+                      <a:srgbClr val="EEF2FF"/>
+                    </a:solidFill>
+                  </a:tcPr>
+                </a:tc>
+                <a:tc>
+                  <a:txBody>
+                    <a:bodyPr/>
+                    <a:lstStyle/>
+                    <a:p>
+                      <a:pPr algn="ctr"/>
+                      <a:r>
+                        <a:rPr sz="1000">
+                          <a:solidFill>
+                            <a:srgbClr val="111827"/>
+                          </a:solidFill>
+                        </a:rPr>
+                        <a:t>1,411</a:t>
+                      </a:r>
+                    </a:p>
+                  </a:txBody>
+                  <a:tcPr>
+                    <a:solidFill>
+                      <a:srgbClr val="EEF2FF"/>
+                    </a:solidFill>
+                  </a:tcPr>
+                </a:tc>
+              </a:tr>
+              <a:tr h="351692">
+                <a:tc>
+                  <a:txBody>
+                    <a:bodyPr/>
+                    <a:lstStyle/>
+                    <a:p>
+                      <a:pPr algn="l"/>
+                      <a:r>
+                        <a:rPr sz="1000">
+                          <a:solidFill>
+                            <a:srgbClr val="111827"/>
+                          </a:solidFill>
+                        </a:rPr>
+                        <a:t>16</a:t>
+                      </a:r>
+                    </a:p>
+                  </a:txBody>
+                  <a:tcPr>
+                    <a:solidFill>
+                      <a:srgbClr val="FFFFFF"/>
+                    </a:solidFill>
+                  </a:tcPr>
+                </a:tc>
+                <a:tc>
+                  <a:txBody>
+                    <a:bodyPr/>
+                    <a:lstStyle/>
+                    <a:p>
+                      <a:pPr algn="ctr"/>
+                      <a:r>
+                        <a:rPr sz="1000">
+                          <a:solidFill>
+                            <a:srgbClr val="111827"/>
+                          </a:solidFill>
+                        </a:rPr>
+                        <a:t>5</a:t>
+                      </a:r>
+                    </a:p>
+                  </a:txBody>
+                  <a:tcPr>
+                    <a:solidFill>
+                      <a:srgbClr val="FFFFFF"/>
+                    </a:solidFill>
+                  </a:tcPr>
+                </a:tc>
+                <a:tc>
+                  <a:txBody>
+                    <a:bodyPr/>
+                    <a:lstStyle/>
+                    <a:p>
+                      <a:pPr algn="ctr"/>
+                      <a:r>
+                        <a:rPr sz="1000">
+                          <a:solidFill>
+                            <a:srgbClr val="111827"/>
+                          </a:solidFill>
+                        </a:rPr>
+                        <a:t>4.90</a:t>
+                      </a:r>
+                    </a:p>
+                  </a:txBody>
+                  <a:tcPr>
+                    <a:solidFill>
+                      <a:srgbClr val="FFFFFF"/>
+                    </a:solidFill>
+                  </a:tcPr>
+                </a:tc>
+                <a:tc>
+                  <a:txBody>
+                    <a:bodyPr/>
+                    <a:lstStyle/>
+                    <a:p>
+                      <a:pPr algn="ctr"/>
+                      <a:r>
+                        <a:rPr sz="1000">
+                          <a:solidFill>
+                            <a:srgbClr val="111827"/>
+                          </a:solidFill>
+                        </a:rPr>
+                        <a:t>7.00</a:t>
+                      </a:r>
+                    </a:p>
+                  </a:txBody>
+                  <a:tcPr>
+                    <a:solidFill>
+                      <a:srgbClr val="FFFFFF"/>
+                    </a:solidFill>
+                  </a:tcPr>
+                </a:tc>
+                <a:tc>
+                  <a:txBody>
+                    <a:bodyPr/>
+                    <a:lstStyle/>
+                    <a:p>
+                      <a:pPr algn="ctr"/>
+                      <a:r>
+                        <a:rPr sz="1000">
+                          <a:solidFill>
+                            <a:srgbClr val="111827"/>
+                          </a:solidFill>
+                        </a:rPr>
+                        <a:t>8.16</a:t>
+                      </a:r>
+                    </a:p>
+                  </a:txBody>
+                  <a:tcPr>
+                    <a:solidFill>
+                      <a:srgbClr val="FFFFFF"/>
+                    </a:solidFill>
+                  </a:tcPr>
+                </a:tc>
+                <a:tc>
+                  <a:txBody>
+                    <a:bodyPr/>
+                    <a:lstStyle/>
+                    <a:p>
+                      <a:pPr algn="ctr"/>
+                      <a:r>
+                        <a:rPr sz="1000">
+                          <a:solidFill>
+                            <a:srgbClr val="111827"/>
+                          </a:solidFill>
+                        </a:rPr>
+                        <a:t>1,251</a:t>
+                      </a:r>
+                    </a:p>
+                  </a:txBody>
+                  <a:tcPr>
+                    <a:solidFill>
+                      <a:srgbClr val="FFFFFF"/>
+                    </a:solidFill>
+                  </a:tcPr>
+                </a:tc>
+              </a:tr>
+              <a:tr h="351692">
+                <a:tc>
+                  <a:txBody>
+                    <a:bodyPr/>
+                    <a:lstStyle/>
+                    <a:p>
+                      <a:pPr algn="l"/>
+                      <a:r>
+                        <a:rPr sz="1000">
+                          <a:solidFill>
+                            <a:srgbClr val="111827"/>
+                          </a:solidFill>
+                        </a:rPr>
+                        <a:t>32</a:t>
+                      </a:r>
+                    </a:p>
+                  </a:txBody>
+                  <a:tcPr>
+                    <a:solidFill>
+                      <a:srgbClr val="EEF2FF"/>
+                    </a:solidFill>
+                  </a:tcPr>
+                </a:tc>
+                <a:tc>
+                  <a:txBody>
+                    <a:bodyPr/>
+                    <a:lstStyle/>
+                    <a:p>
+                      <a:pPr algn="ctr"/>
+                      <a:r>
+                        <a:rPr sz="1000">
+                          <a:solidFill>
+                            <a:srgbClr val="111827"/>
+                          </a:solidFill>
+                        </a:rPr>
+                        <a:t>4</a:t>
+                      </a:r>
+                    </a:p>
+                  </a:txBody>
+                  <a:tcPr>
+                    <a:solidFill>
+                      <a:srgbClr val="EEF2FF"/>
+                    </a:solidFill>
+                  </a:tcPr>
+                </a:tc>
+                <a:tc>
+                  <a:txBody>
+                    <a:bodyPr/>
+                    <a:lstStyle/>
+                    <a:p>
+                      <a:pPr algn="ctr"/>
+                      <a:r>
+                        <a:rPr sz="1000">
+                          <a:solidFill>
+                            <a:srgbClr val="111827"/>
+                          </a:solidFill>
+                        </a:rPr>
+                        <a:t>3.95</a:t>
+                      </a:r>
+                    </a:p>
+                  </a:txBody>
+                  <a:tcPr>
+                    <a:solidFill>
+                      <a:srgbClr val="EEF2FF"/>
+                    </a:solidFill>
+                  </a:tcPr>
+                </a:tc>
+                <a:tc>
+                  <a:txBody>
+                    <a:bodyPr/>
+                    <a:lstStyle/>
+                    <a:p>
+                      <a:pPr algn="ctr"/>
+                      <a:r>
+                        <a:rPr sz="1000">
+                          <a:solidFill>
+                            <a:srgbClr val="111827"/>
+                          </a:solidFill>
+                        </a:rPr>
+                        <a:t>5.95</a:t>
+                      </a:r>
+                    </a:p>
+                  </a:txBody>
+                  <a:tcPr>
+                    <a:solidFill>
+                      <a:srgbClr val="EEF2FF"/>
+                    </a:solidFill>
+                  </a:tcPr>
+                </a:tc>
+                <a:tc>
+                  <a:txBody>
+                    <a:bodyPr/>
+                    <a:lstStyle/>
+                    <a:p>
+                      <a:pPr algn="ctr"/>
+                      <a:r>
+                        <a:rPr sz="1000">
+                          <a:solidFill>
+                            <a:srgbClr val="111827"/>
+                          </a:solidFill>
+                        </a:rPr>
+                        <a:t>6.77</a:t>
+                      </a:r>
+                    </a:p>
+                  </a:txBody>
+                  <a:tcPr>
+                    <a:solidFill>
+                      <a:srgbClr val="EEF2FF"/>
+                    </a:solidFill>
+                  </a:tcPr>
+                </a:tc>
+                <a:tc>
+                  <a:txBody>
+                    <a:bodyPr/>
+                    <a:lstStyle/>
+                    <a:p>
+                      <a:pPr algn="ctr"/>
+                      <a:r>
+                        <a:rPr sz="1000">
+                          <a:solidFill>
+                            <a:srgbClr val="111827"/>
+                          </a:solidFill>
+                        </a:rPr>
+                        <a:t>1,189</a:t>
+                      </a:r>
+                    </a:p>
+                  </a:txBody>
+                  <a:tcPr>
+                    <a:solidFill>
+                      <a:srgbClr val="EEF2FF"/>
+                    </a:solidFill>
+                  </a:tcPr>
+                </a:tc>
+              </a:tr>
+              <a:tr h="351692">
+                <a:tc>
+                  <a:txBody>
+                    <a:bodyPr/>
+                    <a:lstStyle/>
+                    <a:p>
+                      <a:pPr algn="l"/>
+                      <a:r>
+                        <a:rPr sz="1000">
+                          <a:solidFill>
+                            <a:srgbClr val="111827"/>
+                          </a:solidFill>
+                        </a:rPr>
+                        <a:t>64</a:t>
+                      </a:r>
+                    </a:p>
+                  </a:txBody>
+                  <a:tcPr>
+                    <a:solidFill>
+                      <a:srgbClr val="FFFFFF"/>
+                    </a:solidFill>
+                  </a:tcPr>
+                </a:tc>
+                <a:tc>
+                  <a:txBody>
+                    <a:bodyPr/>
+                    <a:lstStyle/>
+                    <a:p>
+                      <a:pPr algn="ctr"/>
+                      <a:r>
+                        <a:rPr sz="1000">
+                          <a:solidFill>
+                            <a:srgbClr val="111827"/>
+                          </a:solidFill>
+                        </a:rPr>
+                        <a:t>3</a:t>
+                      </a:r>
+                    </a:p>
+                  </a:txBody>
+                  <a:tcPr>
+                    <a:solidFill>
+                      <a:srgbClr val="FFFFFF"/>
+                    </a:solidFill>
+                  </a:tcPr>
+                </a:tc>
+                <a:tc>
+                  <a:txBody>
+                    <a:bodyPr/>
+                    <a:lstStyle/>
+                    <a:p>
+                      <a:pPr algn="ctr"/>
+                      <a:r>
+                        <a:rPr sz="1000">
+                          <a:solidFill>
+                            <a:srgbClr val="111827"/>
+                          </a:solidFill>
+                        </a:rPr>
+                        <a:t>2.98</a:t>
+                      </a:r>
+                    </a:p>
+                  </a:txBody>
+                  <a:tcPr>
+                    <a:solidFill>
+                      <a:srgbClr val="FFFFFF"/>
+                    </a:solidFill>
+                  </a:tcPr>
+                </a:tc>
+                <a:tc>
+                  <a:txBody>
+                    <a:bodyPr/>
+                    <a:lstStyle/>
+                    <a:p>
+                      <a:pPr algn="ctr"/>
+                      <a:r>
+                        <a:rPr sz="1000">
+                          <a:solidFill>
+                            <a:srgbClr val="111827"/>
+                          </a:solidFill>
+                        </a:rPr>
+                        <a:t>5.04</a:t>
+                      </a:r>
+                    </a:p>
+                  </a:txBody>
+                  <a:tcPr>
+                    <a:solidFill>
+                      <a:srgbClr val="FFFFFF"/>
+                    </a:solidFill>
+                  </a:tcPr>
+                </a:tc>
+                <a:tc>
+                  <a:txBody>
+                    <a:bodyPr/>
+                    <a:lstStyle/>
+                    <a:p>
+                      <a:pPr algn="ctr"/>
+                      <a:r>
+                        <a:rPr sz="1000">
+                          <a:solidFill>
+                            <a:srgbClr val="111827"/>
+                          </a:solidFill>
+                        </a:rPr>
+                        <a:t>5.64</a:t>
+                      </a:r>
+                    </a:p>
+                  </a:txBody>
+                  <a:tcPr>
+                    <a:solidFill>
+                      <a:srgbClr val="FFFFFF"/>
+                    </a:solidFill>
+                  </a:tcPr>
+                </a:tc>
+                <a:tc>
+                  <a:txBody>
+                    <a:bodyPr/>
+                    <a:lstStyle/>
+                    <a:p>
+                      <a:pPr algn="ctr"/>
+                      <a:r>
+                        <a:rPr sz="1000">
+                          <a:solidFill>
+                            <a:srgbClr val="111827"/>
+                          </a:solidFill>
+                        </a:rPr>
+                        <a:t>1,146</a:t>
+                      </a:r>
+                    </a:p>
+                  </a:txBody>
+                  <a:tcPr>
+                    <a:solidFill>
+                      <a:srgbClr val="FFFFFF"/>
+                    </a:solidFill>
+                  </a:tcPr>
+                </a:tc>
+              </a:tr>
+              <a:tr h="351692">
+                <a:tc>
+                  <a:txBody>
+                    <a:bodyPr/>
+                    <a:lstStyle/>
+                    <a:p>
+                      <a:pPr algn="l"/>
+                      <a:r>
+                        <a:rPr sz="1000">
+                          <a:solidFill>
+                            <a:srgbClr val="111827"/>
+                          </a:solidFill>
+                        </a:rPr>
+                        <a:t>100</a:t>
+                      </a:r>
+                    </a:p>
+                  </a:txBody>
+                  <a:tcPr>
+                    <a:solidFill>
+                      <a:srgbClr val="EEF2FF"/>
+                    </a:solidFill>
+                  </a:tcPr>
+                </a:tc>
+                <a:tc>
+                  <a:txBody>
+                    <a:bodyPr/>
+                    <a:lstStyle/>
+                    <a:p>
+                      <a:pPr algn="ctr"/>
+                      <a:r>
+                        <a:rPr sz="1000">
+                          <a:solidFill>
+                            <a:srgbClr val="111827"/>
+                          </a:solidFill>
+                        </a:rPr>
+                        <a:t>3</a:t>
+                      </a:r>
+                    </a:p>
+                  </a:txBody>
+                  <a:tcPr>
+                    <a:solidFill>
+                      <a:srgbClr val="EEF2FF"/>
+                    </a:solidFill>
+                  </a:tcPr>
+                </a:tc>
+                <a:tc>
+                  <a:txBody>
+                    <a:bodyPr/>
+                    <a:lstStyle/>
+                    <a:p>
+                      <a:pPr algn="ctr"/>
+                      <a:r>
+                        <a:rPr sz="1000">
+                          <a:solidFill>
+                            <a:srgbClr val="111827"/>
+                          </a:solidFill>
+                        </a:rPr>
+                        <a:t>2.99</a:t>
+                      </a:r>
+                    </a:p>
+                  </a:txBody>
+                  <a:tcPr>
+                    <a:solidFill>
+                      <a:srgbClr val="EEF2FF"/>
+                    </a:solidFill>
+                  </a:tcPr>
+                </a:tc>
+                <a:tc>
+                  <a:txBody>
+                    <a:bodyPr/>
+                    <a:lstStyle/>
+                    <a:p>
+                      <a:pPr algn="ctr"/>
+                      <a:r>
+                        <a:rPr sz="1000">
+                          <a:solidFill>
+                            <a:srgbClr val="111827"/>
+                          </a:solidFill>
+                        </a:rPr>
+                        <a:t>4.97</a:t>
+                      </a:r>
+                    </a:p>
+                  </a:txBody>
+                  <a:tcPr>
+                    <a:solidFill>
+                      <a:srgbClr val="EEF2FF"/>
+                    </a:solidFill>
+                  </a:tcPr>
+                </a:tc>
+                <a:tc>
+                  <a:txBody>
+                    <a:bodyPr/>
+                    <a:lstStyle/>
+                    <a:p>
+                      <a:pPr algn="ctr"/>
+                      <a:r>
+                        <a:rPr sz="1000">
+                          <a:solidFill>
+                            <a:srgbClr val="111827"/>
+                          </a:solidFill>
+                        </a:rPr>
+                        <a:t>5.51</a:t>
+                      </a:r>
+                    </a:p>
+                  </a:txBody>
+                  <a:tcPr>
+                    <a:solidFill>
+                      <a:srgbClr val="EEF2FF"/>
+                    </a:solidFill>
+                  </a:tcPr>
+                </a:tc>
+                <a:tc>
+                  <a:txBody>
+                    <a:bodyPr/>
+                    <a:lstStyle/>
+                    <a:p>
+                      <a:pPr algn="ctr"/>
+                      <a:r>
+                        <a:rPr sz="1000">
+                          <a:solidFill>
+                            <a:srgbClr val="111827"/>
+                          </a:solidFill>
+                        </a:rPr>
+                        <a:t>1,131</a:t>
+                      </a:r>
+                    </a:p>
+                  </a:txBody>
+                  <a:tcPr>
+                    <a:solidFill>
+                      <a:srgbClr val="EEF2FF"/>
+                    </a:solidFill>
+                  </a:tcPr>
+                </a:tc>
+              </a:tr>
+              <a:tr h="351692">
+                <a:tc>
+                  <a:txBody>
+                    <a:bodyPr/>
+                    <a:lstStyle/>
+                    <a:p>
+                      <a:pPr algn="l"/>
+                      <a:r>
+                        <a:rPr sz="1000">
+                          <a:solidFill>
+                            <a:srgbClr val="111827"/>
+                          </a:solidFill>
+                        </a:rPr>
+                        <a:t>128</a:t>
+                      </a:r>
+                    </a:p>
+                  </a:txBody>
+                  <a:tcPr>
+                    <a:solidFill>
+                      <a:srgbClr val="FFFFFF"/>
+                    </a:solidFill>
+                  </a:tcPr>
+                </a:tc>
+                <a:tc>
+                  <a:txBody>
+                    <a:bodyPr/>
+                    <a:lstStyle/>
+                    <a:p>
+                      <a:pPr algn="ctr"/>
+                      <a:r>
+                        <a:rPr sz="1000">
+                          <a:solidFill>
+                            <a:srgbClr val="111827"/>
+                          </a:solidFill>
+                        </a:rPr>
+                        <a:t>3</a:t>
+                      </a:r>
+                    </a:p>
+                  </a:txBody>
+                  <a:tcPr>
+                    <a:solidFill>
+                      <a:srgbClr val="FFFFFF"/>
+                    </a:solidFill>
+                  </a:tcPr>
+                </a:tc>
+                <a:tc>
+                  <a:txBody>
+                    <a:bodyPr/>
+                    <a:lstStyle/>
+                    <a:p>
+                      <a:pPr algn="ctr"/>
+                      <a:r>
+                        <a:rPr sz="1000">
+                          <a:solidFill>
+                            <a:srgbClr val="111827"/>
+                          </a:solidFill>
+                        </a:rPr>
+                        <a:t>2.99</a:t>
+                      </a:r>
+                    </a:p>
+                  </a:txBody>
+                  <a:tcPr>
+                    <a:solidFill>
+                      <a:srgbClr val="FFFFFF"/>
+                    </a:solidFill>
+                  </a:tcPr>
+                </a:tc>
+                <a:tc>
+                  <a:txBody>
+                    <a:bodyPr/>
+                    <a:lstStyle/>
+                    <a:p>
+                      <a:pPr algn="ctr"/>
+                      <a:r>
+                        <a:rPr sz="1000">
+                          <a:solidFill>
+                            <a:srgbClr val="111827"/>
+                          </a:solidFill>
+                        </a:rPr>
+                        <a:t>4.92</a:t>
+                      </a:r>
+                    </a:p>
+                  </a:txBody>
+                  <a:tcPr>
+                    <a:solidFill>
+                      <a:srgbClr val="FFFFFF"/>
+                    </a:solidFill>
+                  </a:tcPr>
+                </a:tc>
+                <a:tc>
+                  <a:txBody>
+                    <a:bodyPr/>
+                    <a:lstStyle/>
+                    <a:p>
+                      <a:pPr algn="ctr"/>
+                      <a:r>
+                        <a:rPr sz="1000">
+                          <a:solidFill>
+                            <a:srgbClr val="111827"/>
+                          </a:solidFill>
+                        </a:rPr>
+                        <a:t>5.41</a:t>
+                      </a:r>
+                    </a:p>
+                  </a:txBody>
+                  <a:tcPr>
+                    <a:solidFill>
+                      <a:srgbClr val="FFFFFF"/>
+                    </a:solidFill>
+                  </a:tcPr>
+                </a:tc>
+                <a:tc>
+                  <a:txBody>
+                    <a:bodyPr/>
+                    <a:lstStyle/>
+                    <a:p>
+                      <a:pPr algn="ctr"/>
+                      <a:r>
+                        <a:rPr sz="1000">
+                          <a:solidFill>
+                            <a:srgbClr val="111827"/>
+                          </a:solidFill>
+                        </a:rPr>
+                        <a:t>1,121</a:t>
+                      </a:r>
+                    </a:p>
+                  </a:txBody>
+                  <a:tcPr>
+                    <a:solidFill>
+                      <a:srgbClr val="FFFFFF"/>
+                    </a:solidFill>
+                  </a:tcPr>
+                </a:tc>
+              </a:tr>
+              <a:tr h="351692">
+                <a:tc>
+                  <a:txBody>
+                    <a:bodyPr/>
+                    <a:lstStyle/>
+                    <a:p>
+                      <a:pPr algn="l"/>
+                      <a:r>
+                        <a:rPr sz="1000">
+                          <a:solidFill>
+                            <a:srgbClr val="111827"/>
+                          </a:solidFill>
+                        </a:rPr>
+                        <a:t>256</a:t>
+                      </a:r>
+                    </a:p>
+                  </a:txBody>
+                  <a:tcPr>
+                    <a:solidFill>
+                      <a:srgbClr val="EEF2FF"/>
+                    </a:solidFill>
+                  </a:tcPr>
+                </a:tc>
+                <a:tc>
+                  <a:txBody>
+                    <a:bodyPr/>
+                    <a:lstStyle/>
+                    <a:p>
+                      <a:pPr algn="ctr"/>
+                      <a:r>
+                        <a:rPr sz="1000">
+                          <a:solidFill>
+                            <a:srgbClr val="111827"/>
+                          </a:solidFill>
+                        </a:rPr>
+                        <a:t>3</a:t>
+                      </a:r>
+                    </a:p>
+                  </a:txBody>
+                  <a:tcPr>
+                    <a:solidFill>
+                      <a:srgbClr val="EEF2FF"/>
+                    </a:solidFill>
+                  </a:tcPr>
+                </a:tc>
+                <a:tc>
+                  <a:txBody>
+                    <a:bodyPr/>
+                    <a:lstStyle/>
+                    <a:p>
+                      <a:pPr algn="ctr"/>
+                      <a:r>
+                        <a:rPr sz="1000">
+                          <a:solidFill>
+                            <a:srgbClr val="111827"/>
+                          </a:solidFill>
+                        </a:rPr>
+                        <a:t>2.99</a:t>
+                      </a:r>
+                    </a:p>
+                  </a:txBody>
+                  <a:tcPr>
+                    <a:solidFill>
+                      <a:srgbClr val="EEF2FF"/>
+                    </a:solidFill>
+                  </a:tcPr>
+                </a:tc>
+                <a:tc>
+                  <a:txBody>
+                    <a:bodyPr/>
+                    <a:lstStyle/>
+                    <a:p>
+                      <a:pPr algn="ctr"/>
+                      <a:r>
+                        <a:rPr sz="1000">
+                          <a:solidFill>
+                            <a:srgbClr val="111827"/>
+                          </a:solidFill>
+                        </a:rPr>
+                        <a:t>4.57</a:t>
+                      </a:r>
+                    </a:p>
+                  </a:txBody>
+                  <a:tcPr>
+                    <a:solidFill>
+                      <a:srgbClr val="EEF2FF"/>
+                    </a:solidFill>
+                  </a:tcPr>
+                </a:tc>
+                <a:tc>
+                  <a:txBody>
+                    <a:bodyPr/>
+                    <a:lstStyle/>
+                    <a:p>
+                      <a:pPr algn="ctr"/>
+                      <a:r>
+                        <a:rPr sz="1000">
+                          <a:solidFill>
+                            <a:srgbClr val="111827"/>
+                          </a:solidFill>
+                        </a:rPr>
+                        <a:t>5.00</a:t>
+                      </a:r>
+                    </a:p>
+                  </a:txBody>
+                  <a:tcPr>
+                    <a:solidFill>
+                      <a:srgbClr val="EEF2FF"/>
+                    </a:solidFill>
+                  </a:tcPr>
+                </a:tc>
+                <a:tc>
+                  <a:txBody>
+                    <a:bodyPr/>
+                    <a:lstStyle/>
+                    <a:p>
+                      <a:pPr algn="ctr"/>
+                      <a:r>
+                        <a:rPr sz="1000">
+                          <a:solidFill>
+                            <a:srgbClr val="111827"/>
+                          </a:solidFill>
+                        </a:rPr>
+                        <a:t>1,088</a:t>
+                      </a:r>
+                    </a:p>
+                  </a:txBody>
+                  <a:tcPr>
+                    <a:solidFill>
+                      <a:srgbClr val="EEF2FF"/>
+                    </a:solidFill>
+                  </a:tcPr>
+                </a:tc>
+              </a:tr>
+              <a:tr h="351692">
+                <a:tc>
+                  <a:txBody>
+                    <a:bodyPr/>
+                    <a:lstStyle/>
+                    <a:p>
+                      <a:pPr algn="l"/>
+                      <a:r>
+                        <a:rPr sz="1000">
+                          <a:solidFill>
+                            <a:srgbClr val="111827"/>
+                          </a:solidFill>
+                        </a:rPr>
+                        <a:t>512</a:t>
+                      </a:r>
+                    </a:p>
+                  </a:txBody>
+                  <a:tcPr>
+                    <a:solidFill>
+                      <a:srgbClr val="FFFFFF"/>
+                    </a:solidFill>
+                  </a:tcPr>
+                </a:tc>
+                <a:tc>
+                  <a:txBody>
+                    <a:bodyPr/>
+                    <a:lstStyle/>
+                    <a:p>
+                      <a:pPr algn="ctr"/>
+                      <a:r>
+                        <a:rPr sz="1000">
+                          <a:solidFill>
+                            <a:srgbClr val="111827"/>
+                          </a:solidFill>
+                        </a:rPr>
+                        <a:t>2</a:t>
+                      </a:r>
+                    </a:p>
+                  </a:txBody>
+                  <a:tcPr>
+                    <a:solidFill>
+                      <a:srgbClr val="FFFFFF"/>
+                    </a:solidFill>
+                  </a:tcPr>
+                </a:tc>
+                <a:tc>
+                  <a:txBody>
+                    <a:bodyPr/>
+                    <a:lstStyle/>
+                    <a:p>
+                      <a:pPr algn="ctr"/>
+                      <a:r>
+                        <a:rPr sz="1000">
+                          <a:solidFill>
+                            <a:srgbClr val="111827"/>
+                          </a:solidFill>
+                        </a:rPr>
+                        <a:t>2.00</a:t>
+                      </a:r>
+                    </a:p>
+                  </a:txBody>
+                  <a:tcPr>
+                    <a:solidFill>
+                      <a:srgbClr val="FFFFFF"/>
+                    </a:solidFill>
+                  </a:tcPr>
+                </a:tc>
+                <a:tc>
+                  <a:txBody>
+                    <a:bodyPr/>
+                    <a:lstStyle/>
+                    <a:p>
+                      <a:pPr algn="ctr"/>
+                      <a:r>
+                        <a:rPr sz="1000">
+                          <a:solidFill>
+                            <a:srgbClr val="111827"/>
+                          </a:solidFill>
+                        </a:rPr>
+                        <a:t>4.00</a:t>
+                      </a:r>
+                    </a:p>
+                  </a:txBody>
+                  <a:tcPr>
+                    <a:solidFill>
+                      <a:srgbClr val="FFFFFF"/>
+                    </a:solidFill>
+                  </a:tcPr>
+                </a:tc>
+                <a:tc>
+                  <a:txBody>
+                    <a:bodyPr/>
+                    <a:lstStyle/>
+                    <a:p>
+                      <a:pPr algn="ctr"/>
+                      <a:r>
+                        <a:rPr sz="1000">
+                          <a:solidFill>
+                            <a:srgbClr val="111827"/>
+                          </a:solidFill>
+                        </a:rPr>
+                        <a:t>4.41</a:t>
+                      </a:r>
+                    </a:p>
+                  </a:txBody>
+                  <a:tcPr>
+                    <a:solidFill>
+                      <a:srgbClr val="FFFFFF"/>
+                    </a:solidFill>
+                  </a:tcPr>
+                </a:tc>
+                <a:tc>
+                  <a:txBody>
+                    <a:bodyPr/>
+                    <a:lstStyle/>
+                    <a:p>
+                      <a:pPr algn="ctr"/>
+                      <a:r>
+                        <a:rPr sz="1000">
+                          <a:solidFill>
+                            <a:srgbClr val="111827"/>
+                          </a:solidFill>
+                        </a:rPr>
+                        <a:t>1,053</a:t>
+                      </a:r>
+                    </a:p>
+                  </a:txBody>
+                  <a:tcPr>
+                    <a:solidFill>
+                      <a:srgbClr val="FFFFFF"/>
+                    </a:solidFill>
+                  </a:tcPr>
+                </a:tc>
+              </a:tr>
+              <a:tr h="351696">
+                <a:tc>
+                  <a:txBody>
+                    <a:bodyPr/>
+                    <a:lstStyle/>
+                    <a:p>
+                      <a:pPr algn="l"/>
+                      <a:r>
+                        <a:rPr sz="1000">
+                          <a:solidFill>
+                            <a:srgbClr val="111827"/>
+                          </a:solidFill>
+                        </a:rPr>
+                        <a:t>1000</a:t>
+                      </a:r>
+                    </a:p>
+                  </a:txBody>
+                  <a:tcPr>
+                    <a:solidFill>
+                      <a:srgbClr val="EEF2FF"/>
+                    </a:solidFill>
+                  </a:tcPr>
+                </a:tc>
+                <a:tc>
+                  <a:txBody>
+                    <a:bodyPr/>
+                    <a:lstStyle/>
+                    <a:p>
+                      <a:pPr algn="ctr"/>
+                      <a:r>
+                        <a:rPr sz="1000">
+                          <a:solidFill>
+                            <a:srgbClr val="111827"/>
+                          </a:solidFill>
+                        </a:rPr>
+                        <a:t>2</a:t>
+                      </a:r>
+                    </a:p>
+                  </a:txBody>
+                  <a:tcPr>
+                    <a:solidFill>
+                      <a:srgbClr val="EEF2FF"/>
+                    </a:solidFill>
+                  </a:tcPr>
+                </a:tc>
+                <a:tc>
+                  <a:txBody>
+                    <a:bodyPr/>
+                    <a:lstStyle/>
+                    <a:p>
+                      <a:pPr algn="ctr"/>
+                      <a:r>
+                        <a:rPr sz="1000">
+                          <a:solidFill>
+                            <a:srgbClr val="111827"/>
+                          </a:solidFill>
+                        </a:rPr>
+                        <a:t>2.00</a:t>
+                      </a:r>
+                    </a:p>
+                  </a:txBody>
+                  <a:tcPr>
+                    <a:solidFill>
+                      <a:srgbClr val="EEF2FF"/>
+                    </a:solidFill>
+                  </a:tcPr>
+                </a:tc>
+                <a:tc>
+                  <a:txBody>
+                    <a:bodyPr/>
+                    <a:lstStyle/>
+                    <a:p>
+                      <a:pPr algn="ctr"/>
+                      <a:r>
+                        <a:rPr sz="1000">
+                          <a:solidFill>
+                            <a:srgbClr val="111827"/>
+                          </a:solidFill>
+                        </a:rPr>
+                        <a:t>3.99</a:t>
+                      </a:r>
+                    </a:p>
+                  </a:txBody>
+                  <a:tcPr>
+                    <a:solidFill>
+                      <a:srgbClr val="EEF2FF"/>
+                    </a:solidFill>
+                  </a:tcPr>
+                </a:tc>
+                <a:tc>
+                  <a:txBody>
+                    <a:bodyPr/>
+                    <a:lstStyle/>
+                    <a:p>
+                      <a:pPr algn="ctr"/>
+                      <a:r>
+                        <a:rPr sz="1000">
+                          <a:solidFill>
+                            <a:srgbClr val="111827"/>
+                          </a:solidFill>
+                        </a:rPr>
+                        <a:t>4.34</a:t>
+                      </a:r>
+                    </a:p>
+                  </a:txBody>
+                  <a:tcPr>
+                    <a:solidFill>
+                      <a:srgbClr val="EEF2FF"/>
+                    </a:solidFill>
+                  </a:tcPr>
+                </a:tc>
+                <a:tc>
+                  <a:txBody>
+                    <a:bodyPr/>
+                    <a:lstStyle/>
+                    <a:p>
+                      <a:pPr algn="ctr"/>
+                      <a:r>
+                        <a:rPr sz="1000">
+                          <a:solidFill>
+                            <a:srgbClr val="111827"/>
+                          </a:solidFill>
+                        </a:rPr>
+                        <a:t>1,016</a:t>
+                      </a:r>
+                    </a:p>
+                  </a:txBody>
+                  <a:tcPr>
+                    <a:solidFill>
+                      <a:srgbClr val="EEF2FF"/>
+                    </a:solidFill>
+                  </a:tcPr>
+                </a:tc>
+              </a:tr>
+            </a:tbl>
+          </a:graphicData>
+        </a:graphic>
+      </p:graphicFrame>
+      <p:pic>
+        <p:nvPicPr>
+          <p:cNvPr id="5" name="Picture 4" descr="chart_io_vs_m.png"/>
+          <p:cNvPicPr>
+            <a:picLocks noChangeAspect="1"/>
+          </p:cNvPicPr>
+          <p:nvPr/>
+        </p:nvPicPr>
+        <p:blipFill>
+          <a:blip r:embed="rId2"/>
+          <a:stretch>
+            <a:fillRect/>
+          </a:stretch>
+        </p:blipFill>
+        <p:spPr>
+          <a:xfrm>
+            <a:off x="5989320" y="1280160"/>
+            <a:ext cx="5943600" cy="3307457"/>
+          </a:xfrm>
+          <a:prstGeom prst="rect">
+            <a:avLst/>
+          </a:prstGeom>
+        </p:spPr>
+      </p:pic>
+      <p:sp>
+        <p:nvSpPr>
+          <p:cNvPr id="6" name="TextBox 5"/>
           <p:cNvSpPr txBox="1"/>
           <p:nvPr/>
         </p:nvSpPr>
         <p:spPr>
           <a:xfrm>
-            <a:off x="640080" y="1097280"/>
-            <a:ext cx="10972800" cy="5303520"/>
+            <a:off x="365760" y="5989320"/>
+            <a:ext cx="11430000" cy="457200"/>
           </a:xfrm>
           <a:prstGeom prst="rect">
             <a:avLst/>
@@ -8121,75 +7557,27 @@
               </a:spcAft>
             </a:pPr>
             <a:r>
-              <a:rPr sz="1600" b="0">
-                <a:solidFill>
-                  <a:srgbClr val="111827"/>
+              <a:rPr sz="1100" b="0">
+                <a:solidFill>
+                  <a:srgbClr val="6B7280"/>
                 </a:solidFill>
                 <a:latin typeface="Calibri"/>
               </a:rPr>
-              <a:t>•  Dificuldades: indexação 1-based dos nós; ordem do path no reparo de underflow; eofbit do fstream; garantir 1 nó por I/O (nada em RAM).</a:t>
-            </a:r>
-          </a:p>
-          <a:p>
-            <a:pPr>
-              <a:spcAft>
-                <a:spcPts val="600"/>
-              </a:spcAft>
-            </a:pPr>
-            <a:r>
-              <a:rPr sz="1600" b="0">
-                <a:solidFill>
-                  <a:srgbClr val="111827"/>
-                </a:solidFill>
-                <a:latin typeface="Calibri"/>
-              </a:rPr>
-              <a:t>•  Vantagens da Árvore B: altura baixa =&gt; pouquíssimos acessos a disco; sempre balanceada; ideal para memória secundária / SGBDs.</a:t>
-            </a:r>
-          </a:p>
-          <a:p>
-            <a:pPr>
-              <a:spcAft>
-                <a:spcPts val="600"/>
-              </a:spcAft>
-            </a:pPr>
-            <a:r>
-              <a:rPr sz="1600" b="0">
-                <a:solidFill>
-                  <a:srgbClr val="111827"/>
-                </a:solidFill>
-                <a:latin typeface="Calibri"/>
-              </a:rPr>
-              <a:t>•  Desvantagens: nós podem ficar subocupados (~50% no caso sequencial); remoção é complexa; para m muito grande, a busca dentro do nó passa a custar CPU.</a:t>
-            </a:r>
-          </a:p>
-          <a:p>
-            <a:pPr>
-              <a:spcAft>
-                <a:spcPts val="600"/>
-              </a:spcAft>
-            </a:pPr>
-            <a:r>
-              <a:rPr sz="1600" b="0">
-                <a:solidFill>
-                  <a:srgbClr val="111827"/>
-                </a:solidFill>
-                <a:latin typeface="Calibri"/>
-              </a:rPr>
-              <a:t>•  Trade-off central: m maior =&gt; menos I/O, mais CPU por nó.</a:t>
-            </a:r>
-          </a:p>
-        </p:txBody>
-      </p:sp>
-      <p:sp>
-        <p:nvSpPr>
-          <p:cNvPr id="5" name="TextBox 4"/>
+              <a:t>I/O por busca cai de 13,25 (m=3, altura 14) para 2,00 (m&gt;=512, altura 2). Ganho satura por volta de m~64-128.</a:t>
+            </a:r>
+          </a:p>
+        </p:txBody>
+      </p:sp>
+      <p:sp>
+        <p:nvSpPr>
+          <p:cNvPr id="7" name="TextBox 6"/>
           <p:cNvSpPr txBox="1"/>
           <p:nvPr/>
         </p:nvSpPr>
         <p:spPr>
           <a:xfrm>
-            <a:off x="457200" y="6446520"/>
-            <a:ext cx="11247120" cy="320040"/>
+            <a:off x="457200" y="6455664"/>
+            <a:ext cx="11247120" cy="310896"/>
           </a:xfrm>
           <a:prstGeom prst="rect">
             <a:avLst/>
@@ -8214,7 +7602,1288 @@
                 </a:solidFill>
                 <a:latin typeface="Calibri"/>
               </a:rPr>
-              <a:t>Árvore B em Memória Secundária — AED-PG-2026          9/10</a:t>
+              <a:t>Árvore B em Memória Secundária — AED-PG-2026          7/12</a:t>
+            </a:r>
+          </a:p>
+        </p:txBody>
+      </p:sp>
+    </p:spTree>
+  </p:cSld>
+  <p:clrMapOvr>
+    <a:masterClrMapping/>
+  </p:clrMapOvr>
+</p:sld>
+</file>
+
+<file path=ppt/slides/slide8.xml><?xml version="1.0" encoding="utf-8"?>
+<p:sld xmlns:a="http://schemas.openxmlformats.org/drawingml/2006/main" xmlns:p="http://schemas.openxmlformats.org/presentationml/2006/main" xmlns:r="http://schemas.openxmlformats.org/officeDocument/2006/relationships">
+  <p:cSld>
+    <p:spTree>
+      <p:nvGrpSpPr>
+        <p:cNvPr id="1" name=""/>
+        <p:cNvGrpSpPr/>
+        <p:nvPr/>
+      </p:nvGrpSpPr>
+      <p:grpSpPr/>
+      <p:sp>
+        <p:nvSpPr>
+          <p:cNvPr id="2" name="Rectangle 1"/>
+          <p:cNvSpPr/>
+          <p:nvPr/>
+        </p:nvSpPr>
+        <p:spPr>
+          <a:xfrm>
+            <a:off x="0" y="0"/>
+            <a:ext cx="12191695" cy="868680"/>
+          </a:xfrm>
+          <a:prstGeom prst="rect">
+            <a:avLst/>
+          </a:prstGeom>
+          <a:solidFill>
+            <a:srgbClr val="1D4ED8"/>
+          </a:solidFill>
+          <a:ln>
+            <a:noFill/>
+          </a:ln>
+        </p:spPr>
+        <p:style>
+          <a:lnRef idx="1">
+            <a:schemeClr val="accent1"/>
+          </a:lnRef>
+          <a:fillRef idx="3">
+            <a:schemeClr val="accent1"/>
+          </a:fillRef>
+          <a:effectRef idx="2">
+            <a:schemeClr val="accent1"/>
+          </a:effectRef>
+          <a:fontRef idx="minor">
+            <a:schemeClr val="lt1"/>
+          </a:fontRef>
+        </p:style>
+        <p:txBody>
+          <a:bodyPr rtlCol="0" anchor="ctr"/>
+          <a:lstStyle/>
+          <a:p>
+            <a:pPr algn="ctr"/>
+          </a:p>
+        </p:txBody>
+      </p:sp>
+      <p:sp>
+        <p:nvSpPr>
+          <p:cNvPr id="3" name="TextBox 2"/>
+          <p:cNvSpPr txBox="1"/>
+          <p:nvPr/>
+        </p:nvSpPr>
+        <p:spPr>
+          <a:xfrm>
+            <a:off x="457200" y="109728"/>
+            <a:ext cx="11247120" cy="658368"/>
+          </a:xfrm>
+          <a:prstGeom prst="rect">
+            <a:avLst/>
+          </a:prstGeom>
+          <a:noFill/>
+        </p:spPr>
+        <p:txBody>
+          <a:bodyPr wrap="square" anchor="ctr">
+            <a:spAutoFit/>
+          </a:bodyPr>
+          <a:lstStyle/>
+          <a:p>
+            <a:pPr>
+              <a:spcAft>
+                <a:spcPts val="600"/>
+              </a:spcAft>
+            </a:pPr>
+            <a:r>
+              <a:rPr sz="2300" b="1">
+                <a:solidFill>
+                  <a:srgbClr val="FFFFFF"/>
+                </a:solidFill>
+                <a:latin typeface="Calibri"/>
+              </a:rPr>
+              <a:t>6b. Resultados - reaproveitamento de nós (churn)</a:t>
+            </a:r>
+          </a:p>
+        </p:txBody>
+      </p:sp>
+      <p:graphicFrame>
+        <p:nvGraphicFramePr>
+          <p:cNvPr id="4" name="Table 3"/>
+          <p:cNvGraphicFramePr>
+            <a:graphicFrameLocks noGrp="1"/>
+          </p:cNvGraphicFramePr>
+          <p:nvPr/>
+        </p:nvGraphicFramePr>
+        <p:xfrm>
+          <a:off x="365760" y="1051560"/>
+          <a:ext cx="5394960" cy="4572000"/>
+        </p:xfrm>
+        <a:graphic>
+          <a:graphicData uri="http://schemas.openxmlformats.org/drawingml/2006/table">
+            <a:tbl>
+              <a:tblPr firstRow="1" bandRow="1">
+                <a:tableStyleId>{5C22544A-7EE6-4342-B048-85BDC9FD1C3A}</a:tableStyleId>
+              </a:tblPr>
+              <a:tblGrid>
+                <a:gridCol w="1078992"/>
+                <a:gridCol w="1078992"/>
+                <a:gridCol w="1078992"/>
+                <a:gridCol w="1078992"/>
+                <a:gridCol w="1078992"/>
+              </a:tblGrid>
+              <a:tr h="653142">
+                <a:tc>
+                  <a:txBody>
+                    <a:bodyPr/>
+                    <a:lstStyle/>
+                    <a:p>
+                      <a:pPr algn="ctr"/>
+                      <a:r>
+                        <a:rPr sz="1100" b="1">
+                          <a:solidFill>
+                            <a:srgbClr val="FFFFFF"/>
+                          </a:solidFill>
+                        </a:rPr>
+                        <a:t>m</a:t>
+                      </a:r>
+                    </a:p>
+                  </a:txBody>
+                  <a:tcPr>
+                    <a:solidFill>
+                      <a:srgbClr val="1D4ED8"/>
+                    </a:solidFill>
+                  </a:tcPr>
+                </a:tc>
+                <a:tc>
+                  <a:txBody>
+                    <a:bodyPr/>
+                    <a:lstStyle/>
+                    <a:p>
+                      <a:pPr algn="ctr"/>
+                      <a:r>
+                        <a:rPr sz="1100" b="1">
+                          <a:solidFill>
+                            <a:srgbClr val="FFFFFF"/>
+                          </a:solidFill>
+                        </a:rPr>
+                        <a:t>N</a:t>
+                      </a:r>
+                    </a:p>
+                  </a:txBody>
+                  <a:tcPr>
+                    <a:solidFill>
+                      <a:srgbClr val="1D4ED8"/>
+                    </a:solidFill>
+                  </a:tcPr>
+                </a:tc>
+                <a:tc>
+                  <a:txBody>
+                    <a:bodyPr/>
+                    <a:lstStyle/>
+                    <a:p>
+                      <a:pPr algn="ctr"/>
+                      <a:r>
+                        <a:rPr sz="1100" b="1">
+                          <a:solidFill>
+                            <a:srgbClr val="FFFFFF"/>
+                          </a:solidFill>
+                        </a:rPr>
+                        <a:t>sem reuso (KB)</a:t>
+                      </a:r>
+                    </a:p>
+                  </a:txBody>
+                  <a:tcPr>
+                    <a:solidFill>
+                      <a:srgbClr val="1D4ED8"/>
+                    </a:solidFill>
+                  </a:tcPr>
+                </a:tc>
+                <a:tc>
+                  <a:txBody>
+                    <a:bodyPr/>
+                    <a:lstStyle/>
+                    <a:p>
+                      <a:pPr algn="ctr"/>
+                      <a:r>
+                        <a:rPr sz="1100" b="1">
+                          <a:solidFill>
+                            <a:srgbClr val="FFFFFF"/>
+                          </a:solidFill>
+                        </a:rPr>
+                        <a:t>com reuso (KB)</a:t>
+                      </a:r>
+                    </a:p>
+                  </a:txBody>
+                  <a:tcPr>
+                    <a:solidFill>
+                      <a:srgbClr val="1D4ED8"/>
+                    </a:solidFill>
+                  </a:tcPr>
+                </a:tc>
+                <a:tc>
+                  <a:txBody>
+                    <a:bodyPr/>
+                    <a:lstStyle/>
+                    <a:p>
+                      <a:pPr algn="ctr"/>
+                      <a:r>
+                        <a:rPr sz="1100" b="1">
+                          <a:solidFill>
+                            <a:srgbClr val="FFFFFF"/>
+                          </a:solidFill>
+                        </a:rPr>
+                        <a:t>economia</a:t>
+                      </a:r>
+                    </a:p>
+                  </a:txBody>
+                  <a:tcPr>
+                    <a:solidFill>
+                      <a:srgbClr val="1D4ED8"/>
+                    </a:solidFill>
+                  </a:tcPr>
+                </a:tc>
+              </a:tr>
+              <a:tr h="653142">
+                <a:tc>
+                  <a:txBody>
+                    <a:bodyPr/>
+                    <a:lstStyle/>
+                    <a:p>
+                      <a:pPr algn="l"/>
+                      <a:r>
+                        <a:rPr sz="1000">
+                          <a:solidFill>
+                            <a:srgbClr val="111827"/>
+                          </a:solidFill>
+                        </a:rPr>
+                        <a:t>3</a:t>
+                      </a:r>
+                    </a:p>
+                  </a:txBody>
+                  <a:tcPr>
+                    <a:solidFill>
+                      <a:srgbClr val="FFFFFF"/>
+                    </a:solidFill>
+                  </a:tcPr>
+                </a:tc>
+                <a:tc>
+                  <a:txBody>
+                    <a:bodyPr/>
+                    <a:lstStyle/>
+                    <a:p>
+                      <a:pPr algn="ctr"/>
+                      <a:r>
+                        <a:rPr sz="1000">
+                          <a:solidFill>
+                            <a:srgbClr val="111827"/>
+                          </a:solidFill>
+                        </a:rPr>
+                        <a:t>10,000</a:t>
+                      </a:r>
+                    </a:p>
+                  </a:txBody>
+                  <a:tcPr>
+                    <a:solidFill>
+                      <a:srgbClr val="FFFFFF"/>
+                    </a:solidFill>
+                  </a:tcPr>
+                </a:tc>
+                <a:tc>
+                  <a:txBody>
+                    <a:bodyPr/>
+                    <a:lstStyle/>
+                    <a:p>
+                      <a:pPr algn="ctr"/>
+                      <a:r>
+                        <a:rPr sz="1000">
+                          <a:solidFill>
+                            <a:srgbClr val="111827"/>
+                          </a:solidFill>
+                        </a:rPr>
+                        <a:t>342</a:t>
+                      </a:r>
+                    </a:p>
+                  </a:txBody>
+                  <a:tcPr>
+                    <a:solidFill>
+                      <a:srgbClr val="FFFFFF"/>
+                    </a:solidFill>
+                  </a:tcPr>
+                </a:tc>
+                <a:tc>
+                  <a:txBody>
+                    <a:bodyPr/>
+                    <a:lstStyle/>
+                    <a:p>
+                      <a:pPr algn="ctr"/>
+                      <a:r>
+                        <a:rPr sz="1000">
+                          <a:solidFill>
+                            <a:srgbClr val="111827"/>
+                          </a:solidFill>
+                        </a:rPr>
+                        <a:t>241</a:t>
+                      </a:r>
+                    </a:p>
+                  </a:txBody>
+                  <a:tcPr>
+                    <a:solidFill>
+                      <a:srgbClr val="FFFFFF"/>
+                    </a:solidFill>
+                  </a:tcPr>
+                </a:tc>
+                <a:tc>
+                  <a:txBody>
+                    <a:bodyPr/>
+                    <a:lstStyle/>
+                    <a:p>
+                      <a:pPr algn="ctr"/>
+                      <a:r>
+                        <a:rPr sz="1000">
+                          <a:solidFill>
+                            <a:srgbClr val="111827"/>
+                          </a:solidFill>
+                        </a:rPr>
+                        <a:t>30%</a:t>
+                      </a:r>
+                    </a:p>
+                  </a:txBody>
+                  <a:tcPr>
+                    <a:solidFill>
+                      <a:srgbClr val="FFFFFF"/>
+                    </a:solidFill>
+                  </a:tcPr>
+                </a:tc>
+              </a:tr>
+              <a:tr h="653142">
+                <a:tc>
+                  <a:txBody>
+                    <a:bodyPr/>
+                    <a:lstStyle/>
+                    <a:p>
+                      <a:pPr algn="l"/>
+                      <a:r>
+                        <a:rPr sz="1000">
+                          <a:solidFill>
+                            <a:srgbClr val="111827"/>
+                          </a:solidFill>
+                        </a:rPr>
+                        <a:t>3</a:t>
+                      </a:r>
+                    </a:p>
+                  </a:txBody>
+                  <a:tcPr>
+                    <a:solidFill>
+                      <a:srgbClr val="EEF2FF"/>
+                    </a:solidFill>
+                  </a:tcPr>
+                </a:tc>
+                <a:tc>
+                  <a:txBody>
+                    <a:bodyPr/>
+                    <a:lstStyle/>
+                    <a:p>
+                      <a:pPr algn="ctr"/>
+                      <a:r>
+                        <a:rPr sz="1000">
+                          <a:solidFill>
+                            <a:srgbClr val="111827"/>
+                          </a:solidFill>
+                        </a:rPr>
+                        <a:t>100,000</a:t>
+                      </a:r>
+                    </a:p>
+                  </a:txBody>
+                  <a:tcPr>
+                    <a:solidFill>
+                      <a:srgbClr val="EEF2FF"/>
+                    </a:solidFill>
+                  </a:tcPr>
+                </a:tc>
+                <a:tc>
+                  <a:txBody>
+                    <a:bodyPr/>
+                    <a:lstStyle/>
+                    <a:p>
+                      <a:pPr algn="ctr"/>
+                      <a:r>
+                        <a:rPr sz="1000">
+                          <a:solidFill>
+                            <a:srgbClr val="111827"/>
+                          </a:solidFill>
+                        </a:rPr>
+                        <a:t>3,407</a:t>
+                      </a:r>
+                    </a:p>
+                  </a:txBody>
+                  <a:tcPr>
+                    <a:solidFill>
+                      <a:srgbClr val="EEF2FF"/>
+                    </a:solidFill>
+                  </a:tcPr>
+                </a:tc>
+                <a:tc>
+                  <a:txBody>
+                    <a:bodyPr/>
+                    <a:lstStyle/>
+                    <a:p>
+                      <a:pPr algn="ctr"/>
+                      <a:r>
+                        <a:rPr sz="1000">
+                          <a:solidFill>
+                            <a:srgbClr val="111827"/>
+                          </a:solidFill>
+                        </a:rPr>
+                        <a:t>2,404</a:t>
+                      </a:r>
+                    </a:p>
+                  </a:txBody>
+                  <a:tcPr>
+                    <a:solidFill>
+                      <a:srgbClr val="EEF2FF"/>
+                    </a:solidFill>
+                  </a:tcPr>
+                </a:tc>
+                <a:tc>
+                  <a:txBody>
+                    <a:bodyPr/>
+                    <a:lstStyle/>
+                    <a:p>
+                      <a:pPr algn="ctr"/>
+                      <a:r>
+                        <a:rPr sz="1000">
+                          <a:solidFill>
+                            <a:srgbClr val="111827"/>
+                          </a:solidFill>
+                        </a:rPr>
+                        <a:t>29%</a:t>
+                      </a:r>
+                    </a:p>
+                  </a:txBody>
+                  <a:tcPr>
+                    <a:solidFill>
+                      <a:srgbClr val="EEF2FF"/>
+                    </a:solidFill>
+                  </a:tcPr>
+                </a:tc>
+              </a:tr>
+              <a:tr h="653142">
+                <a:tc>
+                  <a:txBody>
+                    <a:bodyPr/>
+                    <a:lstStyle/>
+                    <a:p>
+                      <a:pPr algn="l"/>
+                      <a:r>
+                        <a:rPr sz="1000">
+                          <a:solidFill>
+                            <a:srgbClr val="111827"/>
+                          </a:solidFill>
+                        </a:rPr>
+                        <a:t>5</a:t>
+                      </a:r>
+                    </a:p>
+                  </a:txBody>
+                  <a:tcPr>
+                    <a:solidFill>
+                      <a:srgbClr val="FFFFFF"/>
+                    </a:solidFill>
+                  </a:tcPr>
+                </a:tc>
+                <a:tc>
+                  <a:txBody>
+                    <a:bodyPr/>
+                    <a:lstStyle/>
+                    <a:p>
+                      <a:pPr algn="ctr"/>
+                      <a:r>
+                        <a:rPr sz="1000">
+                          <a:solidFill>
+                            <a:srgbClr val="111827"/>
+                          </a:solidFill>
+                        </a:rPr>
+                        <a:t>10,000</a:t>
+                      </a:r>
+                    </a:p>
+                  </a:txBody>
+                  <a:tcPr>
+                    <a:solidFill>
+                      <a:srgbClr val="FFFFFF"/>
+                    </a:solidFill>
+                  </a:tcPr>
+                </a:tc>
+                <a:tc>
+                  <a:txBody>
+                    <a:bodyPr/>
+                    <a:lstStyle/>
+                    <a:p>
+                      <a:pPr algn="ctr"/>
+                      <a:r>
+                        <a:rPr sz="1000">
+                          <a:solidFill>
+                            <a:srgbClr val="111827"/>
+                          </a:solidFill>
+                        </a:rPr>
+                        <a:t>266</a:t>
+                      </a:r>
+                    </a:p>
+                  </a:txBody>
+                  <a:tcPr>
+                    <a:solidFill>
+                      <a:srgbClr val="FFFFFF"/>
+                    </a:solidFill>
+                  </a:tcPr>
+                </a:tc>
+                <a:tc>
+                  <a:txBody>
+                    <a:bodyPr/>
+                    <a:lstStyle/>
+                    <a:p>
+                      <a:pPr algn="ctr"/>
+                      <a:r>
+                        <a:rPr sz="1000">
+                          <a:solidFill>
+                            <a:srgbClr val="111827"/>
+                          </a:solidFill>
+                        </a:rPr>
+                        <a:t>190</a:t>
+                      </a:r>
+                    </a:p>
+                  </a:txBody>
+                  <a:tcPr>
+                    <a:solidFill>
+                      <a:srgbClr val="FFFFFF"/>
+                    </a:solidFill>
+                  </a:tcPr>
+                </a:tc>
+                <a:tc>
+                  <a:txBody>
+                    <a:bodyPr/>
+                    <a:lstStyle/>
+                    <a:p>
+                      <a:pPr algn="ctr"/>
+                      <a:r>
+                        <a:rPr sz="1000">
+                          <a:solidFill>
+                            <a:srgbClr val="111827"/>
+                          </a:solidFill>
+                        </a:rPr>
+                        <a:t>29%</a:t>
+                      </a:r>
+                    </a:p>
+                  </a:txBody>
+                  <a:tcPr>
+                    <a:solidFill>
+                      <a:srgbClr val="FFFFFF"/>
+                    </a:solidFill>
+                  </a:tcPr>
+                </a:tc>
+              </a:tr>
+              <a:tr h="653142">
+                <a:tc>
+                  <a:txBody>
+                    <a:bodyPr/>
+                    <a:lstStyle/>
+                    <a:p>
+                      <a:pPr algn="l"/>
+                      <a:r>
+                        <a:rPr sz="1000">
+                          <a:solidFill>
+                            <a:srgbClr val="111827"/>
+                          </a:solidFill>
+                        </a:rPr>
+                        <a:t>5</a:t>
+                      </a:r>
+                    </a:p>
+                  </a:txBody>
+                  <a:tcPr>
+                    <a:solidFill>
+                      <a:srgbClr val="EEF2FF"/>
+                    </a:solidFill>
+                  </a:tcPr>
+                </a:tc>
+                <a:tc>
+                  <a:txBody>
+                    <a:bodyPr/>
+                    <a:lstStyle/>
+                    <a:p>
+                      <a:pPr algn="ctr"/>
+                      <a:r>
+                        <a:rPr sz="1000">
+                          <a:solidFill>
+                            <a:srgbClr val="111827"/>
+                          </a:solidFill>
+                        </a:rPr>
+                        <a:t>100,000</a:t>
+                      </a:r>
+                    </a:p>
+                  </a:txBody>
+                  <a:tcPr>
+                    <a:solidFill>
+                      <a:srgbClr val="EEF2FF"/>
+                    </a:solidFill>
+                  </a:tcPr>
+                </a:tc>
+                <a:tc>
+                  <a:txBody>
+                    <a:bodyPr/>
+                    <a:lstStyle/>
+                    <a:p>
+                      <a:pPr algn="ctr"/>
+                      <a:r>
+                        <a:rPr sz="1000">
+                          <a:solidFill>
+                            <a:srgbClr val="111827"/>
+                          </a:solidFill>
+                        </a:rPr>
+                        <a:t>2,663</a:t>
+                      </a:r>
+                    </a:p>
+                  </a:txBody>
+                  <a:tcPr>
+                    <a:solidFill>
+                      <a:srgbClr val="EEF2FF"/>
+                    </a:solidFill>
+                  </a:tcPr>
+                </a:tc>
+                <a:tc>
+                  <a:txBody>
+                    <a:bodyPr/>
+                    <a:lstStyle/>
+                    <a:p>
+                      <a:pPr algn="ctr"/>
+                      <a:r>
+                        <a:rPr sz="1000">
+                          <a:solidFill>
+                            <a:srgbClr val="111827"/>
+                          </a:solidFill>
+                        </a:rPr>
+                        <a:t>1,905</a:t>
+                      </a:r>
+                    </a:p>
+                  </a:txBody>
+                  <a:tcPr>
+                    <a:solidFill>
+                      <a:srgbClr val="EEF2FF"/>
+                    </a:solidFill>
+                  </a:tcPr>
+                </a:tc>
+                <a:tc>
+                  <a:txBody>
+                    <a:bodyPr/>
+                    <a:lstStyle/>
+                    <a:p>
+                      <a:pPr algn="ctr"/>
+                      <a:r>
+                        <a:rPr sz="1000">
+                          <a:solidFill>
+                            <a:srgbClr val="111827"/>
+                          </a:solidFill>
+                        </a:rPr>
+                        <a:t>28%</a:t>
+                      </a:r>
+                    </a:p>
+                  </a:txBody>
+                  <a:tcPr>
+                    <a:solidFill>
+                      <a:srgbClr val="EEF2FF"/>
+                    </a:solidFill>
+                  </a:tcPr>
+                </a:tc>
+              </a:tr>
+              <a:tr h="653142">
+                <a:tc>
+                  <a:txBody>
+                    <a:bodyPr/>
+                    <a:lstStyle/>
+                    <a:p>
+                      <a:pPr algn="l"/>
+                      <a:r>
+                        <a:rPr sz="1000">
+                          <a:solidFill>
+                            <a:srgbClr val="111827"/>
+                          </a:solidFill>
+                        </a:rPr>
+                        <a:t>100</a:t>
+                      </a:r>
+                    </a:p>
+                  </a:txBody>
+                  <a:tcPr>
+                    <a:solidFill>
+                      <a:srgbClr val="FFFFFF"/>
+                    </a:solidFill>
+                  </a:tcPr>
+                </a:tc>
+                <a:tc>
+                  <a:txBody>
+                    <a:bodyPr/>
+                    <a:lstStyle/>
+                    <a:p>
+                      <a:pPr algn="ctr"/>
+                      <a:r>
+                        <a:rPr sz="1000">
+                          <a:solidFill>
+                            <a:srgbClr val="111827"/>
+                          </a:solidFill>
+                        </a:rPr>
+                        <a:t>10,000</a:t>
+                      </a:r>
+                    </a:p>
+                  </a:txBody>
+                  <a:tcPr>
+                    <a:solidFill>
+                      <a:srgbClr val="FFFFFF"/>
+                    </a:solidFill>
+                  </a:tcPr>
+                </a:tc>
+                <a:tc>
+                  <a:txBody>
+                    <a:bodyPr/>
+                    <a:lstStyle/>
+                    <a:p>
+                      <a:pPr algn="ctr"/>
+                      <a:r>
+                        <a:rPr sz="1000">
+                          <a:solidFill>
+                            <a:srgbClr val="111827"/>
+                          </a:solidFill>
+                        </a:rPr>
+                        <a:t>196</a:t>
+                      </a:r>
+                    </a:p>
+                  </a:txBody>
+                  <a:tcPr>
+                    <a:solidFill>
+                      <a:srgbClr val="FFFFFF"/>
+                    </a:solidFill>
+                  </a:tcPr>
+                </a:tc>
+                <a:tc>
+                  <a:txBody>
+                    <a:bodyPr/>
+                    <a:lstStyle/>
+                    <a:p>
+                      <a:pPr algn="ctr"/>
+                      <a:r>
+                        <a:rPr sz="1000">
+                          <a:solidFill>
+                            <a:srgbClr val="111827"/>
+                          </a:solidFill>
+                        </a:rPr>
+                        <a:t>144</a:t>
+                      </a:r>
+                    </a:p>
+                  </a:txBody>
+                  <a:tcPr>
+                    <a:solidFill>
+                      <a:srgbClr val="FFFFFF"/>
+                    </a:solidFill>
+                  </a:tcPr>
+                </a:tc>
+                <a:tc>
+                  <a:txBody>
+                    <a:bodyPr/>
+                    <a:lstStyle/>
+                    <a:p>
+                      <a:pPr algn="ctr"/>
+                      <a:r>
+                        <a:rPr sz="1000">
+                          <a:solidFill>
+                            <a:srgbClr val="111827"/>
+                          </a:solidFill>
+                        </a:rPr>
+                        <a:t>27%</a:t>
+                      </a:r>
+                    </a:p>
+                  </a:txBody>
+                  <a:tcPr>
+                    <a:solidFill>
+                      <a:srgbClr val="FFFFFF"/>
+                    </a:solidFill>
+                  </a:tcPr>
+                </a:tc>
+              </a:tr>
+              <a:tr h="653148">
+                <a:tc>
+                  <a:txBody>
+                    <a:bodyPr/>
+                    <a:lstStyle/>
+                    <a:p>
+                      <a:pPr algn="l"/>
+                      <a:r>
+                        <a:rPr sz="1000">
+                          <a:solidFill>
+                            <a:srgbClr val="111827"/>
+                          </a:solidFill>
+                        </a:rPr>
+                        <a:t>100</a:t>
+                      </a:r>
+                    </a:p>
+                  </a:txBody>
+                  <a:tcPr>
+                    <a:solidFill>
+                      <a:srgbClr val="EEF2FF"/>
+                    </a:solidFill>
+                  </a:tcPr>
+                </a:tc>
+                <a:tc>
+                  <a:txBody>
+                    <a:bodyPr/>
+                    <a:lstStyle/>
+                    <a:p>
+                      <a:pPr algn="ctr"/>
+                      <a:r>
+                        <a:rPr sz="1000">
+                          <a:solidFill>
+                            <a:srgbClr val="111827"/>
+                          </a:solidFill>
+                        </a:rPr>
+                        <a:t>100,000</a:t>
+                      </a:r>
+                    </a:p>
+                  </a:txBody>
+                  <a:tcPr>
+                    <a:solidFill>
+                      <a:srgbClr val="EEF2FF"/>
+                    </a:solidFill>
+                  </a:tcPr>
+                </a:tc>
+                <a:tc>
+                  <a:txBody>
+                    <a:bodyPr/>
+                    <a:lstStyle/>
+                    <a:p>
+                      <a:pPr algn="ctr"/>
+                      <a:r>
+                        <a:rPr sz="1000">
+                          <a:solidFill>
+                            <a:srgbClr val="111827"/>
+                          </a:solidFill>
+                        </a:rPr>
+                        <a:t>1,931</a:t>
+                      </a:r>
+                    </a:p>
+                  </a:txBody>
+                  <a:tcPr>
+                    <a:solidFill>
+                      <a:srgbClr val="EEF2FF"/>
+                    </a:solidFill>
+                  </a:tcPr>
+                </a:tc>
+                <a:tc>
+                  <a:txBody>
+                    <a:bodyPr/>
+                    <a:lstStyle/>
+                    <a:p>
+                      <a:pPr algn="ctr"/>
+                      <a:r>
+                        <a:rPr sz="1000">
+                          <a:solidFill>
+                            <a:srgbClr val="111827"/>
+                          </a:solidFill>
+                        </a:rPr>
+                        <a:t>1,404</a:t>
+                      </a:r>
+                    </a:p>
+                  </a:txBody>
+                  <a:tcPr>
+                    <a:solidFill>
+                      <a:srgbClr val="EEF2FF"/>
+                    </a:solidFill>
+                  </a:tcPr>
+                </a:tc>
+                <a:tc>
+                  <a:txBody>
+                    <a:bodyPr/>
+                    <a:lstStyle/>
+                    <a:p>
+                      <a:pPr algn="ctr"/>
+                      <a:r>
+                        <a:rPr sz="1000">
+                          <a:solidFill>
+                            <a:srgbClr val="111827"/>
+                          </a:solidFill>
+                        </a:rPr>
+                        <a:t>27%</a:t>
+                      </a:r>
+                    </a:p>
+                  </a:txBody>
+                  <a:tcPr>
+                    <a:solidFill>
+                      <a:srgbClr val="EEF2FF"/>
+                    </a:solidFill>
+                  </a:tcPr>
+                </a:tc>
+              </a:tr>
+            </a:tbl>
+          </a:graphicData>
+        </a:graphic>
+      </p:graphicFrame>
+      <p:pic>
+        <p:nvPicPr>
+          <p:cNvPr id="5" name="Picture 4" descr="chart_reuse.png"/>
+          <p:cNvPicPr>
+            <a:picLocks noChangeAspect="1"/>
+          </p:cNvPicPr>
+          <p:nvPr/>
+        </p:nvPicPr>
+        <p:blipFill>
+          <a:blip r:embed="rId2"/>
+          <a:stretch>
+            <a:fillRect/>
+          </a:stretch>
+        </p:blipFill>
+        <p:spPr>
+          <a:xfrm>
+            <a:off x="5989320" y="1280160"/>
+            <a:ext cx="5943600" cy="3307457"/>
+          </a:xfrm>
+          <a:prstGeom prst="rect">
+            <a:avLst/>
+          </a:prstGeom>
+        </p:spPr>
+      </p:pic>
+      <p:sp>
+        <p:nvSpPr>
+          <p:cNvPr id="6" name="TextBox 5"/>
+          <p:cNvSpPr txBox="1"/>
+          <p:nvPr/>
+        </p:nvSpPr>
+        <p:spPr>
+          <a:xfrm>
+            <a:off x="365760" y="5989320"/>
+            <a:ext cx="11430000" cy="457200"/>
+          </a:xfrm>
+          <a:prstGeom prst="rect">
+            <a:avLst/>
+          </a:prstGeom>
+          <a:noFill/>
+        </p:spPr>
+        <p:txBody>
+          <a:bodyPr wrap="square" anchor="t">
+            <a:spAutoFit/>
+          </a:bodyPr>
+          <a:lstStyle/>
+          <a:p>
+            <a:pPr>
+              <a:spcAft>
+                <a:spcPts val="600"/>
+              </a:spcAft>
+            </a:pPr>
+            <a:r>
+              <a:rPr sz="1100" b="0">
+                <a:solidFill>
+                  <a:srgbClr val="6B7280"/>
+                </a:solidFill>
+                <a:latin typeface="Calibri"/>
+              </a:rPr>
+              <a:t>O reaproveitamento de nós economiza ~27-30% do tamanho do arquivo neste workload.</a:t>
+            </a:r>
+          </a:p>
+        </p:txBody>
+      </p:sp>
+      <p:sp>
+        <p:nvSpPr>
+          <p:cNvPr id="7" name="TextBox 6"/>
+          <p:cNvSpPr txBox="1"/>
+          <p:nvPr/>
+        </p:nvSpPr>
+        <p:spPr>
+          <a:xfrm>
+            <a:off x="457200" y="6455664"/>
+            <a:ext cx="11247120" cy="310896"/>
+          </a:xfrm>
+          <a:prstGeom prst="rect">
+            <a:avLst/>
+          </a:prstGeom>
+          <a:noFill/>
+        </p:spPr>
+        <p:txBody>
+          <a:bodyPr wrap="square" anchor="t">
+            <a:spAutoFit/>
+          </a:bodyPr>
+          <a:lstStyle/>
+          <a:p>
+            <a:pPr>
+              <a:spcAft>
+                <a:spcPts val="600"/>
+              </a:spcAft>
+            </a:pPr>
+            <a:r>
+              <a:rPr sz="900" b="0">
+                <a:solidFill>
+                  <a:srgbClr val="6B7280"/>
+                </a:solidFill>
+                <a:latin typeface="Calibri"/>
+              </a:rPr>
+              <a:t>Árvore B em Memória Secundária — AED-PG-2026          8/12</a:t>
+            </a:r>
+          </a:p>
+        </p:txBody>
+      </p:sp>
+    </p:spTree>
+  </p:cSld>
+  <p:clrMapOvr>
+    <a:masterClrMapping/>
+  </p:clrMapOvr>
+</p:sld>
+</file>
+
+<file path=ppt/slides/slide9.xml><?xml version="1.0" encoding="utf-8"?>
+<p:sld xmlns:a="http://schemas.openxmlformats.org/drawingml/2006/main" xmlns:p="http://schemas.openxmlformats.org/presentationml/2006/main" xmlns:r="http://schemas.openxmlformats.org/officeDocument/2006/relationships">
+  <p:cSld>
+    <p:spTree>
+      <p:nvGrpSpPr>
+        <p:cNvPr id="1" name=""/>
+        <p:cNvGrpSpPr/>
+        <p:nvPr/>
+      </p:nvGrpSpPr>
+      <p:grpSpPr/>
+      <p:sp>
+        <p:nvSpPr>
+          <p:cNvPr id="2" name="Rectangle 1"/>
+          <p:cNvSpPr/>
+          <p:nvPr/>
+        </p:nvSpPr>
+        <p:spPr>
+          <a:xfrm>
+            <a:off x="0" y="0"/>
+            <a:ext cx="12191695" cy="868680"/>
+          </a:xfrm>
+          <a:prstGeom prst="rect">
+            <a:avLst/>
+          </a:prstGeom>
+          <a:solidFill>
+            <a:srgbClr val="1D4ED8"/>
+          </a:solidFill>
+          <a:ln>
+            <a:noFill/>
+          </a:ln>
+        </p:spPr>
+        <p:style>
+          <a:lnRef idx="1">
+            <a:schemeClr val="accent1"/>
+          </a:lnRef>
+          <a:fillRef idx="3">
+            <a:schemeClr val="accent1"/>
+          </a:fillRef>
+          <a:effectRef idx="2">
+            <a:schemeClr val="accent1"/>
+          </a:effectRef>
+          <a:fontRef idx="minor">
+            <a:schemeClr val="lt1"/>
+          </a:fontRef>
+        </p:style>
+        <p:txBody>
+          <a:bodyPr rtlCol="0" anchor="ctr"/>
+          <a:lstStyle/>
+          <a:p>
+            <a:pPr algn="ctr"/>
+          </a:p>
+        </p:txBody>
+      </p:sp>
+      <p:sp>
+        <p:nvSpPr>
+          <p:cNvPr id="3" name="TextBox 2"/>
+          <p:cNvSpPr txBox="1"/>
+          <p:nvPr/>
+        </p:nvSpPr>
+        <p:spPr>
+          <a:xfrm>
+            <a:off x="457200" y="109728"/>
+            <a:ext cx="11247120" cy="658368"/>
+          </a:xfrm>
+          <a:prstGeom prst="rect">
+            <a:avLst/>
+          </a:prstGeom>
+          <a:noFill/>
+        </p:spPr>
+        <p:txBody>
+          <a:bodyPr wrap="square" anchor="ctr">
+            <a:spAutoFit/>
+          </a:bodyPr>
+          <a:lstStyle/>
+          <a:p>
+            <a:pPr>
+              <a:spcAft>
+                <a:spcPts val="600"/>
+              </a:spcAft>
+            </a:pPr>
+            <a:r>
+              <a:rPr sz="2300" b="1">
+                <a:solidFill>
+                  <a:srgbClr val="FFFFFF"/>
+                </a:solidFill>
+                <a:latin typeface="Calibri"/>
+              </a:rPr>
+              <a:t>7. Utilização de LLM</a:t>
+            </a:r>
+          </a:p>
+        </p:txBody>
+      </p:sp>
+      <p:sp>
+        <p:nvSpPr>
+          <p:cNvPr id="4" name="TextBox 3"/>
+          <p:cNvSpPr txBox="1"/>
+          <p:nvPr/>
+        </p:nvSpPr>
+        <p:spPr>
+          <a:xfrm>
+            <a:off x="457200" y="1051560"/>
+            <a:ext cx="5852160" cy="5303520"/>
+          </a:xfrm>
+          <a:prstGeom prst="rect">
+            <a:avLst/>
+          </a:prstGeom>
+          <a:noFill/>
+        </p:spPr>
+        <p:txBody>
+          <a:bodyPr wrap="square" anchor="t">
+            <a:spAutoFit/>
+          </a:bodyPr>
+          <a:lstStyle/>
+          <a:p>
+            <a:pPr>
+              <a:spcAft>
+                <a:spcPts val="600"/>
+              </a:spcAft>
+            </a:pPr>
+            <a:r>
+              <a:rPr sz="1400" b="0">
+                <a:solidFill>
+                  <a:srgbClr val="111827"/>
+                </a:solidFill>
+                <a:latin typeface="Calibri"/>
+              </a:rPr>
+              <a:t>•  Ferramenta: Claude (Anthropic) via Claude Code CLI - auxílio ao desenvolvimento.</a:t>
+            </a:r>
+          </a:p>
+          <a:p>
+            <a:pPr>
+              <a:spcAft>
+                <a:spcPts val="600"/>
+              </a:spcAft>
+            </a:pPr>
+            <a:r>
+              <a:rPr sz="1400" b="0">
+                <a:solidFill>
+                  <a:srgbClr val="111827"/>
+                </a:solidFill>
+                <a:latin typeface="Calibri"/>
+              </a:rPr>
+              <a:t>•  Síntese e discussão dos pseudocódigos dos slides do professor.</a:t>
+            </a:r>
+          </a:p>
+          <a:p>
+            <a:pPr>
+              <a:spcAft>
+                <a:spcPts val="600"/>
+              </a:spcAft>
+            </a:pPr>
+            <a:r>
+              <a:rPr sz="1400" b="0">
+                <a:solidFill>
+                  <a:srgbClr val="111827"/>
+                </a:solidFill>
+                <a:latin typeface="Calibri"/>
+              </a:rPr>
+              <a:t>•  Identificação e correção de 2 bugs: (1) stale-header em insertB; (2) eofbit do fstream.</a:t>
+            </a:r>
+          </a:p>
+          <a:p>
+            <a:pPr>
+              <a:spcAft>
+                <a:spcPts val="600"/>
+              </a:spcAft>
+            </a:pPr>
+            <a:r>
+              <a:rPr sz="1400" b="0">
+                <a:solidFill>
+                  <a:srgbClr val="111827"/>
+                </a:solidFill>
+                <a:latin typeface="Calibri"/>
+              </a:rPr>
+              <a:t>•  Geração do harness experimental, tabelas, gráficos e desta apresentação.</a:t>
+            </a:r>
+          </a:p>
+          <a:p>
+            <a:pPr>
+              <a:spcAft>
+                <a:spcPts val="600"/>
+              </a:spcAft>
+            </a:pPr>
+            <a:r>
+              <a:rPr sz="1400" b="0">
+                <a:solidFill>
+                  <a:srgbClr val="111827"/>
+                </a:solidFill>
+                <a:latin typeface="Calibri"/>
+              </a:rPr>
+              <a:t>•  Todo o código foi revisado e validado manualmente pelo autor.</a:t>
+            </a:r>
+          </a:p>
+        </p:txBody>
+      </p:sp>
+      <p:pic>
+        <p:nvPicPr>
+          <p:cNvPr id="5" name="Picture 4" descr="chart_machines.png"/>
+          <p:cNvPicPr>
+            <a:picLocks noChangeAspect="1"/>
+          </p:cNvPicPr>
+          <p:nvPr/>
+        </p:nvPicPr>
+        <p:blipFill>
+          <a:blip r:embed="rId2"/>
+          <a:stretch>
+            <a:fillRect/>
+          </a:stretch>
+        </p:blipFill>
+        <p:spPr>
+          <a:xfrm>
+            <a:off x="6355080" y="1371600"/>
+            <a:ext cx="5577840" cy="3103921"/>
+          </a:xfrm>
+          <a:prstGeom prst="rect">
+            <a:avLst/>
+          </a:prstGeom>
+        </p:spPr>
+      </p:pic>
+      <p:sp>
+        <p:nvSpPr>
+          <p:cNvPr id="6" name="TextBox 5"/>
+          <p:cNvSpPr txBox="1"/>
+          <p:nvPr/>
+        </p:nvSpPr>
+        <p:spPr>
+          <a:xfrm>
+            <a:off x="457200" y="6455664"/>
+            <a:ext cx="11247120" cy="310896"/>
+          </a:xfrm>
+          <a:prstGeom prst="rect">
+            <a:avLst/>
+          </a:prstGeom>
+          <a:noFill/>
+        </p:spPr>
+        <p:txBody>
+          <a:bodyPr wrap="square" anchor="t">
+            <a:spAutoFit/>
+          </a:bodyPr>
+          <a:lstStyle/>
+          <a:p>
+            <a:pPr>
+              <a:spcAft>
+                <a:spcPts val="600"/>
+              </a:spcAft>
+            </a:pPr>
+            <a:r>
+              <a:rPr sz="900" b="0">
+                <a:solidFill>
+                  <a:srgbClr val="6B7280"/>
+                </a:solidFill>
+                <a:latin typeface="Calibri"/>
+              </a:rPr>
+              <a:t>Árvore B em Memória Secundária — AED-PG-2026          9/12</a:t>
             </a:r>
           </a:p>
         </p:txBody>

--- a/apresentacao/APRESENTACAO.pptx
+++ b/apresentacao/APRESENTACAO.pptx
@@ -8717,7 +8717,7 @@
                 </a:solidFill>
                 <a:latin typeface="Calibri"/>
               </a:rPr>
-              <a:t>7. Utilização de LLM</a:t>
+              <a:t>7. Validação em duas máquinas</a:t>
             </a:r>
           </a:p>
         </p:txBody>
@@ -8756,7 +8756,7 @@
                 </a:solidFill>
                 <a:latin typeface="Calibri"/>
               </a:rPr>
-              <a:t>•  Ferramenta: Claude (Anthropic) via Claude Code CLI - auxílio ao desenvolvimento.</a:t>
+              <a:t>•  Execução em duas máquinas: Notebook x Titan (USP).</a:t>
             </a:r>
           </a:p>
           <a:p>
@@ -8772,7 +8772,7 @@
                 </a:solidFill>
                 <a:latin typeface="Calibri"/>
               </a:rPr>
-              <a:t>•  Síntese e discussão dos pseudocódigos dos slides do professor.</a:t>
+              <a:t>•  Acessos a disco IDÊNTICOS nas duas — resultado determinístico, independente do hardware.</a:t>
             </a:r>
           </a:p>
           <a:p>
@@ -8788,7 +8788,7 @@
                 </a:solidFill>
                 <a:latin typeface="Calibri"/>
               </a:rPr>
-              <a:t>•  Identificação e correção de 2 bugs: (1) stale-header em insertB; (2) eofbit do fstream.</a:t>
+              <a:t>•  Apenas o tempo de execução varia (CPU, disco e carga da máquina).</a:t>
             </a:r>
           </a:p>
           <a:p>
@@ -8804,23 +8804,7 @@
                 </a:solidFill>
                 <a:latin typeface="Calibri"/>
               </a:rPr>
-              <a:t>•  Geração do harness experimental, tabelas, gráficos e desta apresentação.</a:t>
-            </a:r>
-          </a:p>
-          <a:p>
-            <a:pPr>
-              <a:spcAft>
-                <a:spcPts val="600"/>
-              </a:spcAft>
-            </a:pPr>
-            <a:r>
-              <a:rPr sz="1400" b="0">
-                <a:solidFill>
-                  <a:srgbClr val="111827"/>
-                </a:solidFill>
-                <a:latin typeface="Calibri"/>
-              </a:rPr>
-              <a:t>•  Todo o código foi revisado e validado manualmente pelo autor.</a:t>
+              <a:t>•  Comparação automatizada via compare.py a partir dos CSVs de cada máquina.</a:t>
             </a:r>
           </a:p>
         </p:txBody>

--- a/apresentacao/APRESENTACAO.pptx
+++ b/apresentacao/APRESENTACAO.pptx
@@ -8788,7 +8788,7 @@
                 </a:solidFill>
                 <a:latin typeface="Calibri"/>
               </a:rPr>
-              <a:t>•  Apenas o tempo de execução varia (CPU, disco e carga da máquina).</a:t>
+              <a:t>•  Apenas o tempo varia: wall time (inclui espera de I/O e carga) e tempo de CPU (user+sys, só o trabalho do processo).</a:t>
             </a:r>
           </a:p>
           <a:p>

--- a/apresentacao/APRESENTACAO.pptx
+++ b/apresentacao/APRESENTACAO.pptx
@@ -14033,15 +14033,10 @@
                 </a:solidFill>
                 <a:latin typeface="Calibri"/>
               </a:rPr>
-              <a:t>Claude (IA) — apoio, NÃO o autor</a:t>
-            </a:r>
-          </a:p>
-          <a:p>
-            <a:pPr>
-              <a:spcAft>
-                <a:spcPts val="500"/>
-              </a:spcAft>
-            </a:pPr>
+              <a:t>Processo &amp; reprodutibilidade</a:t>
+            </a:r>
+          </a:p>
+          <a:p>
             <a:r>
               <a:rPr sz="1250" b="0">
                 <a:solidFill>
@@ -14049,15 +14044,10 @@
                 </a:solidFill>
                 <a:latin typeface="Calibri"/>
               </a:rPr>
-              <a:t>•  Usado como assistente de apoio, revisão e incremento — a lógica da Árvore B (busca, split, remoção) é autoral.</a:t>
-            </a:r>
-          </a:p>
-          <a:p>
-            <a:pPr>
-              <a:spcAft>
-                <a:spcPts val="500"/>
-              </a:spcAft>
-            </a:pPr>
+              <a:t>•  Versionamento com Git</a:t>
+            </a:r>
+          </a:p>
+          <a:p>
             <a:r>
               <a:rPr sz="1250" b="0">
                 <a:solidFill>
@@ -14065,15 +14055,10 @@
                 </a:solidFill>
                 <a:latin typeface="Calibri"/>
               </a:rPr>
-              <a:t>•  Apoiou no desenho do MENU interativo (organização das opções e mensagens).</a:t>
-            </a:r>
-          </a:p>
-          <a:p>
-            <a:pPr>
-              <a:spcAft>
-                <a:spcPts val="500"/>
-              </a:spcAft>
-            </a:pPr>
+              <a:t>•  Experimentos reprodutíveis (CSV)</a:t>
+            </a:r>
+          </a:p>
+          <a:p>
             <a:r>
               <a:rPr sz="1250" b="0">
                 <a:solidFill>
@@ -14081,15 +14066,10 @@
                 </a:solidFill>
                 <a:latin typeface="Calibri"/>
               </a:rPr>
-              <a:t>•  Apoiou na EXPORTAÇÃO DE GRAFOS (integração com Graphviz) e nos scripts de gráficos/GIF.</a:t>
-            </a:r>
-          </a:p>
-          <a:p>
-            <a:pPr>
-              <a:spcAft>
-                <a:spcPts val="500"/>
-              </a:spcAft>
-            </a:pPr>
+              <a:t>•  Build parametrizável: make M=&lt;ordem&gt;</a:t>
+            </a:r>
+          </a:p>
+          <a:p>
             <a:r>
               <a:rPr sz="1250" b="0">
                 <a:solidFill>
@@ -14097,39 +14077,7 @@
                 </a:solidFill>
                 <a:latin typeface="Calibri"/>
               </a:rPr>
-              <a:t>•  Revisão de código e de texto: clareza dos comentários, consistência e checagem de erros.</a:t>
-            </a:r>
-          </a:p>
-          <a:p>
-            <a:pPr>
-              <a:spcAft>
-                <a:spcPts val="500"/>
-              </a:spcAft>
-            </a:pPr>
-            <a:r>
-              <a:rPr sz="1250" b="0">
-                <a:solidFill>
-                  <a:srgbClr val="111827"/>
-                </a:solidFill>
-                <a:latin typeface="Calibri"/>
-              </a:rPr>
-              <a:t>•  Incrementos de apresentação: estes slides, o roteiro e as tabelas foram gerados/revisados com apoio da IA.</a:t>
-            </a:r>
-          </a:p>
-          <a:p>
-            <a:pPr>
-              <a:spcAft>
-                <a:spcPts val="500"/>
-              </a:spcAft>
-            </a:pPr>
-            <a:r>
-              <a:rPr sz="1250" b="0">
-                <a:solidFill>
-                  <a:srgbClr val="111827"/>
-                </a:solidFill>
-                <a:latin typeface="Calibri"/>
-              </a:rPr>
-              <a:t>•  Princípio: a IA acelerou ferramentas acessórias; o entendimento e as decisões do trabalho são nossos.</a:t>
+              <a:t>•  Validação cruzada em 2 máquinas</a:t>
             </a:r>
           </a:p>
         </p:txBody>
